--- a/backend/templates/pptx/modern_clean.pptx
+++ b/backend/templates/pptx/modern_clean.pptx
@@ -1749,7 +1749,7 @@
               <a:buNone/>
             </a:pPr>
             <a:r>
-              <a:rPr lang="en-US" sz="4200" b="1" dirty="0">
+              <a:rPr lang="en-US" sz="4000" b="1" dirty="0">
                 <a:solidFill>
                   <a:srgbClr val="0F172A"/>
                 </a:solidFill>
@@ -1759,7 +1759,7 @@
               </a:rPr>
               <a:t>{{client_name}}</a:t>
             </a:r>
-            <a:endParaRPr lang="en-US" sz="4200" dirty="0"/>
+            <a:endParaRPr lang="en-US" sz="4000" dirty="0"/>
           </a:p>
         </p:txBody>
       </p:sp>
@@ -1788,7 +1788,7 @@
               <a:buNone/>
             </a:pPr>
             <a:r>
-              <a:rPr lang="en-US" sz="1600" dirty="0">
+              <a:rPr lang="en-US" sz="1400" dirty="0">
                 <a:solidFill>
                   <a:srgbClr val="64748B"/>
                 </a:solidFill>
@@ -1798,7 +1798,7 @@
               </a:rPr>
               <a:t>{{report_period}}</a:t>
             </a:r>
-            <a:endParaRPr lang="en-US" sz="1600" dirty="0"/>
+            <a:endParaRPr lang="en-US" sz="1400" dirty="0"/>
           </a:p>
         </p:txBody>
       </p:sp>
@@ -1827,7 +1827,7 @@
               <a:buNone/>
             </a:pPr>
             <a:r>
-              <a:rPr lang="en-US" sz="1300" dirty="0">
+              <a:rPr lang="en-US" sz="1200" dirty="0">
                 <a:solidFill>
                   <a:srgbClr val="94A3B8"/>
                 </a:solidFill>
@@ -1837,7 +1837,7 @@
               </a:rPr>
               <a:t>{{report_type}}</a:t>
             </a:r>
-            <a:endParaRPr lang="en-US" sz="1300" dirty="0"/>
+            <a:endParaRPr lang="en-US" sz="1200" dirty="0"/>
           </a:p>
         </p:txBody>
       </p:sp>
@@ -2058,7 +2058,7 @@
               <a:buNone/>
             </a:pPr>
             <a:r>
-              <a:rPr lang="en-US" sz="1300" dirty="0">
+              <a:rPr lang="en-US" sz="1200" dirty="0">
                 <a:solidFill>
                   <a:srgbClr val="334155"/>
                 </a:solidFill>
@@ -2068,7 +2068,7 @@
               </a:rPr>
               <a:t>{{executive_summary}}</a:t>
             </a:r>
-            <a:endParaRPr lang="en-US" sz="1300" dirty="0"/>
+            <a:endParaRPr lang="en-US" sz="1200" dirty="0"/>
           </a:p>
         </p:txBody>
       </p:sp>
@@ -2313,7 +2313,7 @@
               <a:buNone/>
             </a:pPr>
             <a:r>
-              <a:rPr lang="en-US" sz="3000" b="1" dirty="0">
+              <a:rPr lang="en-US" sz="3200" b="1" dirty="0">
                 <a:solidFill>
                   <a:srgbClr val="0F172A"/>
                 </a:solidFill>
@@ -2323,7 +2323,7 @@
               </a:rPr>
               <a:t>{{kpi_0_value}}</a:t>
             </a:r>
-            <a:endParaRPr lang="en-US" sz="3000" dirty="0"/>
+            <a:endParaRPr lang="en-US" sz="3200" dirty="0"/>
           </a:p>
         </p:txBody>
       </p:sp>
@@ -2477,7 +2477,7 @@
               <a:buNone/>
             </a:pPr>
             <a:r>
-              <a:rPr lang="en-US" sz="3000" b="1" dirty="0">
+              <a:rPr lang="en-US" sz="3200" b="1" dirty="0">
                 <a:solidFill>
                   <a:srgbClr val="0F172A"/>
                 </a:solidFill>
@@ -2487,7 +2487,7 @@
               </a:rPr>
               <a:t>{{kpi_1_value}}</a:t>
             </a:r>
-            <a:endParaRPr lang="en-US" sz="3000" dirty="0"/>
+            <a:endParaRPr lang="en-US" sz="3200" dirty="0"/>
           </a:p>
         </p:txBody>
       </p:sp>
@@ -2641,7 +2641,7 @@
               <a:buNone/>
             </a:pPr>
             <a:r>
-              <a:rPr lang="en-US" sz="3000" b="1" dirty="0">
+              <a:rPr lang="en-US" sz="3200" b="1" dirty="0">
                 <a:solidFill>
                   <a:srgbClr val="0F172A"/>
                 </a:solidFill>
@@ -2651,7 +2651,7 @@
               </a:rPr>
               <a:t>{{kpi_2_value}}</a:t>
             </a:r>
-            <a:endParaRPr lang="en-US" sz="3000" dirty="0"/>
+            <a:endParaRPr lang="en-US" sz="3200" dirty="0"/>
           </a:p>
         </p:txBody>
       </p:sp>
@@ -2805,7 +2805,7 @@
               <a:buNone/>
             </a:pPr>
             <a:r>
-              <a:rPr lang="en-US" sz="3000" b="1" dirty="0">
+              <a:rPr lang="en-US" sz="3200" b="1" dirty="0">
                 <a:solidFill>
                   <a:srgbClr val="0F172A"/>
                 </a:solidFill>
@@ -2815,7 +2815,7 @@
               </a:rPr>
               <a:t>{{kpi_3_value}}</a:t>
             </a:r>
-            <a:endParaRPr lang="en-US" sz="3000" dirty="0"/>
+            <a:endParaRPr lang="en-US" sz="3200" dirty="0"/>
           </a:p>
         </p:txBody>
       </p:sp>
@@ -2969,7 +2969,7 @@
               <a:buNone/>
             </a:pPr>
             <a:r>
-              <a:rPr lang="en-US" sz="3000" b="1" dirty="0">
+              <a:rPr lang="en-US" sz="3200" b="1" dirty="0">
                 <a:solidFill>
                   <a:srgbClr val="0F172A"/>
                 </a:solidFill>
@@ -2979,7 +2979,7 @@
               </a:rPr>
               <a:t>{{kpi_4_value}}</a:t>
             </a:r>
-            <a:endParaRPr lang="en-US" sz="3000" dirty="0"/>
+            <a:endParaRPr lang="en-US" sz="3200" dirty="0"/>
           </a:p>
         </p:txBody>
       </p:sp>
@@ -3133,7 +3133,7 @@
               <a:buNone/>
             </a:pPr>
             <a:r>
-              <a:rPr lang="en-US" sz="3000" b="1" dirty="0">
+              <a:rPr lang="en-US" sz="3200" b="1" dirty="0">
                 <a:solidFill>
                   <a:srgbClr val="0F172A"/>
                 </a:solidFill>
@@ -3143,7 +3143,7 @@
               </a:rPr>
               <a:t>{{kpi_5_value}}</a:t>
             </a:r>
-            <a:endParaRPr lang="en-US" sz="3000" dirty="0"/>
+            <a:endParaRPr lang="en-US" sz="3200" dirty="0"/>
           </a:p>
         </p:txBody>
       </p:sp>
@@ -3972,7 +3972,7 @@
               <a:buNone/>
             </a:pPr>
             <a:r>
-              <a:rPr lang="en-US" sz="1300" dirty="0">
+              <a:rPr lang="en-US" sz="1200" dirty="0">
                 <a:solidFill>
                   <a:srgbClr val="334155"/>
                 </a:solidFill>
@@ -3982,7 +3982,7 @@
               </a:rPr>
               <a:t>{{key_wins}}</a:t>
             </a:r>
-            <a:endParaRPr lang="en-US" sz="1300" dirty="0"/>
+            <a:endParaRPr lang="en-US" sz="1200" dirty="0"/>
           </a:p>
         </p:txBody>
       </p:sp>
@@ -4164,7 +4164,7 @@
               <a:buNone/>
             </a:pPr>
             <a:r>
-              <a:rPr lang="en-US" sz="1300" dirty="0">
+              <a:rPr lang="en-US" sz="1200" dirty="0">
                 <a:solidFill>
                   <a:srgbClr val="334155"/>
                 </a:solidFill>
@@ -4174,7 +4174,7 @@
               </a:rPr>
               <a:t>{{concerns}}</a:t>
             </a:r>
-            <a:endParaRPr lang="en-US" sz="1300" dirty="0"/>
+            <a:endParaRPr lang="en-US" sz="1200" dirty="0"/>
           </a:p>
         </p:txBody>
       </p:sp>
@@ -4336,7 +4336,7 @@
               <a:buNone/>
             </a:pPr>
             <a:r>
-              <a:rPr lang="en-US" sz="1300" dirty="0">
+              <a:rPr lang="en-US" sz="1200" dirty="0">
                 <a:solidFill>
                   <a:srgbClr val="334155"/>
                 </a:solidFill>
@@ -4346,7 +4346,7 @@
               </a:rPr>
               <a:t>{{next_steps}}</a:t>
             </a:r>
-            <a:endParaRPr lang="en-US" sz="1300" dirty="0"/>
+            <a:endParaRPr lang="en-US" sz="1200" dirty="0"/>
           </a:p>
         </p:txBody>
       </p:sp>
@@ -4567,7 +4567,7 @@
               <a:buNone/>
             </a:pPr>
             <a:r>
-              <a:rPr lang="en-US" sz="1300" dirty="0">
+              <a:rPr lang="en-US" sz="1200" dirty="0">
                 <a:solidFill>
                   <a:srgbClr val="334155"/>
                 </a:solidFill>
@@ -4577,7 +4577,7 @@
               </a:rPr>
               <a:t>{{custom_section_text}}</a:t>
             </a:r>
-            <a:endParaRPr lang="en-US" sz="1300" dirty="0"/>
+            <a:endParaRPr lang="en-US" sz="1200" dirty="0"/>
           </a:p>
         </p:txBody>
       </p:sp>

--- a/backend/templates/pptx/modern_clean.pptx
+++ b/backend/templates/pptx/modern_clean.pptx
@@ -14,9 +14,19 @@
     <p:sldId id="262" r:id="rId8"/>
     <p:sldId id="263" r:id="rId9"/>
     <p:sldId id="264" r:id="rId10"/>
+    <p:sldId id="265" r:id="rId11"/>
+    <p:sldId id="266" r:id="rId12"/>
+    <p:sldId id="267" r:id="rId13"/>
+    <p:sldId id="268" r:id="rId14"/>
+    <p:sldId id="269" r:id="rId15"/>
+    <p:sldId id="270" r:id="rId16"/>
+    <p:sldId id="271" r:id="rId17"/>
+    <p:sldId id="272" r:id="rId18"/>
+    <p:sldId id="273" r:id="rId19"/>
+    <p:sldId id="274" r:id="rId20"/>
   </p:sldIdLst>
   <p:notesMasterIdLst>
-    <p:notesMasterId r:id="rId11"/>
+    <p:notesMasterId r:id="rId21"/>
   </p:notesMasterIdLst>
   <p:sldSz cx="12192000" cy="6858000"/>
   <p:notesSz cx="6858000" cy="12192000"/>
@@ -534,6 +544,886 @@
             <a:fld id="{F7021451-1387-4CA6-816F-3879F97B5CBC}" type="slidenum">
               <a:rPr lang="en-US"/>
               <a:t>1</a:t>
+            </a:fld>
+            <a:endParaRPr lang="en-US"/>
+          </a:p>
+        </p:txBody>
+      </p:sp>
+    </p:spTree>
+    <p:extLst>
+      <p:ext uri="{BB962C8B-B14F-4D97-AF65-F5344CB8AC3E}">
+        <p14:creationId xmlns:p14="http://schemas.microsoft.com/office/powerpoint/2010/main" val="1024086991"/>
+      </p:ext>
+    </p:extLst>
+  </p:cSld>
+  <p:clrMapOvr>
+    <a:masterClrMapping/>
+  </p:clrMapOvr>
+</p:notes>
+</file>
+
+<file path=ppt/notesSlides/notesSlide10.xml><?xml version="1.0" encoding="utf-8"?>
+<p:notes xmlns:a="http://schemas.openxmlformats.org/drawingml/2006/main" xmlns:r="http://schemas.openxmlformats.org/officeDocument/2006/relationships" xmlns:p="http://schemas.openxmlformats.org/presentationml/2006/main">
+  <p:cSld>
+    <p:spTree>
+      <p:nvGrpSpPr>
+        <p:cNvPr id="1" name=""/>
+        <p:cNvGrpSpPr/>
+        <p:nvPr/>
+      </p:nvGrpSpPr>
+      <p:grpSpPr>
+        <a:xfrm>
+          <a:off x="0" y="0"/>
+          <a:ext cx="0" cy="0"/>
+          <a:chOff x="0" y="0"/>
+          <a:chExt cx="0" cy="0"/>
+        </a:xfrm>
+      </p:grpSpPr>
+      <p:sp>
+        <p:nvSpPr>
+          <p:cNvPr id="2" name="Slide Image Placeholder 1"/>
+          <p:cNvSpPr>
+            <a:spLocks noGrp="1" noRot="1" noChangeAspect="1"/>
+          </p:cNvSpPr>
+          <p:nvPr>
+            <p:ph type="sldImg"/>
+          </p:nvPr>
+        </p:nvSpPr>
+        <p:spPr/>
+      </p:sp>
+      <p:sp>
+        <p:nvSpPr>
+          <p:cNvPr id="3" name="Notes Placeholder 2"/>
+          <p:cNvSpPr>
+            <a:spLocks noGrp="1"/>
+          </p:cNvSpPr>
+          <p:nvPr>
+            <p:ph type="body" idx="1"/>
+          </p:nvPr>
+        </p:nvSpPr>
+        <p:spPr/>
+        <p:txBody>
+          <a:bodyPr/>
+          <a:lstStyle/>
+          <a:p>
+            <a:r>
+              <a:rPr lang="en-US" dirty="0"/>
+              <a:t/>
+            </a:r>
+            <a:endParaRPr lang="en-US" dirty="0"/>
+          </a:p>
+        </p:txBody>
+      </p:sp>
+      <p:sp>
+        <p:nvSpPr>
+          <p:cNvPr id="4" name="Slide Number Placeholder 3"/>
+          <p:cNvSpPr>
+            <a:spLocks noGrp="1"/>
+          </p:cNvSpPr>
+          <p:nvPr>
+            <p:ph type="sldNum" sz="quarter" idx="10"/>
+          </p:nvPr>
+        </p:nvSpPr>
+        <p:spPr/>
+        <p:txBody>
+          <a:bodyPr/>
+          <a:lstStyle/>
+          <a:p>
+            <a:fld id="{F7021451-1387-4CA6-816F-3879F97B5CBC}" type="slidenum">
+              <a:rPr lang="en-US"/>
+              <a:t>10</a:t>
+            </a:fld>
+            <a:endParaRPr lang="en-US"/>
+          </a:p>
+        </p:txBody>
+      </p:sp>
+    </p:spTree>
+    <p:extLst>
+      <p:ext uri="{BB962C8B-B14F-4D97-AF65-F5344CB8AC3E}">
+        <p14:creationId xmlns:p14="http://schemas.microsoft.com/office/powerpoint/2010/main" val="1024086991"/>
+      </p:ext>
+    </p:extLst>
+  </p:cSld>
+  <p:clrMapOvr>
+    <a:masterClrMapping/>
+  </p:clrMapOvr>
+</p:notes>
+</file>
+
+<file path=ppt/notesSlides/notesSlide11.xml><?xml version="1.0" encoding="utf-8"?>
+<p:notes xmlns:a="http://schemas.openxmlformats.org/drawingml/2006/main" xmlns:r="http://schemas.openxmlformats.org/officeDocument/2006/relationships" xmlns:p="http://schemas.openxmlformats.org/presentationml/2006/main">
+  <p:cSld>
+    <p:spTree>
+      <p:nvGrpSpPr>
+        <p:cNvPr id="1" name=""/>
+        <p:cNvGrpSpPr/>
+        <p:nvPr/>
+      </p:nvGrpSpPr>
+      <p:grpSpPr>
+        <a:xfrm>
+          <a:off x="0" y="0"/>
+          <a:ext cx="0" cy="0"/>
+          <a:chOff x="0" y="0"/>
+          <a:chExt cx="0" cy="0"/>
+        </a:xfrm>
+      </p:grpSpPr>
+      <p:sp>
+        <p:nvSpPr>
+          <p:cNvPr id="2" name="Slide Image Placeholder 1"/>
+          <p:cNvSpPr>
+            <a:spLocks noGrp="1" noRot="1" noChangeAspect="1"/>
+          </p:cNvSpPr>
+          <p:nvPr>
+            <p:ph type="sldImg"/>
+          </p:nvPr>
+        </p:nvSpPr>
+        <p:spPr/>
+      </p:sp>
+      <p:sp>
+        <p:nvSpPr>
+          <p:cNvPr id="3" name="Notes Placeholder 2"/>
+          <p:cNvSpPr>
+            <a:spLocks noGrp="1"/>
+          </p:cNvSpPr>
+          <p:nvPr>
+            <p:ph type="body" idx="1"/>
+          </p:nvPr>
+        </p:nvSpPr>
+        <p:spPr/>
+        <p:txBody>
+          <a:bodyPr/>
+          <a:lstStyle/>
+          <a:p>
+            <a:r>
+              <a:rPr lang="en-US" dirty="0"/>
+              <a:t/>
+            </a:r>
+            <a:endParaRPr lang="en-US" dirty="0"/>
+          </a:p>
+        </p:txBody>
+      </p:sp>
+      <p:sp>
+        <p:nvSpPr>
+          <p:cNvPr id="4" name="Slide Number Placeholder 3"/>
+          <p:cNvSpPr>
+            <a:spLocks noGrp="1"/>
+          </p:cNvSpPr>
+          <p:nvPr>
+            <p:ph type="sldNum" sz="quarter" idx="10"/>
+          </p:nvPr>
+        </p:nvSpPr>
+        <p:spPr/>
+        <p:txBody>
+          <a:bodyPr/>
+          <a:lstStyle/>
+          <a:p>
+            <a:fld id="{F7021451-1387-4CA6-816F-3879F97B5CBC}" type="slidenum">
+              <a:rPr lang="en-US"/>
+              <a:t>11</a:t>
+            </a:fld>
+            <a:endParaRPr lang="en-US"/>
+          </a:p>
+        </p:txBody>
+      </p:sp>
+    </p:spTree>
+    <p:extLst>
+      <p:ext uri="{BB962C8B-B14F-4D97-AF65-F5344CB8AC3E}">
+        <p14:creationId xmlns:p14="http://schemas.microsoft.com/office/powerpoint/2010/main" val="1024086991"/>
+      </p:ext>
+    </p:extLst>
+  </p:cSld>
+  <p:clrMapOvr>
+    <a:masterClrMapping/>
+  </p:clrMapOvr>
+</p:notes>
+</file>
+
+<file path=ppt/notesSlides/notesSlide12.xml><?xml version="1.0" encoding="utf-8"?>
+<p:notes xmlns:a="http://schemas.openxmlformats.org/drawingml/2006/main" xmlns:r="http://schemas.openxmlformats.org/officeDocument/2006/relationships" xmlns:p="http://schemas.openxmlformats.org/presentationml/2006/main">
+  <p:cSld>
+    <p:spTree>
+      <p:nvGrpSpPr>
+        <p:cNvPr id="1" name=""/>
+        <p:cNvGrpSpPr/>
+        <p:nvPr/>
+      </p:nvGrpSpPr>
+      <p:grpSpPr>
+        <a:xfrm>
+          <a:off x="0" y="0"/>
+          <a:ext cx="0" cy="0"/>
+          <a:chOff x="0" y="0"/>
+          <a:chExt cx="0" cy="0"/>
+        </a:xfrm>
+      </p:grpSpPr>
+      <p:sp>
+        <p:nvSpPr>
+          <p:cNvPr id="2" name="Slide Image Placeholder 1"/>
+          <p:cNvSpPr>
+            <a:spLocks noGrp="1" noRot="1" noChangeAspect="1"/>
+          </p:cNvSpPr>
+          <p:nvPr>
+            <p:ph type="sldImg"/>
+          </p:nvPr>
+        </p:nvSpPr>
+        <p:spPr/>
+      </p:sp>
+      <p:sp>
+        <p:nvSpPr>
+          <p:cNvPr id="3" name="Notes Placeholder 2"/>
+          <p:cNvSpPr>
+            <a:spLocks noGrp="1"/>
+          </p:cNvSpPr>
+          <p:nvPr>
+            <p:ph type="body" idx="1"/>
+          </p:nvPr>
+        </p:nvSpPr>
+        <p:spPr/>
+        <p:txBody>
+          <a:bodyPr/>
+          <a:lstStyle/>
+          <a:p>
+            <a:r>
+              <a:rPr lang="en-US" dirty="0"/>
+              <a:t/>
+            </a:r>
+            <a:endParaRPr lang="en-US" dirty="0"/>
+          </a:p>
+        </p:txBody>
+      </p:sp>
+      <p:sp>
+        <p:nvSpPr>
+          <p:cNvPr id="4" name="Slide Number Placeholder 3"/>
+          <p:cNvSpPr>
+            <a:spLocks noGrp="1"/>
+          </p:cNvSpPr>
+          <p:nvPr>
+            <p:ph type="sldNum" sz="quarter" idx="10"/>
+          </p:nvPr>
+        </p:nvSpPr>
+        <p:spPr/>
+        <p:txBody>
+          <a:bodyPr/>
+          <a:lstStyle/>
+          <a:p>
+            <a:fld id="{F7021451-1387-4CA6-816F-3879F97B5CBC}" type="slidenum">
+              <a:rPr lang="en-US"/>
+              <a:t>12</a:t>
+            </a:fld>
+            <a:endParaRPr lang="en-US"/>
+          </a:p>
+        </p:txBody>
+      </p:sp>
+    </p:spTree>
+    <p:extLst>
+      <p:ext uri="{BB962C8B-B14F-4D97-AF65-F5344CB8AC3E}">
+        <p14:creationId xmlns:p14="http://schemas.microsoft.com/office/powerpoint/2010/main" val="1024086991"/>
+      </p:ext>
+    </p:extLst>
+  </p:cSld>
+  <p:clrMapOvr>
+    <a:masterClrMapping/>
+  </p:clrMapOvr>
+</p:notes>
+</file>
+
+<file path=ppt/notesSlides/notesSlide13.xml><?xml version="1.0" encoding="utf-8"?>
+<p:notes xmlns:a="http://schemas.openxmlformats.org/drawingml/2006/main" xmlns:r="http://schemas.openxmlformats.org/officeDocument/2006/relationships" xmlns:p="http://schemas.openxmlformats.org/presentationml/2006/main">
+  <p:cSld>
+    <p:spTree>
+      <p:nvGrpSpPr>
+        <p:cNvPr id="1" name=""/>
+        <p:cNvGrpSpPr/>
+        <p:nvPr/>
+      </p:nvGrpSpPr>
+      <p:grpSpPr>
+        <a:xfrm>
+          <a:off x="0" y="0"/>
+          <a:ext cx="0" cy="0"/>
+          <a:chOff x="0" y="0"/>
+          <a:chExt cx="0" cy="0"/>
+        </a:xfrm>
+      </p:grpSpPr>
+      <p:sp>
+        <p:nvSpPr>
+          <p:cNvPr id="2" name="Slide Image Placeholder 1"/>
+          <p:cNvSpPr>
+            <a:spLocks noGrp="1" noRot="1" noChangeAspect="1"/>
+          </p:cNvSpPr>
+          <p:nvPr>
+            <p:ph type="sldImg"/>
+          </p:nvPr>
+        </p:nvSpPr>
+        <p:spPr/>
+      </p:sp>
+      <p:sp>
+        <p:nvSpPr>
+          <p:cNvPr id="3" name="Notes Placeholder 2"/>
+          <p:cNvSpPr>
+            <a:spLocks noGrp="1"/>
+          </p:cNvSpPr>
+          <p:nvPr>
+            <p:ph type="body" idx="1"/>
+          </p:nvPr>
+        </p:nvSpPr>
+        <p:spPr/>
+        <p:txBody>
+          <a:bodyPr/>
+          <a:lstStyle/>
+          <a:p>
+            <a:r>
+              <a:rPr lang="en-US" dirty="0"/>
+              <a:t/>
+            </a:r>
+            <a:endParaRPr lang="en-US" dirty="0"/>
+          </a:p>
+        </p:txBody>
+      </p:sp>
+      <p:sp>
+        <p:nvSpPr>
+          <p:cNvPr id="4" name="Slide Number Placeholder 3"/>
+          <p:cNvSpPr>
+            <a:spLocks noGrp="1"/>
+          </p:cNvSpPr>
+          <p:nvPr>
+            <p:ph type="sldNum" sz="quarter" idx="10"/>
+          </p:nvPr>
+        </p:nvSpPr>
+        <p:spPr/>
+        <p:txBody>
+          <a:bodyPr/>
+          <a:lstStyle/>
+          <a:p>
+            <a:fld id="{F7021451-1387-4CA6-816F-3879F97B5CBC}" type="slidenum">
+              <a:rPr lang="en-US"/>
+              <a:t>13</a:t>
+            </a:fld>
+            <a:endParaRPr lang="en-US"/>
+          </a:p>
+        </p:txBody>
+      </p:sp>
+    </p:spTree>
+    <p:extLst>
+      <p:ext uri="{BB962C8B-B14F-4D97-AF65-F5344CB8AC3E}">
+        <p14:creationId xmlns:p14="http://schemas.microsoft.com/office/powerpoint/2010/main" val="1024086991"/>
+      </p:ext>
+    </p:extLst>
+  </p:cSld>
+  <p:clrMapOvr>
+    <a:masterClrMapping/>
+  </p:clrMapOvr>
+</p:notes>
+</file>
+
+<file path=ppt/notesSlides/notesSlide14.xml><?xml version="1.0" encoding="utf-8"?>
+<p:notes xmlns:a="http://schemas.openxmlformats.org/drawingml/2006/main" xmlns:r="http://schemas.openxmlformats.org/officeDocument/2006/relationships" xmlns:p="http://schemas.openxmlformats.org/presentationml/2006/main">
+  <p:cSld>
+    <p:spTree>
+      <p:nvGrpSpPr>
+        <p:cNvPr id="1" name=""/>
+        <p:cNvGrpSpPr/>
+        <p:nvPr/>
+      </p:nvGrpSpPr>
+      <p:grpSpPr>
+        <a:xfrm>
+          <a:off x="0" y="0"/>
+          <a:ext cx="0" cy="0"/>
+          <a:chOff x="0" y="0"/>
+          <a:chExt cx="0" cy="0"/>
+        </a:xfrm>
+      </p:grpSpPr>
+      <p:sp>
+        <p:nvSpPr>
+          <p:cNvPr id="2" name="Slide Image Placeholder 1"/>
+          <p:cNvSpPr>
+            <a:spLocks noGrp="1" noRot="1" noChangeAspect="1"/>
+          </p:cNvSpPr>
+          <p:nvPr>
+            <p:ph type="sldImg"/>
+          </p:nvPr>
+        </p:nvSpPr>
+        <p:spPr/>
+      </p:sp>
+      <p:sp>
+        <p:nvSpPr>
+          <p:cNvPr id="3" name="Notes Placeholder 2"/>
+          <p:cNvSpPr>
+            <a:spLocks noGrp="1"/>
+          </p:cNvSpPr>
+          <p:nvPr>
+            <p:ph type="body" idx="1"/>
+          </p:nvPr>
+        </p:nvSpPr>
+        <p:spPr/>
+        <p:txBody>
+          <a:bodyPr/>
+          <a:lstStyle/>
+          <a:p>
+            <a:r>
+              <a:rPr lang="en-US" dirty="0"/>
+              <a:t/>
+            </a:r>
+            <a:endParaRPr lang="en-US" dirty="0"/>
+          </a:p>
+        </p:txBody>
+      </p:sp>
+      <p:sp>
+        <p:nvSpPr>
+          <p:cNvPr id="4" name="Slide Number Placeholder 3"/>
+          <p:cNvSpPr>
+            <a:spLocks noGrp="1"/>
+          </p:cNvSpPr>
+          <p:nvPr>
+            <p:ph type="sldNum" sz="quarter" idx="10"/>
+          </p:nvPr>
+        </p:nvSpPr>
+        <p:spPr/>
+        <p:txBody>
+          <a:bodyPr/>
+          <a:lstStyle/>
+          <a:p>
+            <a:fld id="{F7021451-1387-4CA6-816F-3879F97B5CBC}" type="slidenum">
+              <a:rPr lang="en-US"/>
+              <a:t>14</a:t>
+            </a:fld>
+            <a:endParaRPr lang="en-US"/>
+          </a:p>
+        </p:txBody>
+      </p:sp>
+    </p:spTree>
+    <p:extLst>
+      <p:ext uri="{BB962C8B-B14F-4D97-AF65-F5344CB8AC3E}">
+        <p14:creationId xmlns:p14="http://schemas.microsoft.com/office/powerpoint/2010/main" val="1024086991"/>
+      </p:ext>
+    </p:extLst>
+  </p:cSld>
+  <p:clrMapOvr>
+    <a:masterClrMapping/>
+  </p:clrMapOvr>
+</p:notes>
+</file>
+
+<file path=ppt/notesSlides/notesSlide15.xml><?xml version="1.0" encoding="utf-8"?>
+<p:notes xmlns:a="http://schemas.openxmlformats.org/drawingml/2006/main" xmlns:r="http://schemas.openxmlformats.org/officeDocument/2006/relationships" xmlns:p="http://schemas.openxmlformats.org/presentationml/2006/main">
+  <p:cSld>
+    <p:spTree>
+      <p:nvGrpSpPr>
+        <p:cNvPr id="1" name=""/>
+        <p:cNvGrpSpPr/>
+        <p:nvPr/>
+      </p:nvGrpSpPr>
+      <p:grpSpPr>
+        <a:xfrm>
+          <a:off x="0" y="0"/>
+          <a:ext cx="0" cy="0"/>
+          <a:chOff x="0" y="0"/>
+          <a:chExt cx="0" cy="0"/>
+        </a:xfrm>
+      </p:grpSpPr>
+      <p:sp>
+        <p:nvSpPr>
+          <p:cNvPr id="2" name="Slide Image Placeholder 1"/>
+          <p:cNvSpPr>
+            <a:spLocks noGrp="1" noRot="1" noChangeAspect="1"/>
+          </p:cNvSpPr>
+          <p:nvPr>
+            <p:ph type="sldImg"/>
+          </p:nvPr>
+        </p:nvSpPr>
+        <p:spPr/>
+      </p:sp>
+      <p:sp>
+        <p:nvSpPr>
+          <p:cNvPr id="3" name="Notes Placeholder 2"/>
+          <p:cNvSpPr>
+            <a:spLocks noGrp="1"/>
+          </p:cNvSpPr>
+          <p:nvPr>
+            <p:ph type="body" idx="1"/>
+          </p:nvPr>
+        </p:nvSpPr>
+        <p:spPr/>
+        <p:txBody>
+          <a:bodyPr/>
+          <a:lstStyle/>
+          <a:p>
+            <a:r>
+              <a:rPr lang="en-US" dirty="0"/>
+              <a:t/>
+            </a:r>
+            <a:endParaRPr lang="en-US" dirty="0"/>
+          </a:p>
+        </p:txBody>
+      </p:sp>
+      <p:sp>
+        <p:nvSpPr>
+          <p:cNvPr id="4" name="Slide Number Placeholder 3"/>
+          <p:cNvSpPr>
+            <a:spLocks noGrp="1"/>
+          </p:cNvSpPr>
+          <p:nvPr>
+            <p:ph type="sldNum" sz="quarter" idx="10"/>
+          </p:nvPr>
+        </p:nvSpPr>
+        <p:spPr/>
+        <p:txBody>
+          <a:bodyPr/>
+          <a:lstStyle/>
+          <a:p>
+            <a:fld id="{F7021451-1387-4CA6-816F-3879F97B5CBC}" type="slidenum">
+              <a:rPr lang="en-US"/>
+              <a:t>15</a:t>
+            </a:fld>
+            <a:endParaRPr lang="en-US"/>
+          </a:p>
+        </p:txBody>
+      </p:sp>
+    </p:spTree>
+    <p:extLst>
+      <p:ext uri="{BB962C8B-B14F-4D97-AF65-F5344CB8AC3E}">
+        <p14:creationId xmlns:p14="http://schemas.microsoft.com/office/powerpoint/2010/main" val="1024086991"/>
+      </p:ext>
+    </p:extLst>
+  </p:cSld>
+  <p:clrMapOvr>
+    <a:masterClrMapping/>
+  </p:clrMapOvr>
+</p:notes>
+</file>
+
+<file path=ppt/notesSlides/notesSlide16.xml><?xml version="1.0" encoding="utf-8"?>
+<p:notes xmlns:a="http://schemas.openxmlformats.org/drawingml/2006/main" xmlns:r="http://schemas.openxmlformats.org/officeDocument/2006/relationships" xmlns:p="http://schemas.openxmlformats.org/presentationml/2006/main">
+  <p:cSld>
+    <p:spTree>
+      <p:nvGrpSpPr>
+        <p:cNvPr id="1" name=""/>
+        <p:cNvGrpSpPr/>
+        <p:nvPr/>
+      </p:nvGrpSpPr>
+      <p:grpSpPr>
+        <a:xfrm>
+          <a:off x="0" y="0"/>
+          <a:ext cx="0" cy="0"/>
+          <a:chOff x="0" y="0"/>
+          <a:chExt cx="0" cy="0"/>
+        </a:xfrm>
+      </p:grpSpPr>
+      <p:sp>
+        <p:nvSpPr>
+          <p:cNvPr id="2" name="Slide Image Placeholder 1"/>
+          <p:cNvSpPr>
+            <a:spLocks noGrp="1" noRot="1" noChangeAspect="1"/>
+          </p:cNvSpPr>
+          <p:nvPr>
+            <p:ph type="sldImg"/>
+          </p:nvPr>
+        </p:nvSpPr>
+        <p:spPr/>
+      </p:sp>
+      <p:sp>
+        <p:nvSpPr>
+          <p:cNvPr id="3" name="Notes Placeholder 2"/>
+          <p:cNvSpPr>
+            <a:spLocks noGrp="1"/>
+          </p:cNvSpPr>
+          <p:nvPr>
+            <p:ph type="body" idx="1"/>
+          </p:nvPr>
+        </p:nvSpPr>
+        <p:spPr/>
+        <p:txBody>
+          <a:bodyPr/>
+          <a:lstStyle/>
+          <a:p>
+            <a:r>
+              <a:rPr lang="en-US" dirty="0"/>
+              <a:t/>
+            </a:r>
+            <a:endParaRPr lang="en-US" dirty="0"/>
+          </a:p>
+        </p:txBody>
+      </p:sp>
+      <p:sp>
+        <p:nvSpPr>
+          <p:cNvPr id="4" name="Slide Number Placeholder 3"/>
+          <p:cNvSpPr>
+            <a:spLocks noGrp="1"/>
+          </p:cNvSpPr>
+          <p:nvPr>
+            <p:ph type="sldNum" sz="quarter" idx="10"/>
+          </p:nvPr>
+        </p:nvSpPr>
+        <p:spPr/>
+        <p:txBody>
+          <a:bodyPr/>
+          <a:lstStyle/>
+          <a:p>
+            <a:fld id="{F7021451-1387-4CA6-816F-3879F97B5CBC}" type="slidenum">
+              <a:rPr lang="en-US"/>
+              <a:t>16</a:t>
+            </a:fld>
+            <a:endParaRPr lang="en-US"/>
+          </a:p>
+        </p:txBody>
+      </p:sp>
+    </p:spTree>
+    <p:extLst>
+      <p:ext uri="{BB962C8B-B14F-4D97-AF65-F5344CB8AC3E}">
+        <p14:creationId xmlns:p14="http://schemas.microsoft.com/office/powerpoint/2010/main" val="1024086991"/>
+      </p:ext>
+    </p:extLst>
+  </p:cSld>
+  <p:clrMapOvr>
+    <a:masterClrMapping/>
+  </p:clrMapOvr>
+</p:notes>
+</file>
+
+<file path=ppt/notesSlides/notesSlide17.xml><?xml version="1.0" encoding="utf-8"?>
+<p:notes xmlns:a="http://schemas.openxmlformats.org/drawingml/2006/main" xmlns:r="http://schemas.openxmlformats.org/officeDocument/2006/relationships" xmlns:p="http://schemas.openxmlformats.org/presentationml/2006/main">
+  <p:cSld>
+    <p:spTree>
+      <p:nvGrpSpPr>
+        <p:cNvPr id="1" name=""/>
+        <p:cNvGrpSpPr/>
+        <p:nvPr/>
+      </p:nvGrpSpPr>
+      <p:grpSpPr>
+        <a:xfrm>
+          <a:off x="0" y="0"/>
+          <a:ext cx="0" cy="0"/>
+          <a:chOff x="0" y="0"/>
+          <a:chExt cx="0" cy="0"/>
+        </a:xfrm>
+      </p:grpSpPr>
+      <p:sp>
+        <p:nvSpPr>
+          <p:cNvPr id="2" name="Slide Image Placeholder 1"/>
+          <p:cNvSpPr>
+            <a:spLocks noGrp="1" noRot="1" noChangeAspect="1"/>
+          </p:cNvSpPr>
+          <p:nvPr>
+            <p:ph type="sldImg"/>
+          </p:nvPr>
+        </p:nvSpPr>
+        <p:spPr/>
+      </p:sp>
+      <p:sp>
+        <p:nvSpPr>
+          <p:cNvPr id="3" name="Notes Placeholder 2"/>
+          <p:cNvSpPr>
+            <a:spLocks noGrp="1"/>
+          </p:cNvSpPr>
+          <p:nvPr>
+            <p:ph type="body" idx="1"/>
+          </p:nvPr>
+        </p:nvSpPr>
+        <p:spPr/>
+        <p:txBody>
+          <a:bodyPr/>
+          <a:lstStyle/>
+          <a:p>
+            <a:r>
+              <a:rPr lang="en-US" dirty="0"/>
+              <a:t/>
+            </a:r>
+            <a:endParaRPr lang="en-US" dirty="0"/>
+          </a:p>
+        </p:txBody>
+      </p:sp>
+      <p:sp>
+        <p:nvSpPr>
+          <p:cNvPr id="4" name="Slide Number Placeholder 3"/>
+          <p:cNvSpPr>
+            <a:spLocks noGrp="1"/>
+          </p:cNvSpPr>
+          <p:nvPr>
+            <p:ph type="sldNum" sz="quarter" idx="10"/>
+          </p:nvPr>
+        </p:nvSpPr>
+        <p:spPr/>
+        <p:txBody>
+          <a:bodyPr/>
+          <a:lstStyle/>
+          <a:p>
+            <a:fld id="{F7021451-1387-4CA6-816F-3879F97B5CBC}" type="slidenum">
+              <a:rPr lang="en-US"/>
+              <a:t>17</a:t>
+            </a:fld>
+            <a:endParaRPr lang="en-US"/>
+          </a:p>
+        </p:txBody>
+      </p:sp>
+    </p:spTree>
+    <p:extLst>
+      <p:ext uri="{BB962C8B-B14F-4D97-AF65-F5344CB8AC3E}">
+        <p14:creationId xmlns:p14="http://schemas.microsoft.com/office/powerpoint/2010/main" val="1024086991"/>
+      </p:ext>
+    </p:extLst>
+  </p:cSld>
+  <p:clrMapOvr>
+    <a:masterClrMapping/>
+  </p:clrMapOvr>
+</p:notes>
+</file>
+
+<file path=ppt/notesSlides/notesSlide18.xml><?xml version="1.0" encoding="utf-8"?>
+<p:notes xmlns:a="http://schemas.openxmlformats.org/drawingml/2006/main" xmlns:r="http://schemas.openxmlformats.org/officeDocument/2006/relationships" xmlns:p="http://schemas.openxmlformats.org/presentationml/2006/main">
+  <p:cSld>
+    <p:spTree>
+      <p:nvGrpSpPr>
+        <p:cNvPr id="1" name=""/>
+        <p:cNvGrpSpPr/>
+        <p:nvPr/>
+      </p:nvGrpSpPr>
+      <p:grpSpPr>
+        <a:xfrm>
+          <a:off x="0" y="0"/>
+          <a:ext cx="0" cy="0"/>
+          <a:chOff x="0" y="0"/>
+          <a:chExt cx="0" cy="0"/>
+        </a:xfrm>
+      </p:grpSpPr>
+      <p:sp>
+        <p:nvSpPr>
+          <p:cNvPr id="2" name="Slide Image Placeholder 1"/>
+          <p:cNvSpPr>
+            <a:spLocks noGrp="1" noRot="1" noChangeAspect="1"/>
+          </p:cNvSpPr>
+          <p:nvPr>
+            <p:ph type="sldImg"/>
+          </p:nvPr>
+        </p:nvSpPr>
+        <p:spPr/>
+      </p:sp>
+      <p:sp>
+        <p:nvSpPr>
+          <p:cNvPr id="3" name="Notes Placeholder 2"/>
+          <p:cNvSpPr>
+            <a:spLocks noGrp="1"/>
+          </p:cNvSpPr>
+          <p:nvPr>
+            <p:ph type="body" idx="1"/>
+          </p:nvPr>
+        </p:nvSpPr>
+        <p:spPr/>
+        <p:txBody>
+          <a:bodyPr/>
+          <a:lstStyle/>
+          <a:p>
+            <a:r>
+              <a:rPr lang="en-US" dirty="0"/>
+              <a:t/>
+            </a:r>
+            <a:endParaRPr lang="en-US" dirty="0"/>
+          </a:p>
+        </p:txBody>
+      </p:sp>
+      <p:sp>
+        <p:nvSpPr>
+          <p:cNvPr id="4" name="Slide Number Placeholder 3"/>
+          <p:cNvSpPr>
+            <a:spLocks noGrp="1"/>
+          </p:cNvSpPr>
+          <p:nvPr>
+            <p:ph type="sldNum" sz="quarter" idx="10"/>
+          </p:nvPr>
+        </p:nvSpPr>
+        <p:spPr/>
+        <p:txBody>
+          <a:bodyPr/>
+          <a:lstStyle/>
+          <a:p>
+            <a:fld id="{F7021451-1387-4CA6-816F-3879F97B5CBC}" type="slidenum">
+              <a:rPr lang="en-US"/>
+              <a:t>18</a:t>
+            </a:fld>
+            <a:endParaRPr lang="en-US"/>
+          </a:p>
+        </p:txBody>
+      </p:sp>
+    </p:spTree>
+    <p:extLst>
+      <p:ext uri="{BB962C8B-B14F-4D97-AF65-F5344CB8AC3E}">
+        <p14:creationId xmlns:p14="http://schemas.microsoft.com/office/powerpoint/2010/main" val="1024086991"/>
+      </p:ext>
+    </p:extLst>
+  </p:cSld>
+  <p:clrMapOvr>
+    <a:masterClrMapping/>
+  </p:clrMapOvr>
+</p:notes>
+</file>
+
+<file path=ppt/notesSlides/notesSlide19.xml><?xml version="1.0" encoding="utf-8"?>
+<p:notes xmlns:a="http://schemas.openxmlformats.org/drawingml/2006/main" xmlns:r="http://schemas.openxmlformats.org/officeDocument/2006/relationships" xmlns:p="http://schemas.openxmlformats.org/presentationml/2006/main">
+  <p:cSld>
+    <p:spTree>
+      <p:nvGrpSpPr>
+        <p:cNvPr id="1" name=""/>
+        <p:cNvGrpSpPr/>
+        <p:nvPr/>
+      </p:nvGrpSpPr>
+      <p:grpSpPr>
+        <a:xfrm>
+          <a:off x="0" y="0"/>
+          <a:ext cx="0" cy="0"/>
+          <a:chOff x="0" y="0"/>
+          <a:chExt cx="0" cy="0"/>
+        </a:xfrm>
+      </p:grpSpPr>
+      <p:sp>
+        <p:nvSpPr>
+          <p:cNvPr id="2" name="Slide Image Placeholder 1"/>
+          <p:cNvSpPr>
+            <a:spLocks noGrp="1" noRot="1" noChangeAspect="1"/>
+          </p:cNvSpPr>
+          <p:nvPr>
+            <p:ph type="sldImg"/>
+          </p:nvPr>
+        </p:nvSpPr>
+        <p:spPr/>
+      </p:sp>
+      <p:sp>
+        <p:nvSpPr>
+          <p:cNvPr id="3" name="Notes Placeholder 2"/>
+          <p:cNvSpPr>
+            <a:spLocks noGrp="1"/>
+          </p:cNvSpPr>
+          <p:nvPr>
+            <p:ph type="body" idx="1"/>
+          </p:nvPr>
+        </p:nvSpPr>
+        <p:spPr/>
+        <p:txBody>
+          <a:bodyPr/>
+          <a:lstStyle/>
+          <a:p>
+            <a:r>
+              <a:rPr lang="en-US" dirty="0"/>
+              <a:t/>
+            </a:r>
+            <a:endParaRPr lang="en-US" dirty="0"/>
+          </a:p>
+        </p:txBody>
+      </p:sp>
+      <p:sp>
+        <p:nvSpPr>
+          <p:cNvPr id="4" name="Slide Number Placeholder 3"/>
+          <p:cNvSpPr>
+            <a:spLocks noGrp="1"/>
+          </p:cNvSpPr>
+          <p:nvPr>
+            <p:ph type="sldNum" sz="quarter" idx="10"/>
+          </p:nvPr>
+        </p:nvSpPr>
+        <p:spPr/>
+        <p:txBody>
+          <a:bodyPr/>
+          <a:lstStyle/>
+          <a:p>
+            <a:fld id="{F7021451-1387-4CA6-816F-3879F97B5CBC}" type="slidenum">
+              <a:rPr lang="en-US"/>
+              <a:t>19</a:t>
             </a:fld>
             <a:endParaRPr lang="en-US"/>
           </a:p>
@@ -1947,6 +2837,2779 @@
 </p:sld>
 </file>
 
+<file path=ppt/slides/slide10.xml><?xml version="1.0" encoding="utf-8"?>
+<p:sld xmlns:a="http://schemas.openxmlformats.org/drawingml/2006/main" xmlns:r="http://schemas.openxmlformats.org/officeDocument/2006/relationships" xmlns:p="http://schemas.openxmlformats.org/presentationml/2006/main">
+  <p:cSld name="Slide 10">
+    <p:bg>
+      <p:bgPr>
+        <a:solidFill>
+          <a:srgbClr val="FAFAFA"/>
+        </a:solidFill>
+      </p:bgPr>
+    </p:bg>
+    <p:spTree>
+      <p:nvGrpSpPr>
+        <p:cNvPr id="1" name=""/>
+        <p:cNvGrpSpPr/>
+        <p:nvPr/>
+      </p:nvGrpSpPr>
+      <p:grpSpPr>
+        <a:xfrm>
+          <a:off x="0" y="0"/>
+          <a:ext cx="0" cy="0"/>
+          <a:chOff x="0" y="0"/>
+          <a:chExt cx="0" cy="0"/>
+        </a:xfrm>
+      </p:grpSpPr>
+      <p:sp>
+        <p:nvSpPr>
+          <p:cNvPr id="2" name="Shape 0"/>
+          <p:cNvSpPr/>
+          <p:nvPr/>
+        </p:nvSpPr>
+        <p:spPr>
+          <a:xfrm>
+            <a:off x="0" y="0"/>
+            <a:ext cx="54864" cy="6858000"/>
+          </a:xfrm>
+          <a:prstGeom prst="rect">
+            <a:avLst/>
+          </a:prstGeom>
+          <a:solidFill>
+            <a:srgbClr val="4338CA"/>
+          </a:solidFill>
+          <a:ln/>
+        </p:spPr>
+      </p:sp>
+      <p:sp>
+        <p:nvSpPr>
+          <p:cNvPr id="3" name="Text 1"/>
+          <p:cNvSpPr/>
+          <p:nvPr/>
+        </p:nvSpPr>
+        <p:spPr>
+          <a:xfrm>
+            <a:off x="731520" y="411480"/>
+            <a:ext cx="10698480" cy="640080"/>
+          </a:xfrm>
+          <a:prstGeom prst="rect">
+            <a:avLst/>
+          </a:prstGeom>
+          <a:noFill/>
+          <a:ln/>
+        </p:spPr>
+        <p:txBody>
+          <a:bodyPr wrap="square" lIns="0" tIns="0" rIns="0" bIns="0" rtlCol="0" anchor="ctr"/>
+          <a:lstStyle/>
+          <a:p>
+            <a:pPr indent="0" marL="0">
+              <a:buNone/>
+            </a:pPr>
+            <a:r>
+              <a:rPr lang="en-US" sz="2800" b="1" dirty="0">
+                <a:solidFill>
+                  <a:srgbClr val="0F172A"/>
+                </a:solidFill>
+                <a:latin typeface="Calibri" pitchFamily="34" charset="0"/>
+                <a:ea typeface="Calibri" pitchFamily="34" charset="-122"/>
+                <a:cs typeface="Calibri" pitchFamily="34" charset="-120"/>
+              </a:rPr>
+              <a:t>Meta Ads — Top Ads</a:t>
+            </a:r>
+            <a:endParaRPr lang="en-US" sz="2800" dirty="0"/>
+          </a:p>
+        </p:txBody>
+      </p:sp>
+      <p:sp>
+        <p:nvSpPr>
+          <p:cNvPr id="4" name="Shape 2"/>
+          <p:cNvSpPr/>
+          <p:nvPr/>
+        </p:nvSpPr>
+        <p:spPr>
+          <a:xfrm>
+            <a:off x="731520" y="1371600"/>
+            <a:ext cx="10698480" cy="3657600"/>
+          </a:xfrm>
+          <a:prstGeom prst="rect">
+            <a:avLst/>
+          </a:prstGeom>
+          <a:solidFill>
+            <a:srgbClr val="FFFFFF"/>
+          </a:solidFill>
+          <a:ln/>
+          <a:effectLst>
+            <a:outerShdw sx="100000" sy="100000" kx="0" ky="0" algn="bl" rotWithShape="0" blurRad="50800" dist="19050" dir="8100000">
+              <a:srgbClr val="000000">
+                <a:alpha val="8000"/>
+              </a:srgbClr>
+            </a:outerShdw>
+          </a:effectLst>
+        </p:spPr>
+      </p:sp>
+      <p:sp>
+        <p:nvSpPr>
+          <p:cNvPr id="5" name="Text 3"/>
+          <p:cNvSpPr/>
+          <p:nvPr/>
+        </p:nvSpPr>
+        <p:spPr>
+          <a:xfrm>
+            <a:off x="731520" y="1371600"/>
+            <a:ext cx="10698480" cy="3657600"/>
+          </a:xfrm>
+          <a:prstGeom prst="rect">
+            <a:avLst/>
+          </a:prstGeom>
+          <a:noFill/>
+          <a:ln/>
+        </p:spPr>
+        <p:txBody>
+          <a:bodyPr wrap="square" rtlCol="0" anchor="ctr"/>
+          <a:lstStyle/>
+          <a:p>
+            <a:pPr algn="ctr" indent="0" marL="0">
+              <a:buNone/>
+            </a:pPr>
+            <a:r>
+              <a:rPr lang="en-US" sz="1000" dirty="0">
+                <a:solidFill>
+                  <a:srgbClr val="94A3B8"/>
+                </a:solidFill>
+                <a:latin typeface="Calibri Light" pitchFamily="34" charset="0"/>
+                <a:ea typeface="Calibri Light" pitchFamily="34" charset="-122"/>
+                <a:cs typeface="Calibri Light" pitchFamily="34" charset="-120"/>
+              </a:rPr>
+              <a:t>{{chart_campaigns}}</a:t>
+            </a:r>
+            <a:endParaRPr lang="en-US" sz="1000" dirty="0"/>
+          </a:p>
+        </p:txBody>
+      </p:sp>
+      <p:sp>
+        <p:nvSpPr>
+          <p:cNvPr id="6" name="Text 4"/>
+          <p:cNvSpPr/>
+          <p:nvPr/>
+        </p:nvSpPr>
+        <p:spPr>
+          <a:xfrm>
+            <a:off x="731520" y="5257800"/>
+            <a:ext cx="10698480" cy="1097280"/>
+          </a:xfrm>
+          <a:prstGeom prst="rect">
+            <a:avLst/>
+          </a:prstGeom>
+          <a:noFill/>
+          <a:ln/>
+        </p:spPr>
+        <p:txBody>
+          <a:bodyPr wrap="square" rtlCol="0" anchor="t"/>
+          <a:lstStyle/>
+          <a:p>
+            <a:pPr indent="0" marL="0">
+              <a:lnSpc>
+                <a:spcPct val="135000"/>
+              </a:lnSpc>
+              <a:buNone/>
+            </a:pPr>
+            <a:r>
+              <a:rPr lang="en-US" sz="1200" dirty="0">
+                <a:solidFill>
+                  <a:srgbClr val="334155"/>
+                </a:solidFill>
+                <a:latin typeface="Calibri Light" pitchFamily="34" charset="0"/>
+                <a:ea typeface="Calibri Light" pitchFamily="34" charset="-122"/>
+                <a:cs typeface="Calibri Light" pitchFamily="34" charset="-120"/>
+              </a:rPr>
+              <a:t>{{ads_narrative}}</a:t>
+            </a:r>
+            <a:endParaRPr lang="en-US" sz="1200" dirty="0"/>
+          </a:p>
+        </p:txBody>
+      </p:sp>
+      <p:sp>
+        <p:nvSpPr>
+          <p:cNvPr id="7" name="Text 5"/>
+          <p:cNvSpPr/>
+          <p:nvPr/>
+        </p:nvSpPr>
+        <p:spPr>
+          <a:xfrm>
+            <a:off x="731520" y="6510528"/>
+            <a:ext cx="10698480" cy="256032"/>
+          </a:xfrm>
+          <a:prstGeom prst="rect">
+            <a:avLst/>
+          </a:prstGeom>
+          <a:noFill/>
+          <a:ln/>
+        </p:spPr>
+        <p:txBody>
+          <a:bodyPr wrap="square" rtlCol="0" anchor="ctr"/>
+          <a:lstStyle/>
+          <a:p>
+            <a:pPr algn="l" indent="0" marL="0">
+              <a:buNone/>
+            </a:pPr>
+            <a:r>
+              <a:rPr lang="en-US" sz="800" dirty="0">
+                <a:solidFill>
+                  <a:srgbClr val="94A3B8"/>
+                </a:solidFill>
+                <a:latin typeface="Calibri Light" pitchFamily="34" charset="0"/>
+                <a:ea typeface="Calibri Light" pitchFamily="34" charset="-122"/>
+                <a:cs typeface="Calibri Light" pitchFamily="34" charset="-120"/>
+              </a:rPr>
+              <a:t>{{agency_name}}  •  Confidential  •  Page 10</a:t>
+            </a:r>
+            <a:endParaRPr lang="en-US" sz="800" dirty="0"/>
+          </a:p>
+        </p:txBody>
+      </p:sp>
+    </p:spTree>
+  </p:cSld>
+  <p:clrMapOvr>
+    <a:masterClrMapping/>
+  </p:clrMapOvr>
+</p:sld>
+</file>
+
+<file path=ppt/slides/slide11.xml><?xml version="1.0" encoding="utf-8"?>
+<p:sld xmlns:a="http://schemas.openxmlformats.org/drawingml/2006/main" xmlns:r="http://schemas.openxmlformats.org/officeDocument/2006/relationships" xmlns:p="http://schemas.openxmlformats.org/presentationml/2006/main">
+  <p:cSld name="Slide 11">
+    <p:bg>
+      <p:bgPr>
+        <a:solidFill>
+          <a:srgbClr val="FAFAFA"/>
+        </a:solidFill>
+      </p:bgPr>
+    </p:bg>
+    <p:spTree>
+      <p:nvGrpSpPr>
+        <p:cNvPr id="1" name=""/>
+        <p:cNvGrpSpPr/>
+        <p:nvPr/>
+      </p:nvGrpSpPr>
+      <p:grpSpPr>
+        <a:xfrm>
+          <a:off x="0" y="0"/>
+          <a:ext cx="0" cy="0"/>
+          <a:chOff x="0" y="0"/>
+          <a:chExt cx="0" cy="0"/>
+        </a:xfrm>
+      </p:grpSpPr>
+      <p:sp>
+        <p:nvSpPr>
+          <p:cNvPr id="2" name="Shape 0"/>
+          <p:cNvSpPr/>
+          <p:nvPr/>
+        </p:nvSpPr>
+        <p:spPr>
+          <a:xfrm>
+            <a:off x="0" y="0"/>
+            <a:ext cx="54864" cy="6858000"/>
+          </a:xfrm>
+          <a:prstGeom prst="rect">
+            <a:avLst/>
+          </a:prstGeom>
+          <a:solidFill>
+            <a:srgbClr val="4338CA"/>
+          </a:solidFill>
+          <a:ln/>
+        </p:spPr>
+      </p:sp>
+      <p:sp>
+        <p:nvSpPr>
+          <p:cNvPr id="3" name="Text 1"/>
+          <p:cNvSpPr/>
+          <p:nvPr/>
+        </p:nvSpPr>
+        <p:spPr>
+          <a:xfrm>
+            <a:off x="731520" y="411480"/>
+            <a:ext cx="10698480" cy="640080"/>
+          </a:xfrm>
+          <a:prstGeom prst="rect">
+            <a:avLst/>
+          </a:prstGeom>
+          <a:noFill/>
+          <a:ln/>
+        </p:spPr>
+        <p:txBody>
+          <a:bodyPr wrap="square" lIns="0" tIns="0" rIns="0" bIns="0" rtlCol="0" anchor="ctr"/>
+          <a:lstStyle/>
+          <a:p>
+            <a:pPr indent="0" marL="0">
+              <a:buNone/>
+            </a:pPr>
+            <a:r>
+              <a:rPr lang="en-US" sz="2800" b="1" dirty="0">
+                <a:solidFill>
+                  <a:srgbClr val="0F172A"/>
+                </a:solidFill>
+                <a:latin typeface="Calibri" pitchFamily="34" charset="0"/>
+                <a:ea typeface="Calibri" pitchFamily="34" charset="-122"/>
+                <a:cs typeface="Calibri" pitchFamily="34" charset="-120"/>
+              </a:rPr>
+              <a:t>Search Advertising — Google Ads</a:t>
+            </a:r>
+            <a:endParaRPr lang="en-US" sz="2800" dirty="0"/>
+          </a:p>
+        </p:txBody>
+      </p:sp>
+      <p:sp>
+        <p:nvSpPr>
+          <p:cNvPr id="4" name="Shape 2"/>
+          <p:cNvSpPr/>
+          <p:nvPr/>
+        </p:nvSpPr>
+        <p:spPr>
+          <a:xfrm>
+            <a:off x="731520" y="1371600"/>
+            <a:ext cx="5120640" cy="2743200"/>
+          </a:xfrm>
+          <a:prstGeom prst="rect">
+            <a:avLst/>
+          </a:prstGeom>
+          <a:solidFill>
+            <a:srgbClr val="FFFFFF"/>
+          </a:solidFill>
+          <a:ln/>
+          <a:effectLst>
+            <a:outerShdw sx="100000" sy="100000" kx="0" ky="0" algn="bl" rotWithShape="0" blurRad="50800" dist="19050" dir="8100000">
+              <a:srgbClr val="000000">
+                <a:alpha val="8000"/>
+              </a:srgbClr>
+            </a:outerShdw>
+          </a:effectLst>
+        </p:spPr>
+      </p:sp>
+      <p:sp>
+        <p:nvSpPr>
+          <p:cNvPr id="5" name="Text 3"/>
+          <p:cNvSpPr/>
+          <p:nvPr/>
+        </p:nvSpPr>
+        <p:spPr>
+          <a:xfrm>
+            <a:off x="731520" y="1371600"/>
+            <a:ext cx="5120640" cy="2743200"/>
+          </a:xfrm>
+          <a:prstGeom prst="rect">
+            <a:avLst/>
+          </a:prstGeom>
+          <a:noFill/>
+          <a:ln/>
+        </p:spPr>
+        <p:txBody>
+          <a:bodyPr wrap="square" rtlCol="0" anchor="ctr"/>
+          <a:lstStyle/>
+          <a:p>
+            <a:pPr algn="ctr" indent="0" marL="0">
+              <a:buNone/>
+            </a:pPr>
+            <a:r>
+              <a:rPr lang="en-US" sz="1000" dirty="0">
+                <a:solidFill>
+                  <a:srgbClr val="94A3B8"/>
+                </a:solidFill>
+                <a:latin typeface="Calibri Light" pitchFamily="34" charset="0"/>
+                <a:ea typeface="Calibri Light" pitchFamily="34" charset="-122"/>
+                <a:cs typeface="Calibri Light" pitchFamily="34" charset="-120"/>
+              </a:rPr>
+              <a:t>{{chart_gads_spend}}</a:t>
+            </a:r>
+            <a:endParaRPr lang="en-US" sz="1000" dirty="0"/>
+          </a:p>
+        </p:txBody>
+      </p:sp>
+      <p:sp>
+        <p:nvSpPr>
+          <p:cNvPr id="6" name="Shape 4"/>
+          <p:cNvSpPr/>
+          <p:nvPr/>
+        </p:nvSpPr>
+        <p:spPr>
+          <a:xfrm>
+            <a:off x="6217920" y="1371600"/>
+            <a:ext cx="5212080" cy="2743200"/>
+          </a:xfrm>
+          <a:prstGeom prst="rect">
+            <a:avLst/>
+          </a:prstGeom>
+          <a:solidFill>
+            <a:srgbClr val="FFFFFF"/>
+          </a:solidFill>
+          <a:ln/>
+          <a:effectLst>
+            <a:outerShdw sx="100000" sy="100000" kx="0" ky="0" algn="bl" rotWithShape="0" blurRad="50800" dist="19050" dir="8100000">
+              <a:srgbClr val="000000">
+                <a:alpha val="8000"/>
+              </a:srgbClr>
+            </a:outerShdw>
+          </a:effectLst>
+        </p:spPr>
+      </p:sp>
+      <p:sp>
+        <p:nvSpPr>
+          <p:cNvPr id="7" name="Text 5"/>
+          <p:cNvSpPr/>
+          <p:nvPr/>
+        </p:nvSpPr>
+        <p:spPr>
+          <a:xfrm>
+            <a:off x="6217920" y="1371600"/>
+            <a:ext cx="5212080" cy="2743200"/>
+          </a:xfrm>
+          <a:prstGeom prst="rect">
+            <a:avLst/>
+          </a:prstGeom>
+          <a:noFill/>
+          <a:ln/>
+        </p:spPr>
+        <p:txBody>
+          <a:bodyPr wrap="square" rtlCol="0" anchor="ctr"/>
+          <a:lstStyle/>
+          <a:p>
+            <a:pPr algn="ctr" indent="0" marL="0">
+              <a:buNone/>
+            </a:pPr>
+            <a:r>
+              <a:rPr lang="en-US" sz="1000" dirty="0">
+                <a:solidFill>
+                  <a:srgbClr val="94A3B8"/>
+                </a:solidFill>
+                <a:latin typeface="Calibri Light" pitchFamily="34" charset="0"/>
+                <a:ea typeface="Calibri Light" pitchFamily="34" charset="-122"/>
+                <a:cs typeface="Calibri Light" pitchFamily="34" charset="-120"/>
+              </a:rPr>
+              <a:t>{{chart_gads_campaigns}}</a:t>
+            </a:r>
+            <a:endParaRPr lang="en-US" sz="1000" dirty="0"/>
+          </a:p>
+        </p:txBody>
+      </p:sp>
+      <p:sp>
+        <p:nvSpPr>
+          <p:cNvPr id="8" name="Text 6"/>
+          <p:cNvSpPr/>
+          <p:nvPr/>
+        </p:nvSpPr>
+        <p:spPr>
+          <a:xfrm>
+            <a:off x="731520" y="4389120"/>
+            <a:ext cx="10698480" cy="1828800"/>
+          </a:xfrm>
+          <a:prstGeom prst="rect">
+            <a:avLst/>
+          </a:prstGeom>
+          <a:noFill/>
+          <a:ln/>
+        </p:spPr>
+        <p:txBody>
+          <a:bodyPr wrap="square" rtlCol="0" anchor="t"/>
+          <a:lstStyle/>
+          <a:p>
+            <a:pPr indent="0" marL="0">
+              <a:lnSpc>
+                <a:spcPct val="135000"/>
+              </a:lnSpc>
+              <a:buNone/>
+            </a:pPr>
+            <a:r>
+              <a:rPr lang="en-US" sz="1200" dirty="0">
+                <a:solidFill>
+                  <a:srgbClr val="334155"/>
+                </a:solidFill>
+                <a:latin typeface="Calibri Light" pitchFamily="34" charset="0"/>
+                <a:ea typeface="Calibri Light" pitchFamily="34" charset="-122"/>
+                <a:cs typeface="Calibri Light" pitchFamily="34" charset="-120"/>
+              </a:rPr>
+              <a:t>{{google_ads_narrative}}</a:t>
+            </a:r>
+            <a:endParaRPr lang="en-US" sz="1200" dirty="0"/>
+          </a:p>
+        </p:txBody>
+      </p:sp>
+      <p:sp>
+        <p:nvSpPr>
+          <p:cNvPr id="9" name="Text 7"/>
+          <p:cNvSpPr/>
+          <p:nvPr/>
+        </p:nvSpPr>
+        <p:spPr>
+          <a:xfrm>
+            <a:off x="731520" y="6510528"/>
+            <a:ext cx="10698480" cy="256032"/>
+          </a:xfrm>
+          <a:prstGeom prst="rect">
+            <a:avLst/>
+          </a:prstGeom>
+          <a:noFill/>
+          <a:ln/>
+        </p:spPr>
+        <p:txBody>
+          <a:bodyPr wrap="square" rtlCol="0" anchor="ctr"/>
+          <a:lstStyle/>
+          <a:p>
+            <a:pPr algn="l" indent="0" marL="0">
+              <a:buNone/>
+            </a:pPr>
+            <a:r>
+              <a:rPr lang="en-US" sz="800" dirty="0">
+                <a:solidFill>
+                  <a:srgbClr val="94A3B8"/>
+                </a:solidFill>
+                <a:latin typeface="Calibri Light" pitchFamily="34" charset="0"/>
+                <a:ea typeface="Calibri Light" pitchFamily="34" charset="-122"/>
+                <a:cs typeface="Calibri Light" pitchFamily="34" charset="-120"/>
+              </a:rPr>
+              <a:t>{{agency_name}}  •  Confidential  •  Page 11</a:t>
+            </a:r>
+            <a:endParaRPr lang="en-US" sz="800" dirty="0"/>
+          </a:p>
+        </p:txBody>
+      </p:sp>
+    </p:spTree>
+  </p:cSld>
+  <p:clrMapOvr>
+    <a:masterClrMapping/>
+  </p:clrMapOvr>
+</p:sld>
+</file>
+
+<file path=ppt/slides/slide12.xml><?xml version="1.0" encoding="utf-8"?>
+<p:sld xmlns:a="http://schemas.openxmlformats.org/drawingml/2006/main" xmlns:r="http://schemas.openxmlformats.org/officeDocument/2006/relationships" xmlns:p="http://schemas.openxmlformats.org/presentationml/2006/main">
+  <p:cSld name="Slide 12">
+    <p:bg>
+      <p:bgPr>
+        <a:solidFill>
+          <a:srgbClr val="FAFAFA"/>
+        </a:solidFill>
+      </p:bgPr>
+    </p:bg>
+    <p:spTree>
+      <p:nvGrpSpPr>
+        <p:cNvPr id="1" name=""/>
+        <p:cNvGrpSpPr/>
+        <p:nvPr/>
+      </p:nvGrpSpPr>
+      <p:grpSpPr>
+        <a:xfrm>
+          <a:off x="0" y="0"/>
+          <a:ext cx="0" cy="0"/>
+          <a:chOff x="0" y="0"/>
+          <a:chExt cx="0" cy="0"/>
+        </a:xfrm>
+      </p:grpSpPr>
+      <p:sp>
+        <p:nvSpPr>
+          <p:cNvPr id="2" name="Shape 0"/>
+          <p:cNvSpPr/>
+          <p:nvPr/>
+        </p:nvSpPr>
+        <p:spPr>
+          <a:xfrm>
+            <a:off x="0" y="0"/>
+            <a:ext cx="54864" cy="6858000"/>
+          </a:xfrm>
+          <a:prstGeom prst="rect">
+            <a:avLst/>
+          </a:prstGeom>
+          <a:solidFill>
+            <a:srgbClr val="4338CA"/>
+          </a:solidFill>
+          <a:ln/>
+        </p:spPr>
+      </p:sp>
+      <p:sp>
+        <p:nvSpPr>
+          <p:cNvPr id="3" name="Text 1"/>
+          <p:cNvSpPr/>
+          <p:nvPr/>
+        </p:nvSpPr>
+        <p:spPr>
+          <a:xfrm>
+            <a:off x="731520" y="411480"/>
+            <a:ext cx="10698480" cy="640080"/>
+          </a:xfrm>
+          <a:prstGeom prst="rect">
+            <a:avLst/>
+          </a:prstGeom>
+          <a:noFill/>
+          <a:ln/>
+        </p:spPr>
+        <p:txBody>
+          <a:bodyPr wrap="square" lIns="0" tIns="0" rIns="0" bIns="0" rtlCol="0" anchor="ctr"/>
+          <a:lstStyle/>
+          <a:p>
+            <a:pPr indent="0" marL="0">
+              <a:buNone/>
+            </a:pPr>
+            <a:r>
+              <a:rPr lang="en-US" sz="2800" b="1" dirty="0">
+                <a:solidFill>
+                  <a:srgbClr val="0F172A"/>
+                </a:solidFill>
+                <a:latin typeface="Calibri" pitchFamily="34" charset="0"/>
+                <a:ea typeface="Calibri" pitchFamily="34" charset="-122"/>
+                <a:cs typeface="Calibri" pitchFamily="34" charset="-120"/>
+              </a:rPr>
+              <a:t>Search Terms Performance</a:t>
+            </a:r>
+            <a:endParaRPr lang="en-US" sz="2800" dirty="0"/>
+          </a:p>
+        </p:txBody>
+      </p:sp>
+      <p:sp>
+        <p:nvSpPr>
+          <p:cNvPr id="4" name="Shape 2"/>
+          <p:cNvSpPr/>
+          <p:nvPr/>
+        </p:nvSpPr>
+        <p:spPr>
+          <a:xfrm>
+            <a:off x="731520" y="1371600"/>
+            <a:ext cx="10698480" cy="3657600"/>
+          </a:xfrm>
+          <a:prstGeom prst="rect">
+            <a:avLst/>
+          </a:prstGeom>
+          <a:solidFill>
+            <a:srgbClr val="FFFFFF"/>
+          </a:solidFill>
+          <a:ln/>
+          <a:effectLst>
+            <a:outerShdw sx="100000" sy="100000" kx="0" ky="0" algn="bl" rotWithShape="0" blurRad="50800" dist="19050" dir="8100000">
+              <a:srgbClr val="000000">
+                <a:alpha val="8000"/>
+              </a:srgbClr>
+            </a:outerShdw>
+          </a:effectLst>
+        </p:spPr>
+      </p:sp>
+      <p:sp>
+        <p:nvSpPr>
+          <p:cNvPr id="5" name="Text 3"/>
+          <p:cNvSpPr/>
+          <p:nvPr/>
+        </p:nvSpPr>
+        <p:spPr>
+          <a:xfrm>
+            <a:off x="731520" y="1371600"/>
+            <a:ext cx="10698480" cy="3657600"/>
+          </a:xfrm>
+          <a:prstGeom prst="rect">
+            <a:avLst/>
+          </a:prstGeom>
+          <a:noFill/>
+          <a:ln/>
+        </p:spPr>
+        <p:txBody>
+          <a:bodyPr wrap="square" rtlCol="0" anchor="ctr"/>
+          <a:lstStyle/>
+          <a:p>
+            <a:pPr algn="ctr" indent="0" marL="0">
+              <a:buNone/>
+            </a:pPr>
+            <a:r>
+              <a:rPr lang="en-US" sz="1000" dirty="0">
+                <a:solidFill>
+                  <a:srgbClr val="94A3B8"/>
+                </a:solidFill>
+                <a:latin typeface="Calibri Light" pitchFamily="34" charset="0"/>
+                <a:ea typeface="Calibri Light" pitchFamily="34" charset="-122"/>
+                <a:cs typeface="Calibri Light" pitchFamily="34" charset="-120"/>
+              </a:rPr>
+              <a:t>{{chart_search_terms}}</a:t>
+            </a:r>
+            <a:endParaRPr lang="en-US" sz="1000" dirty="0"/>
+          </a:p>
+        </p:txBody>
+      </p:sp>
+      <p:sp>
+        <p:nvSpPr>
+          <p:cNvPr id="6" name="Text 4"/>
+          <p:cNvSpPr/>
+          <p:nvPr/>
+        </p:nvSpPr>
+        <p:spPr>
+          <a:xfrm>
+            <a:off x="731520" y="5257800"/>
+            <a:ext cx="10698480" cy="1097280"/>
+          </a:xfrm>
+          <a:prstGeom prst="rect">
+            <a:avLst/>
+          </a:prstGeom>
+          <a:noFill/>
+          <a:ln/>
+        </p:spPr>
+        <p:txBody>
+          <a:bodyPr wrap="square" rtlCol="0" anchor="t"/>
+          <a:lstStyle/>
+          <a:p>
+            <a:pPr indent="0" marL="0">
+              <a:lnSpc>
+                <a:spcPct val="135000"/>
+              </a:lnSpc>
+              <a:buNone/>
+            </a:pPr>
+            <a:r>
+              <a:rPr lang="en-US" sz="1200" dirty="0">
+                <a:solidFill>
+                  <a:srgbClr val="334155"/>
+                </a:solidFill>
+                <a:latin typeface="Calibri Light" pitchFamily="34" charset="0"/>
+                <a:ea typeface="Calibri Light" pitchFamily="34" charset="-122"/>
+                <a:cs typeface="Calibri Light" pitchFamily="34" charset="-120"/>
+              </a:rPr>
+              <a:t>{{google_ads_narrative}}</a:t>
+            </a:r>
+            <a:endParaRPr lang="en-US" sz="1200" dirty="0"/>
+          </a:p>
+        </p:txBody>
+      </p:sp>
+      <p:sp>
+        <p:nvSpPr>
+          <p:cNvPr id="7" name="Text 5"/>
+          <p:cNvSpPr/>
+          <p:nvPr/>
+        </p:nvSpPr>
+        <p:spPr>
+          <a:xfrm>
+            <a:off x="731520" y="6510528"/>
+            <a:ext cx="10698480" cy="256032"/>
+          </a:xfrm>
+          <a:prstGeom prst="rect">
+            <a:avLst/>
+          </a:prstGeom>
+          <a:noFill/>
+          <a:ln/>
+        </p:spPr>
+        <p:txBody>
+          <a:bodyPr wrap="square" rtlCol="0" anchor="ctr"/>
+          <a:lstStyle/>
+          <a:p>
+            <a:pPr algn="l" indent="0" marL="0">
+              <a:buNone/>
+            </a:pPr>
+            <a:r>
+              <a:rPr lang="en-US" sz="800" dirty="0">
+                <a:solidFill>
+                  <a:srgbClr val="94A3B8"/>
+                </a:solidFill>
+                <a:latin typeface="Calibri Light" pitchFamily="34" charset="0"/>
+                <a:ea typeface="Calibri Light" pitchFamily="34" charset="-122"/>
+                <a:cs typeface="Calibri Light" pitchFamily="34" charset="-120"/>
+              </a:rPr>
+              <a:t>{{agency_name}}  •  Confidential  •  Page 12</a:t>
+            </a:r>
+            <a:endParaRPr lang="en-US" sz="800" dirty="0"/>
+          </a:p>
+        </p:txBody>
+      </p:sp>
+    </p:spTree>
+  </p:cSld>
+  <p:clrMapOvr>
+    <a:masterClrMapping/>
+  </p:clrMapOvr>
+</p:sld>
+</file>
+
+<file path=ppt/slides/slide13.xml><?xml version="1.0" encoding="utf-8"?>
+<p:sld xmlns:a="http://schemas.openxmlformats.org/drawingml/2006/main" xmlns:r="http://schemas.openxmlformats.org/officeDocument/2006/relationships" xmlns:p="http://schemas.openxmlformats.org/presentationml/2006/main">
+  <p:cSld name="Slide 13">
+    <p:bg>
+      <p:bgPr>
+        <a:solidFill>
+          <a:srgbClr val="FAFAFA"/>
+        </a:solidFill>
+      </p:bgPr>
+    </p:bg>
+    <p:spTree>
+      <p:nvGrpSpPr>
+        <p:cNvPr id="1" name=""/>
+        <p:cNvGrpSpPr/>
+        <p:nvPr/>
+      </p:nvGrpSpPr>
+      <p:grpSpPr>
+        <a:xfrm>
+          <a:off x="0" y="0"/>
+          <a:ext cx="0" cy="0"/>
+          <a:chOff x="0" y="0"/>
+          <a:chExt cx="0" cy="0"/>
+        </a:xfrm>
+      </p:grpSpPr>
+      <p:sp>
+        <p:nvSpPr>
+          <p:cNvPr id="2" name="Shape 0"/>
+          <p:cNvSpPr/>
+          <p:nvPr/>
+        </p:nvSpPr>
+        <p:spPr>
+          <a:xfrm>
+            <a:off x="0" y="0"/>
+            <a:ext cx="54864" cy="6858000"/>
+          </a:xfrm>
+          <a:prstGeom prst="rect">
+            <a:avLst/>
+          </a:prstGeom>
+          <a:solidFill>
+            <a:srgbClr val="4338CA"/>
+          </a:solidFill>
+          <a:ln/>
+        </p:spPr>
+      </p:sp>
+      <p:sp>
+        <p:nvSpPr>
+          <p:cNvPr id="3" name="Text 1"/>
+          <p:cNvSpPr/>
+          <p:nvPr/>
+        </p:nvSpPr>
+        <p:spPr>
+          <a:xfrm>
+            <a:off x="731520" y="411480"/>
+            <a:ext cx="10698480" cy="640080"/>
+          </a:xfrm>
+          <a:prstGeom prst="rect">
+            <a:avLst/>
+          </a:prstGeom>
+          <a:noFill/>
+          <a:ln/>
+        </p:spPr>
+        <p:txBody>
+          <a:bodyPr wrap="square" lIns="0" tIns="0" rIns="0" bIns="0" rtlCol="0" anchor="ctr"/>
+          <a:lstStyle/>
+          <a:p>
+            <a:pPr indent="0" marL="0">
+              <a:buNone/>
+            </a:pPr>
+            <a:r>
+              <a:rPr lang="en-US" sz="2800" b="1" dirty="0">
+                <a:solidFill>
+                  <a:srgbClr val="0F172A"/>
+                </a:solidFill>
+                <a:latin typeface="Calibri" pitchFamily="34" charset="0"/>
+                <a:ea typeface="Calibri" pitchFamily="34" charset="-122"/>
+                <a:cs typeface="Calibri" pitchFamily="34" charset="-120"/>
+              </a:rPr>
+              <a:t>Organic Search — SEO</a:t>
+            </a:r>
+            <a:endParaRPr lang="en-US" sz="2800" dirty="0"/>
+          </a:p>
+        </p:txBody>
+      </p:sp>
+      <p:sp>
+        <p:nvSpPr>
+          <p:cNvPr id="4" name="Shape 2"/>
+          <p:cNvSpPr/>
+          <p:nvPr/>
+        </p:nvSpPr>
+        <p:spPr>
+          <a:xfrm>
+            <a:off x="731520" y="1371600"/>
+            <a:ext cx="5120640" cy="2743200"/>
+          </a:xfrm>
+          <a:prstGeom prst="rect">
+            <a:avLst/>
+          </a:prstGeom>
+          <a:solidFill>
+            <a:srgbClr val="FFFFFF"/>
+          </a:solidFill>
+          <a:ln/>
+          <a:effectLst>
+            <a:outerShdw sx="100000" sy="100000" kx="0" ky="0" algn="bl" rotWithShape="0" blurRad="50800" dist="19050" dir="8100000">
+              <a:srgbClr val="000000">
+                <a:alpha val="8000"/>
+              </a:srgbClr>
+            </a:outerShdw>
+          </a:effectLst>
+        </p:spPr>
+      </p:sp>
+      <p:sp>
+        <p:nvSpPr>
+          <p:cNvPr id="5" name="Text 3"/>
+          <p:cNvSpPr/>
+          <p:nvPr/>
+        </p:nvSpPr>
+        <p:spPr>
+          <a:xfrm>
+            <a:off x="731520" y="1371600"/>
+            <a:ext cx="5120640" cy="2743200"/>
+          </a:xfrm>
+          <a:prstGeom prst="rect">
+            <a:avLst/>
+          </a:prstGeom>
+          <a:noFill/>
+          <a:ln/>
+        </p:spPr>
+        <p:txBody>
+          <a:bodyPr wrap="square" rtlCol="0" anchor="ctr"/>
+          <a:lstStyle/>
+          <a:p>
+            <a:pPr algn="ctr" indent="0" marL="0">
+              <a:buNone/>
+            </a:pPr>
+            <a:r>
+              <a:rPr lang="en-US" sz="1000" dirty="0">
+                <a:solidFill>
+                  <a:srgbClr val="94A3B8"/>
+                </a:solidFill>
+                <a:latin typeface="Calibri Light" pitchFamily="34" charset="0"/>
+                <a:ea typeface="Calibri Light" pitchFamily="34" charset="-122"/>
+                <a:cs typeface="Calibri Light" pitchFamily="34" charset="-120"/>
+              </a:rPr>
+              <a:t>{{chart_seo_trend}}</a:t>
+            </a:r>
+            <a:endParaRPr lang="en-US" sz="1000" dirty="0"/>
+          </a:p>
+        </p:txBody>
+      </p:sp>
+      <p:sp>
+        <p:nvSpPr>
+          <p:cNvPr id="6" name="Shape 4"/>
+          <p:cNvSpPr/>
+          <p:nvPr/>
+        </p:nvSpPr>
+        <p:spPr>
+          <a:xfrm>
+            <a:off x="6217920" y="1371600"/>
+            <a:ext cx="5212080" cy="2743200"/>
+          </a:xfrm>
+          <a:prstGeom prst="rect">
+            <a:avLst/>
+          </a:prstGeom>
+          <a:solidFill>
+            <a:srgbClr val="FFFFFF"/>
+          </a:solidFill>
+          <a:ln/>
+          <a:effectLst>
+            <a:outerShdw sx="100000" sy="100000" kx="0" ky="0" algn="bl" rotWithShape="0" blurRad="50800" dist="19050" dir="8100000">
+              <a:srgbClr val="000000">
+                <a:alpha val="8000"/>
+              </a:srgbClr>
+            </a:outerShdw>
+          </a:effectLst>
+        </p:spPr>
+      </p:sp>
+      <p:sp>
+        <p:nvSpPr>
+          <p:cNvPr id="7" name="Text 5"/>
+          <p:cNvSpPr/>
+          <p:nvPr/>
+        </p:nvSpPr>
+        <p:spPr>
+          <a:xfrm>
+            <a:off x="6217920" y="1371600"/>
+            <a:ext cx="5212080" cy="2743200"/>
+          </a:xfrm>
+          <a:prstGeom prst="rect">
+            <a:avLst/>
+          </a:prstGeom>
+          <a:noFill/>
+          <a:ln/>
+        </p:spPr>
+        <p:txBody>
+          <a:bodyPr wrap="square" rtlCol="0" anchor="ctr"/>
+          <a:lstStyle/>
+          <a:p>
+            <a:pPr algn="ctr" indent="0" marL="0">
+              <a:buNone/>
+            </a:pPr>
+            <a:r>
+              <a:rPr lang="en-US" sz="1000" dirty="0">
+                <a:solidFill>
+                  <a:srgbClr val="94A3B8"/>
+                </a:solidFill>
+                <a:latin typeface="Calibri Light" pitchFamily="34" charset="0"/>
+                <a:ea typeface="Calibri Light" pitchFamily="34" charset="-122"/>
+                <a:cs typeface="Calibri Light" pitchFamily="34" charset="-120"/>
+              </a:rPr>
+              <a:t>{{chart_top_queries}}</a:t>
+            </a:r>
+            <a:endParaRPr lang="en-US" sz="1000" dirty="0"/>
+          </a:p>
+        </p:txBody>
+      </p:sp>
+      <p:sp>
+        <p:nvSpPr>
+          <p:cNvPr id="8" name="Text 6"/>
+          <p:cNvSpPr/>
+          <p:nvPr/>
+        </p:nvSpPr>
+        <p:spPr>
+          <a:xfrm>
+            <a:off x="731520" y="4389120"/>
+            <a:ext cx="10698480" cy="1828800"/>
+          </a:xfrm>
+          <a:prstGeom prst="rect">
+            <a:avLst/>
+          </a:prstGeom>
+          <a:noFill/>
+          <a:ln/>
+        </p:spPr>
+        <p:txBody>
+          <a:bodyPr wrap="square" rtlCol="0" anchor="t"/>
+          <a:lstStyle/>
+          <a:p>
+            <a:pPr indent="0" marL="0">
+              <a:lnSpc>
+                <a:spcPct val="135000"/>
+              </a:lnSpc>
+              <a:buNone/>
+            </a:pPr>
+            <a:r>
+              <a:rPr lang="en-US" sz="1200" dirty="0">
+                <a:solidFill>
+                  <a:srgbClr val="334155"/>
+                </a:solidFill>
+                <a:latin typeface="Calibri Light" pitchFamily="34" charset="0"/>
+                <a:ea typeface="Calibri Light" pitchFamily="34" charset="-122"/>
+                <a:cs typeface="Calibri Light" pitchFamily="34" charset="-120"/>
+              </a:rPr>
+              <a:t>{{seo_narrative}}</a:t>
+            </a:r>
+            <a:endParaRPr lang="en-US" sz="1200" dirty="0"/>
+          </a:p>
+        </p:txBody>
+      </p:sp>
+      <p:sp>
+        <p:nvSpPr>
+          <p:cNvPr id="9" name="Text 7"/>
+          <p:cNvSpPr/>
+          <p:nvPr/>
+        </p:nvSpPr>
+        <p:spPr>
+          <a:xfrm>
+            <a:off x="731520" y="6510528"/>
+            <a:ext cx="10698480" cy="256032"/>
+          </a:xfrm>
+          <a:prstGeom prst="rect">
+            <a:avLst/>
+          </a:prstGeom>
+          <a:noFill/>
+          <a:ln/>
+        </p:spPr>
+        <p:txBody>
+          <a:bodyPr wrap="square" rtlCol="0" anchor="ctr"/>
+          <a:lstStyle/>
+          <a:p>
+            <a:pPr algn="l" indent="0" marL="0">
+              <a:buNone/>
+            </a:pPr>
+            <a:r>
+              <a:rPr lang="en-US" sz="800" dirty="0">
+                <a:solidFill>
+                  <a:srgbClr val="94A3B8"/>
+                </a:solidFill>
+                <a:latin typeface="Calibri Light" pitchFamily="34" charset="0"/>
+                <a:ea typeface="Calibri Light" pitchFamily="34" charset="-122"/>
+                <a:cs typeface="Calibri Light" pitchFamily="34" charset="-120"/>
+              </a:rPr>
+              <a:t>{{agency_name}}  •  Confidential  •  Page 13</a:t>
+            </a:r>
+            <a:endParaRPr lang="en-US" sz="800" dirty="0"/>
+          </a:p>
+        </p:txBody>
+      </p:sp>
+    </p:spTree>
+  </p:cSld>
+  <p:clrMapOvr>
+    <a:masterClrMapping/>
+  </p:clrMapOvr>
+</p:sld>
+</file>
+
+<file path=ppt/slides/slide14.xml><?xml version="1.0" encoding="utf-8"?>
+<p:sld xmlns:a="http://schemas.openxmlformats.org/drawingml/2006/main" xmlns:r="http://schemas.openxmlformats.org/officeDocument/2006/relationships" xmlns:p="http://schemas.openxmlformats.org/presentationml/2006/main">
+  <p:cSld name="Slide 14">
+    <p:bg>
+      <p:bgPr>
+        <a:solidFill>
+          <a:srgbClr val="FAFAFA"/>
+        </a:solidFill>
+      </p:bgPr>
+    </p:bg>
+    <p:spTree>
+      <p:nvGrpSpPr>
+        <p:cNvPr id="1" name=""/>
+        <p:cNvGrpSpPr/>
+        <p:nvPr/>
+      </p:nvGrpSpPr>
+      <p:grpSpPr>
+        <a:xfrm>
+          <a:off x="0" y="0"/>
+          <a:ext cx="0" cy="0"/>
+          <a:chOff x="0" y="0"/>
+          <a:chExt cx="0" cy="0"/>
+        </a:xfrm>
+      </p:grpSpPr>
+      <p:sp>
+        <p:nvSpPr>
+          <p:cNvPr id="2" name="Shape 0"/>
+          <p:cNvSpPr/>
+          <p:nvPr/>
+        </p:nvSpPr>
+        <p:spPr>
+          <a:xfrm>
+            <a:off x="0" y="0"/>
+            <a:ext cx="54864" cy="6858000"/>
+          </a:xfrm>
+          <a:prstGeom prst="rect">
+            <a:avLst/>
+          </a:prstGeom>
+          <a:solidFill>
+            <a:srgbClr val="4338CA"/>
+          </a:solidFill>
+          <a:ln/>
+        </p:spPr>
+      </p:sp>
+      <p:sp>
+        <p:nvSpPr>
+          <p:cNvPr id="3" name="Text 1"/>
+          <p:cNvSpPr/>
+          <p:nvPr/>
+        </p:nvSpPr>
+        <p:spPr>
+          <a:xfrm>
+            <a:off x="731520" y="411480"/>
+            <a:ext cx="10698480" cy="640080"/>
+          </a:xfrm>
+          <a:prstGeom prst="rect">
+            <a:avLst/>
+          </a:prstGeom>
+          <a:noFill/>
+          <a:ln/>
+        </p:spPr>
+        <p:txBody>
+          <a:bodyPr wrap="square" lIns="0" tIns="0" rIns="0" bIns="0" rtlCol="0" anchor="ctr"/>
+          <a:lstStyle/>
+          <a:p>
+            <a:pPr indent="0" marL="0">
+              <a:buNone/>
+            </a:pPr>
+            <a:r>
+              <a:rPr lang="en-US" sz="2800" b="1" dirty="0">
+                <a:solidFill>
+                  <a:srgbClr val="0F172A"/>
+                </a:solidFill>
+                <a:latin typeface="Calibri" pitchFamily="34" charset="0"/>
+                <a:ea typeface="Calibri" pitchFamily="34" charset="-122"/>
+                <a:cs typeface="Calibri" pitchFamily="34" charset="-120"/>
+              </a:rPr>
+              <a:t>{{csv_source_name}}</a:t>
+            </a:r>
+            <a:endParaRPr lang="en-US" sz="2800" dirty="0"/>
+          </a:p>
+        </p:txBody>
+      </p:sp>
+      <p:sp>
+        <p:nvSpPr>
+          <p:cNvPr id="4" name="Text 2"/>
+          <p:cNvSpPr/>
+          <p:nvPr/>
+        </p:nvSpPr>
+        <p:spPr>
+          <a:xfrm>
+            <a:off x="731520" y="1463040"/>
+            <a:ext cx="5029200" cy="274320"/>
+          </a:xfrm>
+          <a:prstGeom prst="rect">
+            <a:avLst/>
+          </a:prstGeom>
+          <a:noFill/>
+          <a:ln/>
+        </p:spPr>
+        <p:txBody>
+          <a:bodyPr wrap="square" rtlCol="0" anchor="ctr"/>
+          <a:lstStyle/>
+          <a:p>
+            <a:pPr indent="0" marL="0">
+              <a:buNone/>
+            </a:pPr>
+            <a:r>
+              <a:rPr lang="en-US" sz="900" b="1" spc="100" kern="0" dirty="0">
+                <a:solidFill>
+                  <a:srgbClr val="64748B"/>
+                </a:solidFill>
+                <a:latin typeface="Calibri" pitchFamily="34" charset="0"/>
+                <a:ea typeface="Calibri" pitchFamily="34" charset="-122"/>
+                <a:cs typeface="Calibri" pitchFamily="34" charset="-120"/>
+              </a:rPr>
+              <a:t>{{csv_kpi_0_label}}</a:t>
+            </a:r>
+            <a:endParaRPr lang="en-US" sz="900" dirty="0"/>
+          </a:p>
+        </p:txBody>
+      </p:sp>
+      <p:sp>
+        <p:nvSpPr>
+          <p:cNvPr id="5" name="Text 3"/>
+          <p:cNvSpPr/>
+          <p:nvPr/>
+        </p:nvSpPr>
+        <p:spPr>
+          <a:xfrm>
+            <a:off x="731520" y="1737360"/>
+            <a:ext cx="5029200" cy="457200"/>
+          </a:xfrm>
+          <a:prstGeom prst="rect">
+            <a:avLst/>
+          </a:prstGeom>
+          <a:noFill/>
+          <a:ln/>
+        </p:spPr>
+        <p:txBody>
+          <a:bodyPr wrap="square" rtlCol="0" anchor="ctr"/>
+          <a:lstStyle/>
+          <a:p>
+            <a:pPr indent="0" marL="0">
+              <a:buNone/>
+            </a:pPr>
+            <a:r>
+              <a:rPr lang="en-US" sz="2200" b="1" dirty="0">
+                <a:solidFill>
+                  <a:srgbClr val="0F172A"/>
+                </a:solidFill>
+                <a:latin typeface="Calibri" pitchFamily="34" charset="0"/>
+                <a:ea typeface="Calibri" pitchFamily="34" charset="-122"/>
+                <a:cs typeface="Calibri" pitchFamily="34" charset="-120"/>
+              </a:rPr>
+              <a:t>{{csv_kpi_0_value}}</a:t>
+            </a:r>
+            <a:endParaRPr lang="en-US" sz="2200" dirty="0"/>
+          </a:p>
+        </p:txBody>
+      </p:sp>
+      <p:sp>
+        <p:nvSpPr>
+          <p:cNvPr id="6" name="Text 4"/>
+          <p:cNvSpPr/>
+          <p:nvPr/>
+        </p:nvSpPr>
+        <p:spPr>
+          <a:xfrm>
+            <a:off x="6583680" y="1463040"/>
+            <a:ext cx="4846320" cy="274320"/>
+          </a:xfrm>
+          <a:prstGeom prst="rect">
+            <a:avLst/>
+          </a:prstGeom>
+          <a:noFill/>
+          <a:ln/>
+        </p:spPr>
+        <p:txBody>
+          <a:bodyPr wrap="square" rtlCol="0" anchor="ctr"/>
+          <a:lstStyle/>
+          <a:p>
+            <a:pPr indent="0" marL="0">
+              <a:buNone/>
+            </a:pPr>
+            <a:r>
+              <a:rPr lang="en-US" sz="900" b="1" spc="100" kern="0" dirty="0">
+                <a:solidFill>
+                  <a:srgbClr val="64748B"/>
+                </a:solidFill>
+                <a:latin typeface="Calibri" pitchFamily="34" charset="0"/>
+                <a:ea typeface="Calibri" pitchFamily="34" charset="-122"/>
+                <a:cs typeface="Calibri" pitchFamily="34" charset="-120"/>
+              </a:rPr>
+              <a:t>{{csv_kpi_1_label}}</a:t>
+            </a:r>
+            <a:endParaRPr lang="en-US" sz="900" dirty="0"/>
+          </a:p>
+        </p:txBody>
+      </p:sp>
+      <p:sp>
+        <p:nvSpPr>
+          <p:cNvPr id="7" name="Text 5"/>
+          <p:cNvSpPr/>
+          <p:nvPr/>
+        </p:nvSpPr>
+        <p:spPr>
+          <a:xfrm>
+            <a:off x="6583680" y="1737360"/>
+            <a:ext cx="4846320" cy="457200"/>
+          </a:xfrm>
+          <a:prstGeom prst="rect">
+            <a:avLst/>
+          </a:prstGeom>
+          <a:noFill/>
+          <a:ln/>
+        </p:spPr>
+        <p:txBody>
+          <a:bodyPr wrap="square" rtlCol="0" anchor="ctr"/>
+          <a:lstStyle/>
+          <a:p>
+            <a:pPr indent="0" marL="0">
+              <a:buNone/>
+            </a:pPr>
+            <a:r>
+              <a:rPr lang="en-US" sz="2200" b="1" dirty="0">
+                <a:solidFill>
+                  <a:srgbClr val="0F172A"/>
+                </a:solidFill>
+                <a:latin typeface="Calibri" pitchFamily="34" charset="0"/>
+                <a:ea typeface="Calibri" pitchFamily="34" charset="-122"/>
+                <a:cs typeface="Calibri" pitchFamily="34" charset="-120"/>
+              </a:rPr>
+              <a:t>{{csv_kpi_1_value}}</a:t>
+            </a:r>
+            <a:endParaRPr lang="en-US" sz="2200" dirty="0"/>
+          </a:p>
+        </p:txBody>
+      </p:sp>
+      <p:sp>
+        <p:nvSpPr>
+          <p:cNvPr id="8" name="Text 6"/>
+          <p:cNvSpPr/>
+          <p:nvPr/>
+        </p:nvSpPr>
+        <p:spPr>
+          <a:xfrm>
+            <a:off x="731520" y="2286000"/>
+            <a:ext cx="5029200" cy="274320"/>
+          </a:xfrm>
+          <a:prstGeom prst="rect">
+            <a:avLst/>
+          </a:prstGeom>
+          <a:noFill/>
+          <a:ln/>
+        </p:spPr>
+        <p:txBody>
+          <a:bodyPr wrap="square" rtlCol="0" anchor="ctr"/>
+          <a:lstStyle/>
+          <a:p>
+            <a:pPr indent="0" marL="0">
+              <a:buNone/>
+            </a:pPr>
+            <a:r>
+              <a:rPr lang="en-US" sz="900" b="1" spc="100" kern="0" dirty="0">
+                <a:solidFill>
+                  <a:srgbClr val="64748B"/>
+                </a:solidFill>
+                <a:latin typeface="Calibri" pitchFamily="34" charset="0"/>
+                <a:ea typeface="Calibri" pitchFamily="34" charset="-122"/>
+                <a:cs typeface="Calibri" pitchFamily="34" charset="-120"/>
+              </a:rPr>
+              <a:t>{{csv_kpi_2_label}}</a:t>
+            </a:r>
+            <a:endParaRPr lang="en-US" sz="900" dirty="0"/>
+          </a:p>
+        </p:txBody>
+      </p:sp>
+      <p:sp>
+        <p:nvSpPr>
+          <p:cNvPr id="9" name="Text 7"/>
+          <p:cNvSpPr/>
+          <p:nvPr/>
+        </p:nvSpPr>
+        <p:spPr>
+          <a:xfrm>
+            <a:off x="731520" y="2560320"/>
+            <a:ext cx="5029200" cy="457200"/>
+          </a:xfrm>
+          <a:prstGeom prst="rect">
+            <a:avLst/>
+          </a:prstGeom>
+          <a:noFill/>
+          <a:ln/>
+        </p:spPr>
+        <p:txBody>
+          <a:bodyPr wrap="square" rtlCol="0" anchor="ctr"/>
+          <a:lstStyle/>
+          <a:p>
+            <a:pPr indent="0" marL="0">
+              <a:buNone/>
+            </a:pPr>
+            <a:r>
+              <a:rPr lang="en-US" sz="2200" b="1" dirty="0">
+                <a:solidFill>
+                  <a:srgbClr val="0F172A"/>
+                </a:solidFill>
+                <a:latin typeface="Calibri" pitchFamily="34" charset="0"/>
+                <a:ea typeface="Calibri" pitchFamily="34" charset="-122"/>
+                <a:cs typeface="Calibri" pitchFamily="34" charset="-120"/>
+              </a:rPr>
+              <a:t>{{csv_kpi_2_value}}</a:t>
+            </a:r>
+            <a:endParaRPr lang="en-US" sz="2200" dirty="0"/>
+          </a:p>
+        </p:txBody>
+      </p:sp>
+      <p:sp>
+        <p:nvSpPr>
+          <p:cNvPr id="10" name="Text 8"/>
+          <p:cNvSpPr/>
+          <p:nvPr/>
+        </p:nvSpPr>
+        <p:spPr>
+          <a:xfrm>
+            <a:off x="6583680" y="2286000"/>
+            <a:ext cx="4846320" cy="274320"/>
+          </a:xfrm>
+          <a:prstGeom prst="rect">
+            <a:avLst/>
+          </a:prstGeom>
+          <a:noFill/>
+          <a:ln/>
+        </p:spPr>
+        <p:txBody>
+          <a:bodyPr wrap="square" rtlCol="0" anchor="ctr"/>
+          <a:lstStyle/>
+          <a:p>
+            <a:pPr indent="0" marL="0">
+              <a:buNone/>
+            </a:pPr>
+            <a:r>
+              <a:rPr lang="en-US" sz="900" b="1" spc="100" kern="0" dirty="0">
+                <a:solidFill>
+                  <a:srgbClr val="64748B"/>
+                </a:solidFill>
+                <a:latin typeface="Calibri" pitchFamily="34" charset="0"/>
+                <a:ea typeface="Calibri" pitchFamily="34" charset="-122"/>
+                <a:cs typeface="Calibri" pitchFamily="34" charset="-120"/>
+              </a:rPr>
+              <a:t>{{csv_kpi_3_label}}</a:t>
+            </a:r>
+            <a:endParaRPr lang="en-US" sz="900" dirty="0"/>
+          </a:p>
+        </p:txBody>
+      </p:sp>
+      <p:sp>
+        <p:nvSpPr>
+          <p:cNvPr id="11" name="Text 9"/>
+          <p:cNvSpPr/>
+          <p:nvPr/>
+        </p:nvSpPr>
+        <p:spPr>
+          <a:xfrm>
+            <a:off x="6583680" y="2560320"/>
+            <a:ext cx="4846320" cy="457200"/>
+          </a:xfrm>
+          <a:prstGeom prst="rect">
+            <a:avLst/>
+          </a:prstGeom>
+          <a:noFill/>
+          <a:ln/>
+        </p:spPr>
+        <p:txBody>
+          <a:bodyPr wrap="square" rtlCol="0" anchor="ctr"/>
+          <a:lstStyle/>
+          <a:p>
+            <a:pPr indent="0" marL="0">
+              <a:buNone/>
+            </a:pPr>
+            <a:r>
+              <a:rPr lang="en-US" sz="2200" b="1" dirty="0">
+                <a:solidFill>
+                  <a:srgbClr val="0F172A"/>
+                </a:solidFill>
+                <a:latin typeface="Calibri" pitchFamily="34" charset="0"/>
+                <a:ea typeface="Calibri" pitchFamily="34" charset="-122"/>
+                <a:cs typeface="Calibri" pitchFamily="34" charset="-120"/>
+              </a:rPr>
+              <a:t>{{csv_kpi_3_value}}</a:t>
+            </a:r>
+            <a:endParaRPr lang="en-US" sz="2200" dirty="0"/>
+          </a:p>
+        </p:txBody>
+      </p:sp>
+      <p:sp>
+        <p:nvSpPr>
+          <p:cNvPr id="12" name="Text 10"/>
+          <p:cNvSpPr/>
+          <p:nvPr/>
+        </p:nvSpPr>
+        <p:spPr>
+          <a:xfrm>
+            <a:off x="731520" y="3108960"/>
+            <a:ext cx="5029200" cy="274320"/>
+          </a:xfrm>
+          <a:prstGeom prst="rect">
+            <a:avLst/>
+          </a:prstGeom>
+          <a:noFill/>
+          <a:ln/>
+        </p:spPr>
+        <p:txBody>
+          <a:bodyPr wrap="square" rtlCol="0" anchor="ctr"/>
+          <a:lstStyle/>
+          <a:p>
+            <a:pPr indent="0" marL="0">
+              <a:buNone/>
+            </a:pPr>
+            <a:r>
+              <a:rPr lang="en-US" sz="900" b="1" spc="100" kern="0" dirty="0">
+                <a:solidFill>
+                  <a:srgbClr val="64748B"/>
+                </a:solidFill>
+                <a:latin typeface="Calibri" pitchFamily="34" charset="0"/>
+                <a:ea typeface="Calibri" pitchFamily="34" charset="-122"/>
+                <a:cs typeface="Calibri" pitchFamily="34" charset="-120"/>
+              </a:rPr>
+              <a:t>{{csv_kpi_4_label}}</a:t>
+            </a:r>
+            <a:endParaRPr lang="en-US" sz="900" dirty="0"/>
+          </a:p>
+        </p:txBody>
+      </p:sp>
+      <p:sp>
+        <p:nvSpPr>
+          <p:cNvPr id="13" name="Text 11"/>
+          <p:cNvSpPr/>
+          <p:nvPr/>
+        </p:nvSpPr>
+        <p:spPr>
+          <a:xfrm>
+            <a:off x="731520" y="3383280"/>
+            <a:ext cx="5029200" cy="457200"/>
+          </a:xfrm>
+          <a:prstGeom prst="rect">
+            <a:avLst/>
+          </a:prstGeom>
+          <a:noFill/>
+          <a:ln/>
+        </p:spPr>
+        <p:txBody>
+          <a:bodyPr wrap="square" rtlCol="0" anchor="ctr"/>
+          <a:lstStyle/>
+          <a:p>
+            <a:pPr indent="0" marL="0">
+              <a:buNone/>
+            </a:pPr>
+            <a:r>
+              <a:rPr lang="en-US" sz="2200" b="1" dirty="0">
+                <a:solidFill>
+                  <a:srgbClr val="0F172A"/>
+                </a:solidFill>
+                <a:latin typeface="Calibri" pitchFamily="34" charset="0"/>
+                <a:ea typeface="Calibri" pitchFamily="34" charset="-122"/>
+                <a:cs typeface="Calibri" pitchFamily="34" charset="-120"/>
+              </a:rPr>
+              <a:t>{{csv_kpi_4_value}}</a:t>
+            </a:r>
+            <a:endParaRPr lang="en-US" sz="2200" dirty="0"/>
+          </a:p>
+        </p:txBody>
+      </p:sp>
+      <p:sp>
+        <p:nvSpPr>
+          <p:cNvPr id="14" name="Text 12"/>
+          <p:cNvSpPr/>
+          <p:nvPr/>
+        </p:nvSpPr>
+        <p:spPr>
+          <a:xfrm>
+            <a:off x="6583680" y="3108960"/>
+            <a:ext cx="4846320" cy="274320"/>
+          </a:xfrm>
+          <a:prstGeom prst="rect">
+            <a:avLst/>
+          </a:prstGeom>
+          <a:noFill/>
+          <a:ln/>
+        </p:spPr>
+        <p:txBody>
+          <a:bodyPr wrap="square" rtlCol="0" anchor="ctr"/>
+          <a:lstStyle/>
+          <a:p>
+            <a:pPr indent="0" marL="0">
+              <a:buNone/>
+            </a:pPr>
+            <a:r>
+              <a:rPr lang="en-US" sz="900" b="1" spc="100" kern="0" dirty="0">
+                <a:solidFill>
+                  <a:srgbClr val="64748B"/>
+                </a:solidFill>
+                <a:latin typeface="Calibri" pitchFamily="34" charset="0"/>
+                <a:ea typeface="Calibri" pitchFamily="34" charset="-122"/>
+                <a:cs typeface="Calibri" pitchFamily="34" charset="-120"/>
+              </a:rPr>
+              <a:t>{{csv_kpi_5_label}}</a:t>
+            </a:r>
+            <a:endParaRPr lang="en-US" sz="900" dirty="0"/>
+          </a:p>
+        </p:txBody>
+      </p:sp>
+      <p:sp>
+        <p:nvSpPr>
+          <p:cNvPr id="15" name="Text 13"/>
+          <p:cNvSpPr/>
+          <p:nvPr/>
+        </p:nvSpPr>
+        <p:spPr>
+          <a:xfrm>
+            <a:off x="6583680" y="3383280"/>
+            <a:ext cx="4846320" cy="457200"/>
+          </a:xfrm>
+          <a:prstGeom prst="rect">
+            <a:avLst/>
+          </a:prstGeom>
+          <a:noFill/>
+          <a:ln/>
+        </p:spPr>
+        <p:txBody>
+          <a:bodyPr wrap="square" rtlCol="0" anchor="ctr"/>
+          <a:lstStyle/>
+          <a:p>
+            <a:pPr indent="0" marL="0">
+              <a:buNone/>
+            </a:pPr>
+            <a:r>
+              <a:rPr lang="en-US" sz="2200" b="1" dirty="0">
+                <a:solidFill>
+                  <a:srgbClr val="0F172A"/>
+                </a:solidFill>
+                <a:latin typeface="Calibri" pitchFamily="34" charset="0"/>
+                <a:ea typeface="Calibri" pitchFamily="34" charset="-122"/>
+                <a:cs typeface="Calibri" pitchFamily="34" charset="-120"/>
+              </a:rPr>
+              <a:t>{{csv_kpi_5_value}}</a:t>
+            </a:r>
+            <a:endParaRPr lang="en-US" sz="2200" dirty="0"/>
+          </a:p>
+        </p:txBody>
+      </p:sp>
+      <p:sp>
+        <p:nvSpPr>
+          <p:cNvPr id="16" name="Shape 14"/>
+          <p:cNvSpPr/>
+          <p:nvPr/>
+        </p:nvSpPr>
+        <p:spPr>
+          <a:xfrm>
+            <a:off x="731520" y="3657600"/>
+            <a:ext cx="10698480" cy="2377440"/>
+          </a:xfrm>
+          <a:prstGeom prst="rect">
+            <a:avLst/>
+          </a:prstGeom>
+          <a:solidFill>
+            <a:srgbClr val="FFFFFF"/>
+          </a:solidFill>
+          <a:ln/>
+          <a:effectLst>
+            <a:outerShdw sx="100000" sy="100000" kx="0" ky="0" algn="bl" rotWithShape="0" blurRad="50800" dist="19050" dir="8100000">
+              <a:srgbClr val="000000">
+                <a:alpha val="8000"/>
+              </a:srgbClr>
+            </a:outerShdw>
+          </a:effectLst>
+        </p:spPr>
+      </p:sp>
+      <p:sp>
+        <p:nvSpPr>
+          <p:cNvPr id="17" name="Text 15"/>
+          <p:cNvSpPr/>
+          <p:nvPr/>
+        </p:nvSpPr>
+        <p:spPr>
+          <a:xfrm>
+            <a:off x="731520" y="3657600"/>
+            <a:ext cx="10698480" cy="2377440"/>
+          </a:xfrm>
+          <a:prstGeom prst="rect">
+            <a:avLst/>
+          </a:prstGeom>
+          <a:noFill/>
+          <a:ln/>
+        </p:spPr>
+        <p:txBody>
+          <a:bodyPr wrap="square" rtlCol="0" anchor="ctr"/>
+          <a:lstStyle/>
+          <a:p>
+            <a:pPr algn="ctr" indent="0" marL="0">
+              <a:buNone/>
+            </a:pPr>
+            <a:r>
+              <a:rPr lang="en-US" sz="1000" dirty="0">
+                <a:solidFill>
+                  <a:srgbClr val="94A3B8"/>
+                </a:solidFill>
+                <a:latin typeface="Calibri Light" pitchFamily="34" charset="0"/>
+                <a:ea typeface="Calibri Light" pitchFamily="34" charset="-122"/>
+                <a:cs typeface="Calibri Light" pitchFamily="34" charset="-120"/>
+              </a:rPr>
+              <a:t>{{chart_csv_data}}</a:t>
+            </a:r>
+            <a:endParaRPr lang="en-US" sz="1000" dirty="0"/>
+          </a:p>
+        </p:txBody>
+      </p:sp>
+      <p:sp>
+        <p:nvSpPr>
+          <p:cNvPr id="18" name="Text 16"/>
+          <p:cNvSpPr/>
+          <p:nvPr/>
+        </p:nvSpPr>
+        <p:spPr>
+          <a:xfrm>
+            <a:off x="731520" y="6510528"/>
+            <a:ext cx="10698480" cy="256032"/>
+          </a:xfrm>
+          <a:prstGeom prst="rect">
+            <a:avLst/>
+          </a:prstGeom>
+          <a:noFill/>
+          <a:ln/>
+        </p:spPr>
+        <p:txBody>
+          <a:bodyPr wrap="square" rtlCol="0" anchor="ctr"/>
+          <a:lstStyle/>
+          <a:p>
+            <a:pPr algn="l" indent="0" marL="0">
+              <a:buNone/>
+            </a:pPr>
+            <a:r>
+              <a:rPr lang="en-US" sz="800" dirty="0">
+                <a:solidFill>
+                  <a:srgbClr val="94A3B8"/>
+                </a:solidFill>
+                <a:latin typeface="Calibri Light" pitchFamily="34" charset="0"/>
+                <a:ea typeface="Calibri Light" pitchFamily="34" charset="-122"/>
+                <a:cs typeface="Calibri Light" pitchFamily="34" charset="-120"/>
+              </a:rPr>
+              <a:t>{{agency_name}}  •  Confidential  •  Page 14</a:t>
+            </a:r>
+            <a:endParaRPr lang="en-US" sz="800" dirty="0"/>
+          </a:p>
+        </p:txBody>
+      </p:sp>
+    </p:spTree>
+  </p:cSld>
+  <p:clrMapOvr>
+    <a:masterClrMapping/>
+  </p:clrMapOvr>
+</p:sld>
+</file>
+
+<file path=ppt/slides/slide15.xml><?xml version="1.0" encoding="utf-8"?>
+<p:sld xmlns:a="http://schemas.openxmlformats.org/drawingml/2006/main" xmlns:r="http://schemas.openxmlformats.org/officeDocument/2006/relationships" xmlns:p="http://schemas.openxmlformats.org/presentationml/2006/main">
+  <p:cSld name="Slide 15">
+    <p:bg>
+      <p:bgPr>
+        <a:solidFill>
+          <a:srgbClr val="FAFAFA"/>
+        </a:solidFill>
+      </p:bgPr>
+    </p:bg>
+    <p:spTree>
+      <p:nvGrpSpPr>
+        <p:cNvPr id="1" name=""/>
+        <p:cNvGrpSpPr/>
+        <p:nvPr/>
+      </p:nvGrpSpPr>
+      <p:grpSpPr>
+        <a:xfrm>
+          <a:off x="0" y="0"/>
+          <a:ext cx="0" cy="0"/>
+          <a:chOff x="0" y="0"/>
+          <a:chExt cx="0" cy="0"/>
+        </a:xfrm>
+      </p:grpSpPr>
+      <p:sp>
+        <p:nvSpPr>
+          <p:cNvPr id="2" name="Shape 0"/>
+          <p:cNvSpPr/>
+          <p:nvPr/>
+        </p:nvSpPr>
+        <p:spPr>
+          <a:xfrm>
+            <a:off x="0" y="0"/>
+            <a:ext cx="54864" cy="6858000"/>
+          </a:xfrm>
+          <a:prstGeom prst="rect">
+            <a:avLst/>
+          </a:prstGeom>
+          <a:solidFill>
+            <a:srgbClr val="4338CA"/>
+          </a:solidFill>
+          <a:ln/>
+        </p:spPr>
+      </p:sp>
+      <p:sp>
+        <p:nvSpPr>
+          <p:cNvPr id="3" name="Text 1"/>
+          <p:cNvSpPr/>
+          <p:nvPr/>
+        </p:nvSpPr>
+        <p:spPr>
+          <a:xfrm>
+            <a:off x="731520" y="411480"/>
+            <a:ext cx="10698480" cy="640080"/>
+          </a:xfrm>
+          <a:prstGeom prst="rect">
+            <a:avLst/>
+          </a:prstGeom>
+          <a:noFill/>
+          <a:ln/>
+        </p:spPr>
+        <p:txBody>
+          <a:bodyPr wrap="square" lIns="0" tIns="0" rIns="0" bIns="0" rtlCol="0" anchor="ctr"/>
+          <a:lstStyle/>
+          <a:p>
+            <a:pPr indent="0" marL="0">
+              <a:buNone/>
+            </a:pPr>
+            <a:r>
+              <a:rPr lang="en-US" sz="2800" b="1" dirty="0">
+                <a:solidFill>
+                  <a:srgbClr val="0F172A"/>
+                </a:solidFill>
+                <a:latin typeface="Calibri" pitchFamily="34" charset="0"/>
+                <a:ea typeface="Calibri" pitchFamily="34" charset="-122"/>
+                <a:cs typeface="Calibri" pitchFamily="34" charset="-120"/>
+              </a:rPr>
+              <a:t>Conversion Funnel</a:t>
+            </a:r>
+            <a:endParaRPr lang="en-US" sz="2800" dirty="0"/>
+          </a:p>
+        </p:txBody>
+      </p:sp>
+      <p:sp>
+        <p:nvSpPr>
+          <p:cNvPr id="4" name="Shape 2"/>
+          <p:cNvSpPr/>
+          <p:nvPr/>
+        </p:nvSpPr>
+        <p:spPr>
+          <a:xfrm>
+            <a:off x="731520" y="1371600"/>
+            <a:ext cx="10698480" cy="3657600"/>
+          </a:xfrm>
+          <a:prstGeom prst="rect">
+            <a:avLst/>
+          </a:prstGeom>
+          <a:solidFill>
+            <a:srgbClr val="FFFFFF"/>
+          </a:solidFill>
+          <a:ln/>
+          <a:effectLst>
+            <a:outerShdw sx="100000" sy="100000" kx="0" ky="0" algn="bl" rotWithShape="0" blurRad="50800" dist="19050" dir="8100000">
+              <a:srgbClr val="000000">
+                <a:alpha val="8000"/>
+              </a:srgbClr>
+            </a:outerShdw>
+          </a:effectLst>
+        </p:spPr>
+      </p:sp>
+      <p:sp>
+        <p:nvSpPr>
+          <p:cNvPr id="5" name="Text 3"/>
+          <p:cNvSpPr/>
+          <p:nvPr/>
+        </p:nvSpPr>
+        <p:spPr>
+          <a:xfrm>
+            <a:off x="731520" y="1371600"/>
+            <a:ext cx="10698480" cy="3657600"/>
+          </a:xfrm>
+          <a:prstGeom prst="rect">
+            <a:avLst/>
+          </a:prstGeom>
+          <a:noFill/>
+          <a:ln/>
+        </p:spPr>
+        <p:txBody>
+          <a:bodyPr wrap="square" rtlCol="0" anchor="ctr"/>
+          <a:lstStyle/>
+          <a:p>
+            <a:pPr algn="ctr" indent="0" marL="0">
+              <a:buNone/>
+            </a:pPr>
+            <a:r>
+              <a:rPr lang="en-US" sz="1000" dirty="0">
+                <a:solidFill>
+                  <a:srgbClr val="94A3B8"/>
+                </a:solidFill>
+                <a:latin typeface="Calibri Light" pitchFamily="34" charset="0"/>
+                <a:ea typeface="Calibri Light" pitchFamily="34" charset="-122"/>
+                <a:cs typeface="Calibri Light" pitchFamily="34" charset="-120"/>
+              </a:rPr>
+              <a:t>{{chart_conversion_funnel}}</a:t>
+            </a:r>
+            <a:endParaRPr lang="en-US" sz="1000" dirty="0"/>
+          </a:p>
+        </p:txBody>
+      </p:sp>
+      <p:sp>
+        <p:nvSpPr>
+          <p:cNvPr id="6" name="Text 4"/>
+          <p:cNvSpPr/>
+          <p:nvPr/>
+        </p:nvSpPr>
+        <p:spPr>
+          <a:xfrm>
+            <a:off x="731520" y="5257800"/>
+            <a:ext cx="10698480" cy="1097280"/>
+          </a:xfrm>
+          <a:prstGeom prst="rect">
+            <a:avLst/>
+          </a:prstGeom>
+          <a:noFill/>
+          <a:ln/>
+        </p:spPr>
+        <p:txBody>
+          <a:bodyPr wrap="square" rtlCol="0" anchor="t"/>
+          <a:lstStyle/>
+          <a:p>
+            <a:pPr indent="0" marL="0">
+              <a:lnSpc>
+                <a:spcPct val="135000"/>
+              </a:lnSpc>
+              <a:buNone/>
+            </a:pPr>
+            <a:r>
+              <a:rPr lang="en-US" sz="1200" dirty="0">
+                <a:solidFill>
+                  <a:srgbClr val="334155"/>
+                </a:solidFill>
+                <a:latin typeface="Calibri Light" pitchFamily="34" charset="0"/>
+                <a:ea typeface="Calibri Light" pitchFamily="34" charset="-122"/>
+                <a:cs typeface="Calibri Light" pitchFamily="34" charset="-120"/>
+              </a:rPr>
+              <a:t>{{website_narrative}}</a:t>
+            </a:r>
+            <a:endParaRPr lang="en-US" sz="1200" dirty="0"/>
+          </a:p>
+        </p:txBody>
+      </p:sp>
+      <p:sp>
+        <p:nvSpPr>
+          <p:cNvPr id="7" name="Text 5"/>
+          <p:cNvSpPr/>
+          <p:nvPr/>
+        </p:nvSpPr>
+        <p:spPr>
+          <a:xfrm>
+            <a:off x="731520" y="6510528"/>
+            <a:ext cx="10698480" cy="256032"/>
+          </a:xfrm>
+          <a:prstGeom prst="rect">
+            <a:avLst/>
+          </a:prstGeom>
+          <a:noFill/>
+          <a:ln/>
+        </p:spPr>
+        <p:txBody>
+          <a:bodyPr wrap="square" rtlCol="0" anchor="ctr"/>
+          <a:lstStyle/>
+          <a:p>
+            <a:pPr algn="l" indent="0" marL="0">
+              <a:buNone/>
+            </a:pPr>
+            <a:r>
+              <a:rPr lang="en-US" sz="800" dirty="0">
+                <a:solidFill>
+                  <a:srgbClr val="94A3B8"/>
+                </a:solidFill>
+                <a:latin typeface="Calibri Light" pitchFamily="34" charset="0"/>
+                <a:ea typeface="Calibri Light" pitchFamily="34" charset="-122"/>
+                <a:cs typeface="Calibri Light" pitchFamily="34" charset="-120"/>
+              </a:rPr>
+              <a:t>{{agency_name}}  •  Confidential  •  Page 15</a:t>
+            </a:r>
+            <a:endParaRPr lang="en-US" sz="800" dirty="0"/>
+          </a:p>
+        </p:txBody>
+      </p:sp>
+    </p:spTree>
+  </p:cSld>
+  <p:clrMapOvr>
+    <a:masterClrMapping/>
+  </p:clrMapOvr>
+</p:sld>
+</file>
+
+<file path=ppt/slides/slide16.xml><?xml version="1.0" encoding="utf-8"?>
+<p:sld xmlns:a="http://schemas.openxmlformats.org/drawingml/2006/main" xmlns:r="http://schemas.openxmlformats.org/officeDocument/2006/relationships" xmlns:p="http://schemas.openxmlformats.org/presentationml/2006/main">
+  <p:cSld name="Slide 16">
+    <p:bg>
+      <p:bgPr>
+        <a:solidFill>
+          <a:srgbClr val="FAFAFA"/>
+        </a:solidFill>
+      </p:bgPr>
+    </p:bg>
+    <p:spTree>
+      <p:nvGrpSpPr>
+        <p:cNvPr id="1" name=""/>
+        <p:cNvGrpSpPr/>
+        <p:nvPr/>
+      </p:nvGrpSpPr>
+      <p:grpSpPr>
+        <a:xfrm>
+          <a:off x="0" y="0"/>
+          <a:ext cx="0" cy="0"/>
+          <a:chOff x="0" y="0"/>
+          <a:chExt cx="0" cy="0"/>
+        </a:xfrm>
+      </p:grpSpPr>
+      <p:sp>
+        <p:nvSpPr>
+          <p:cNvPr id="2" name="Shape 0"/>
+          <p:cNvSpPr/>
+          <p:nvPr/>
+        </p:nvSpPr>
+        <p:spPr>
+          <a:xfrm>
+            <a:off x="0" y="0"/>
+            <a:ext cx="54864" cy="6858000"/>
+          </a:xfrm>
+          <a:prstGeom prst="rect">
+            <a:avLst/>
+          </a:prstGeom>
+          <a:solidFill>
+            <a:srgbClr val="059669"/>
+          </a:solidFill>
+          <a:ln/>
+        </p:spPr>
+      </p:sp>
+      <p:sp>
+        <p:nvSpPr>
+          <p:cNvPr id="3" name="Shape 1"/>
+          <p:cNvSpPr/>
+          <p:nvPr/>
+        </p:nvSpPr>
+        <p:spPr>
+          <a:xfrm>
+            <a:off x="54864" y="0"/>
+            <a:ext cx="12106656" cy="1051560"/>
+          </a:xfrm>
+          <a:prstGeom prst="rect">
+            <a:avLst/>
+          </a:prstGeom>
+          <a:solidFill>
+            <a:srgbClr val="F0FDF4"/>
+          </a:solidFill>
+          <a:ln/>
+        </p:spPr>
+      </p:sp>
+      <p:sp>
+        <p:nvSpPr>
+          <p:cNvPr id="4" name="Text 2"/>
+          <p:cNvSpPr/>
+          <p:nvPr/>
+        </p:nvSpPr>
+        <p:spPr>
+          <a:xfrm>
+            <a:off x="731520" y="411480"/>
+            <a:ext cx="10698480" cy="640080"/>
+          </a:xfrm>
+          <a:prstGeom prst="rect">
+            <a:avLst/>
+          </a:prstGeom>
+          <a:noFill/>
+          <a:ln/>
+        </p:spPr>
+        <p:txBody>
+          <a:bodyPr wrap="square" lIns="0" tIns="0" rIns="0" bIns="0" rtlCol="0" anchor="ctr"/>
+          <a:lstStyle/>
+          <a:p>
+            <a:pPr indent="0" marL="0">
+              <a:buNone/>
+            </a:pPr>
+            <a:r>
+              <a:rPr lang="en-US" sz="2800" b="1" dirty="0">
+                <a:solidFill>
+                  <a:srgbClr val="065F46"/>
+                </a:solidFill>
+                <a:latin typeface="Calibri" pitchFamily="34" charset="0"/>
+                <a:ea typeface="Calibri" pitchFamily="34" charset="-122"/>
+                <a:cs typeface="Calibri" pitchFamily="34" charset="-120"/>
+              </a:rPr>
+              <a:t>Key Wins &amp; Highlights</a:t>
+            </a:r>
+            <a:endParaRPr lang="en-US" sz="2800" dirty="0"/>
+          </a:p>
+        </p:txBody>
+      </p:sp>
+      <p:sp>
+        <p:nvSpPr>
+          <p:cNvPr id="5" name="Text 3"/>
+          <p:cNvSpPr/>
+          <p:nvPr/>
+        </p:nvSpPr>
+        <p:spPr>
+          <a:xfrm>
+            <a:off x="731520" y="1371600"/>
+            <a:ext cx="10698480" cy="4572000"/>
+          </a:xfrm>
+          <a:prstGeom prst="rect">
+            <a:avLst/>
+          </a:prstGeom>
+          <a:noFill/>
+          <a:ln/>
+        </p:spPr>
+        <p:txBody>
+          <a:bodyPr wrap="square" rtlCol="0" anchor="t"/>
+          <a:lstStyle/>
+          <a:p>
+            <a:pPr indent="0" marL="0">
+              <a:lnSpc>
+                <a:spcPct val="150000"/>
+              </a:lnSpc>
+              <a:buNone/>
+            </a:pPr>
+            <a:r>
+              <a:rPr lang="en-US" sz="1200" dirty="0">
+                <a:solidFill>
+                  <a:srgbClr val="334155"/>
+                </a:solidFill>
+                <a:latin typeface="Calibri Light" pitchFamily="34" charset="0"/>
+                <a:ea typeface="Calibri Light" pitchFamily="34" charset="-122"/>
+                <a:cs typeface="Calibri Light" pitchFamily="34" charset="-120"/>
+              </a:rPr>
+              <a:t>{{key_wins}}</a:t>
+            </a:r>
+            <a:endParaRPr lang="en-US" sz="1200" dirty="0"/>
+          </a:p>
+        </p:txBody>
+      </p:sp>
+      <p:sp>
+        <p:nvSpPr>
+          <p:cNvPr id="6" name="Text 4"/>
+          <p:cNvSpPr/>
+          <p:nvPr/>
+        </p:nvSpPr>
+        <p:spPr>
+          <a:xfrm>
+            <a:off x="731520" y="6510528"/>
+            <a:ext cx="10698480" cy="256032"/>
+          </a:xfrm>
+          <a:prstGeom prst="rect">
+            <a:avLst/>
+          </a:prstGeom>
+          <a:noFill/>
+          <a:ln/>
+        </p:spPr>
+        <p:txBody>
+          <a:bodyPr wrap="square" rtlCol="0" anchor="ctr"/>
+          <a:lstStyle/>
+          <a:p>
+            <a:pPr algn="l" indent="0" marL="0">
+              <a:buNone/>
+            </a:pPr>
+            <a:r>
+              <a:rPr lang="en-US" sz="800" dirty="0">
+                <a:solidFill>
+                  <a:srgbClr val="94A3B8"/>
+                </a:solidFill>
+                <a:latin typeface="Calibri Light" pitchFamily="34" charset="0"/>
+                <a:ea typeface="Calibri Light" pitchFamily="34" charset="-122"/>
+                <a:cs typeface="Calibri Light" pitchFamily="34" charset="-120"/>
+              </a:rPr>
+              <a:t>{{agency_name}}  •  Confidential  •  Page 16</a:t>
+            </a:r>
+            <a:endParaRPr lang="en-US" sz="800" dirty="0"/>
+          </a:p>
+        </p:txBody>
+      </p:sp>
+    </p:spTree>
+  </p:cSld>
+  <p:clrMapOvr>
+    <a:masterClrMapping/>
+  </p:clrMapOvr>
+</p:sld>
+</file>
+
+<file path=ppt/slides/slide17.xml><?xml version="1.0" encoding="utf-8"?>
+<p:sld xmlns:a="http://schemas.openxmlformats.org/drawingml/2006/main" xmlns:r="http://schemas.openxmlformats.org/officeDocument/2006/relationships" xmlns:p="http://schemas.openxmlformats.org/presentationml/2006/main">
+  <p:cSld name="Slide 17">
+    <p:bg>
+      <p:bgPr>
+        <a:solidFill>
+          <a:srgbClr val="FAFAFA"/>
+        </a:solidFill>
+      </p:bgPr>
+    </p:bg>
+    <p:spTree>
+      <p:nvGrpSpPr>
+        <p:cNvPr id="1" name=""/>
+        <p:cNvGrpSpPr/>
+        <p:nvPr/>
+      </p:nvGrpSpPr>
+      <p:grpSpPr>
+        <a:xfrm>
+          <a:off x="0" y="0"/>
+          <a:ext cx="0" cy="0"/>
+          <a:chOff x="0" y="0"/>
+          <a:chExt cx="0" cy="0"/>
+        </a:xfrm>
+      </p:grpSpPr>
+      <p:sp>
+        <p:nvSpPr>
+          <p:cNvPr id="2" name="Shape 0"/>
+          <p:cNvSpPr/>
+          <p:nvPr/>
+        </p:nvSpPr>
+        <p:spPr>
+          <a:xfrm>
+            <a:off x="0" y="0"/>
+            <a:ext cx="54864" cy="6858000"/>
+          </a:xfrm>
+          <a:prstGeom prst="rect">
+            <a:avLst/>
+          </a:prstGeom>
+          <a:solidFill>
+            <a:srgbClr val="D97706"/>
+          </a:solidFill>
+          <a:ln/>
+        </p:spPr>
+      </p:sp>
+      <p:sp>
+        <p:nvSpPr>
+          <p:cNvPr id="3" name="Shape 1"/>
+          <p:cNvSpPr/>
+          <p:nvPr/>
+        </p:nvSpPr>
+        <p:spPr>
+          <a:xfrm>
+            <a:off x="54864" y="0"/>
+            <a:ext cx="12106656" cy="1051560"/>
+          </a:xfrm>
+          <a:prstGeom prst="rect">
+            <a:avLst/>
+          </a:prstGeom>
+          <a:solidFill>
+            <a:srgbClr val="FFFBEB"/>
+          </a:solidFill>
+          <a:ln/>
+        </p:spPr>
+      </p:sp>
+      <p:sp>
+        <p:nvSpPr>
+          <p:cNvPr id="4" name="Text 2"/>
+          <p:cNvSpPr/>
+          <p:nvPr/>
+        </p:nvSpPr>
+        <p:spPr>
+          <a:xfrm>
+            <a:off x="731520" y="411480"/>
+            <a:ext cx="10698480" cy="640080"/>
+          </a:xfrm>
+          <a:prstGeom prst="rect">
+            <a:avLst/>
+          </a:prstGeom>
+          <a:noFill/>
+          <a:ln/>
+        </p:spPr>
+        <p:txBody>
+          <a:bodyPr wrap="square" lIns="0" tIns="0" rIns="0" bIns="0" rtlCol="0" anchor="ctr"/>
+          <a:lstStyle/>
+          <a:p>
+            <a:pPr indent="0" marL="0">
+              <a:buNone/>
+            </a:pPr>
+            <a:r>
+              <a:rPr lang="en-US" sz="2800" b="1" dirty="0">
+                <a:solidFill>
+                  <a:srgbClr val="92400E"/>
+                </a:solidFill>
+                <a:latin typeface="Calibri" pitchFamily="34" charset="0"/>
+                <a:ea typeface="Calibri" pitchFamily="34" charset="-122"/>
+                <a:cs typeface="Calibri" pitchFamily="34" charset="-120"/>
+              </a:rPr>
+              <a:t>Concerns &amp; Recommendations</a:t>
+            </a:r>
+            <a:endParaRPr lang="en-US" sz="2800" dirty="0"/>
+          </a:p>
+        </p:txBody>
+      </p:sp>
+      <p:sp>
+        <p:nvSpPr>
+          <p:cNvPr id="5" name="Text 3"/>
+          <p:cNvSpPr/>
+          <p:nvPr/>
+        </p:nvSpPr>
+        <p:spPr>
+          <a:xfrm>
+            <a:off x="731520" y="1371600"/>
+            <a:ext cx="10698480" cy="4572000"/>
+          </a:xfrm>
+          <a:prstGeom prst="rect">
+            <a:avLst/>
+          </a:prstGeom>
+          <a:noFill/>
+          <a:ln/>
+        </p:spPr>
+        <p:txBody>
+          <a:bodyPr wrap="square" rtlCol="0" anchor="t"/>
+          <a:lstStyle/>
+          <a:p>
+            <a:pPr indent="0" marL="0">
+              <a:lnSpc>
+                <a:spcPct val="150000"/>
+              </a:lnSpc>
+              <a:buNone/>
+            </a:pPr>
+            <a:r>
+              <a:rPr lang="en-US" sz="1200" dirty="0">
+                <a:solidFill>
+                  <a:srgbClr val="334155"/>
+                </a:solidFill>
+                <a:latin typeface="Calibri Light" pitchFamily="34" charset="0"/>
+                <a:ea typeface="Calibri Light" pitchFamily="34" charset="-122"/>
+                <a:cs typeface="Calibri Light" pitchFamily="34" charset="-120"/>
+              </a:rPr>
+              <a:t>{{concerns}}</a:t>
+            </a:r>
+            <a:endParaRPr lang="en-US" sz="1200" dirty="0"/>
+          </a:p>
+        </p:txBody>
+      </p:sp>
+      <p:sp>
+        <p:nvSpPr>
+          <p:cNvPr id="6" name="Text 4"/>
+          <p:cNvSpPr/>
+          <p:nvPr/>
+        </p:nvSpPr>
+        <p:spPr>
+          <a:xfrm>
+            <a:off x="731520" y="6510528"/>
+            <a:ext cx="10698480" cy="256032"/>
+          </a:xfrm>
+          <a:prstGeom prst="rect">
+            <a:avLst/>
+          </a:prstGeom>
+          <a:noFill/>
+          <a:ln/>
+        </p:spPr>
+        <p:txBody>
+          <a:bodyPr wrap="square" rtlCol="0" anchor="ctr"/>
+          <a:lstStyle/>
+          <a:p>
+            <a:pPr algn="l" indent="0" marL="0">
+              <a:buNone/>
+            </a:pPr>
+            <a:r>
+              <a:rPr lang="en-US" sz="800" dirty="0">
+                <a:solidFill>
+                  <a:srgbClr val="94A3B8"/>
+                </a:solidFill>
+                <a:latin typeface="Calibri Light" pitchFamily="34" charset="0"/>
+                <a:ea typeface="Calibri Light" pitchFamily="34" charset="-122"/>
+                <a:cs typeface="Calibri Light" pitchFamily="34" charset="-120"/>
+              </a:rPr>
+              <a:t>{{agency_name}}  •  Confidential  •  Page 17</a:t>
+            </a:r>
+            <a:endParaRPr lang="en-US" sz="800" dirty="0"/>
+          </a:p>
+        </p:txBody>
+      </p:sp>
+    </p:spTree>
+  </p:cSld>
+  <p:clrMapOvr>
+    <a:masterClrMapping/>
+  </p:clrMapOvr>
+</p:sld>
+</file>
+
+<file path=ppt/slides/slide18.xml><?xml version="1.0" encoding="utf-8"?>
+<p:sld xmlns:a="http://schemas.openxmlformats.org/drawingml/2006/main" xmlns:r="http://schemas.openxmlformats.org/officeDocument/2006/relationships" xmlns:p="http://schemas.openxmlformats.org/presentationml/2006/main">
+  <p:cSld name="Slide 18">
+    <p:bg>
+      <p:bgPr>
+        <a:solidFill>
+          <a:srgbClr val="FAFAFA"/>
+        </a:solidFill>
+      </p:bgPr>
+    </p:bg>
+    <p:spTree>
+      <p:nvGrpSpPr>
+        <p:cNvPr id="1" name=""/>
+        <p:cNvGrpSpPr/>
+        <p:nvPr/>
+      </p:nvGrpSpPr>
+      <p:grpSpPr>
+        <a:xfrm>
+          <a:off x="0" y="0"/>
+          <a:ext cx="0" cy="0"/>
+          <a:chOff x="0" y="0"/>
+          <a:chExt cx="0" cy="0"/>
+        </a:xfrm>
+      </p:grpSpPr>
+      <p:sp>
+        <p:nvSpPr>
+          <p:cNvPr id="2" name="Shape 0"/>
+          <p:cNvSpPr/>
+          <p:nvPr/>
+        </p:nvSpPr>
+        <p:spPr>
+          <a:xfrm>
+            <a:off x="0" y="0"/>
+            <a:ext cx="54864" cy="6858000"/>
+          </a:xfrm>
+          <a:prstGeom prst="rect">
+            <a:avLst/>
+          </a:prstGeom>
+          <a:solidFill>
+            <a:srgbClr val="4338CA"/>
+          </a:solidFill>
+          <a:ln/>
+        </p:spPr>
+      </p:sp>
+      <p:sp>
+        <p:nvSpPr>
+          <p:cNvPr id="3" name="Text 1"/>
+          <p:cNvSpPr/>
+          <p:nvPr/>
+        </p:nvSpPr>
+        <p:spPr>
+          <a:xfrm>
+            <a:off x="731520" y="411480"/>
+            <a:ext cx="10698480" cy="640080"/>
+          </a:xfrm>
+          <a:prstGeom prst="rect">
+            <a:avLst/>
+          </a:prstGeom>
+          <a:noFill/>
+          <a:ln/>
+        </p:spPr>
+        <p:txBody>
+          <a:bodyPr wrap="square" lIns="0" tIns="0" rIns="0" bIns="0" rtlCol="0" anchor="ctr"/>
+          <a:lstStyle/>
+          <a:p>
+            <a:pPr indent="0" marL="0">
+              <a:buNone/>
+            </a:pPr>
+            <a:r>
+              <a:rPr lang="en-US" sz="2800" b="1" dirty="0">
+                <a:solidFill>
+                  <a:srgbClr val="0F172A"/>
+                </a:solidFill>
+                <a:latin typeface="Calibri" pitchFamily="34" charset="0"/>
+                <a:ea typeface="Calibri" pitchFamily="34" charset="-122"/>
+                <a:cs typeface="Calibri" pitchFamily="34" charset="-120"/>
+              </a:rPr>
+              <a:t>Next Steps &amp; Action Items</a:t>
+            </a:r>
+            <a:endParaRPr lang="en-US" sz="2800" dirty="0"/>
+          </a:p>
+        </p:txBody>
+      </p:sp>
+      <p:sp>
+        <p:nvSpPr>
+          <p:cNvPr id="4" name="Text 2"/>
+          <p:cNvSpPr/>
+          <p:nvPr/>
+        </p:nvSpPr>
+        <p:spPr>
+          <a:xfrm>
+            <a:off x="731520" y="1371600"/>
+            <a:ext cx="10698480" cy="3657600"/>
+          </a:xfrm>
+          <a:prstGeom prst="rect">
+            <a:avLst/>
+          </a:prstGeom>
+          <a:noFill/>
+          <a:ln/>
+        </p:spPr>
+        <p:txBody>
+          <a:bodyPr wrap="square" rtlCol="0" anchor="t"/>
+          <a:lstStyle/>
+          <a:p>
+            <a:pPr indent="0" marL="0">
+              <a:lnSpc>
+                <a:spcPct val="150000"/>
+              </a:lnSpc>
+              <a:buNone/>
+            </a:pPr>
+            <a:r>
+              <a:rPr lang="en-US" sz="1200" dirty="0">
+                <a:solidFill>
+                  <a:srgbClr val="334155"/>
+                </a:solidFill>
+                <a:latin typeface="Calibri Light" pitchFamily="34" charset="0"/>
+                <a:ea typeface="Calibri Light" pitchFamily="34" charset="-122"/>
+                <a:cs typeface="Calibri Light" pitchFamily="34" charset="-120"/>
+              </a:rPr>
+              <a:t>{{next_steps}}</a:t>
+            </a:r>
+            <a:endParaRPr lang="en-US" sz="1200" dirty="0"/>
+          </a:p>
+        </p:txBody>
+      </p:sp>
+      <p:sp>
+        <p:nvSpPr>
+          <p:cNvPr id="5" name="Shape 3"/>
+          <p:cNvSpPr/>
+          <p:nvPr/>
+        </p:nvSpPr>
+        <p:spPr>
+          <a:xfrm>
+            <a:off x="0" y="5760720"/>
+            <a:ext cx="12161520" cy="1097280"/>
+          </a:xfrm>
+          <a:prstGeom prst="rect">
+            <a:avLst/>
+          </a:prstGeom>
+          <a:solidFill>
+            <a:srgbClr val="4338CA"/>
+          </a:solidFill>
+          <a:ln/>
+        </p:spPr>
+      </p:sp>
+      <p:sp>
+        <p:nvSpPr>
+          <p:cNvPr id="6" name="Text 4"/>
+          <p:cNvSpPr/>
+          <p:nvPr/>
+        </p:nvSpPr>
+        <p:spPr>
+          <a:xfrm>
+            <a:off x="731520" y="5806440"/>
+            <a:ext cx="10698480" cy="411480"/>
+          </a:xfrm>
+          <a:prstGeom prst="rect">
+            <a:avLst/>
+          </a:prstGeom>
+          <a:noFill/>
+          <a:ln/>
+        </p:spPr>
+        <p:txBody>
+          <a:bodyPr wrap="square" rtlCol="0" anchor="ctr"/>
+          <a:lstStyle/>
+          <a:p>
+            <a:pPr indent="0" marL="0">
+              <a:buNone/>
+            </a:pPr>
+            <a:r>
+              <a:rPr lang="en-US" sz="1300" b="1" dirty="0">
+                <a:solidFill>
+                  <a:srgbClr val="FFFFFF"/>
+                </a:solidFill>
+                <a:latin typeface="Calibri Light" pitchFamily="34" charset="0"/>
+                <a:ea typeface="Calibri Light" pitchFamily="34" charset="-122"/>
+                <a:cs typeface="Calibri Light" pitchFamily="34" charset="-120"/>
+              </a:rPr>
+              <a:t>Questions? Reply to this email or schedule a call.</a:t>
+            </a:r>
+            <a:endParaRPr lang="en-US" sz="1300" dirty="0"/>
+          </a:p>
+        </p:txBody>
+      </p:sp>
+      <p:sp>
+        <p:nvSpPr>
+          <p:cNvPr id="7" name="Text 5"/>
+          <p:cNvSpPr/>
+          <p:nvPr/>
+        </p:nvSpPr>
+        <p:spPr>
+          <a:xfrm>
+            <a:off x="731520" y="6263640"/>
+            <a:ext cx="10698480" cy="320040"/>
+          </a:xfrm>
+          <a:prstGeom prst="rect">
+            <a:avLst/>
+          </a:prstGeom>
+          <a:noFill/>
+          <a:ln/>
+        </p:spPr>
+        <p:txBody>
+          <a:bodyPr wrap="square" rtlCol="0" anchor="ctr"/>
+          <a:lstStyle/>
+          <a:p>
+            <a:pPr indent="0" marL="0">
+              <a:buNone/>
+            </a:pPr>
+            <a:r>
+              <a:rPr lang="en-US" sz="1100" dirty="0">
+                <a:solidFill>
+                  <a:srgbClr val="C7D2FE"/>
+                </a:solidFill>
+                <a:latin typeface="Calibri Light" pitchFamily="34" charset="0"/>
+                <a:ea typeface="Calibri Light" pitchFamily="34" charset="-122"/>
+                <a:cs typeface="Calibri Light" pitchFamily="34" charset="-120"/>
+              </a:rPr>
+              <a:t>{{agency_name}}  •  {{agency_email}}</a:t>
+            </a:r>
+            <a:endParaRPr lang="en-US" sz="1100" dirty="0"/>
+          </a:p>
+        </p:txBody>
+      </p:sp>
+    </p:spTree>
+  </p:cSld>
+  <p:clrMapOvr>
+    <a:masterClrMapping/>
+  </p:clrMapOvr>
+</p:sld>
+</file>
+
+<file path=ppt/slides/slide19.xml><?xml version="1.0" encoding="utf-8"?>
+<p:sld xmlns:a="http://schemas.openxmlformats.org/drawingml/2006/main" xmlns:r="http://schemas.openxmlformats.org/officeDocument/2006/relationships" xmlns:p="http://schemas.openxmlformats.org/presentationml/2006/main">
+  <p:cSld name="Slide 19">
+    <p:bg>
+      <p:bgPr>
+        <a:solidFill>
+          <a:srgbClr val="FAFAFA"/>
+        </a:solidFill>
+      </p:bgPr>
+    </p:bg>
+    <p:spTree>
+      <p:nvGrpSpPr>
+        <p:cNvPr id="1" name=""/>
+        <p:cNvGrpSpPr/>
+        <p:nvPr/>
+      </p:nvGrpSpPr>
+      <p:grpSpPr>
+        <a:xfrm>
+          <a:off x="0" y="0"/>
+          <a:ext cx="0" cy="0"/>
+          <a:chOff x="0" y="0"/>
+          <a:chExt cx="0" cy="0"/>
+        </a:xfrm>
+      </p:grpSpPr>
+      <p:sp>
+        <p:nvSpPr>
+          <p:cNvPr id="2" name="Shape 0"/>
+          <p:cNvSpPr/>
+          <p:nvPr/>
+        </p:nvSpPr>
+        <p:spPr>
+          <a:xfrm>
+            <a:off x="0" y="0"/>
+            <a:ext cx="54864" cy="6858000"/>
+          </a:xfrm>
+          <a:prstGeom prst="rect">
+            <a:avLst/>
+          </a:prstGeom>
+          <a:solidFill>
+            <a:srgbClr val="4338CA"/>
+          </a:solidFill>
+          <a:ln/>
+        </p:spPr>
+      </p:sp>
+      <p:sp>
+        <p:nvSpPr>
+          <p:cNvPr id="3" name="Text 1"/>
+          <p:cNvSpPr/>
+          <p:nvPr/>
+        </p:nvSpPr>
+        <p:spPr>
+          <a:xfrm>
+            <a:off x="731520" y="411480"/>
+            <a:ext cx="10698480" cy="640080"/>
+          </a:xfrm>
+          <a:prstGeom prst="rect">
+            <a:avLst/>
+          </a:prstGeom>
+          <a:noFill/>
+          <a:ln/>
+        </p:spPr>
+        <p:txBody>
+          <a:bodyPr wrap="square" rtlCol="0" anchor="ctr"/>
+          <a:lstStyle/>
+          <a:p>
+            <a:pPr indent="0" marL="0">
+              <a:buNone/>
+            </a:pPr>
+            <a:r>
+              <a:rPr lang="en-US" sz="2800" b="1" dirty="0">
+                <a:solidFill>
+                  <a:srgbClr val="0F172A"/>
+                </a:solidFill>
+                <a:latin typeface="Calibri" pitchFamily="34" charset="0"/>
+                <a:ea typeface="Calibri" pitchFamily="34" charset="-122"/>
+                <a:cs typeface="Calibri" pitchFamily="34" charset="-120"/>
+              </a:rPr>
+              <a:t>{{custom_section_title}}</a:t>
+            </a:r>
+            <a:endParaRPr lang="en-US" sz="2800" dirty="0"/>
+          </a:p>
+        </p:txBody>
+      </p:sp>
+      <p:sp>
+        <p:nvSpPr>
+          <p:cNvPr id="4" name="Text 2"/>
+          <p:cNvSpPr/>
+          <p:nvPr/>
+        </p:nvSpPr>
+        <p:spPr>
+          <a:xfrm>
+            <a:off x="731520" y="1371600"/>
+            <a:ext cx="10698480" cy="4572000"/>
+          </a:xfrm>
+          <a:prstGeom prst="rect">
+            <a:avLst/>
+          </a:prstGeom>
+          <a:noFill/>
+          <a:ln/>
+        </p:spPr>
+        <p:txBody>
+          <a:bodyPr wrap="square" rtlCol="0" anchor="t"/>
+          <a:lstStyle/>
+          <a:p>
+            <a:pPr indent="0" marL="0">
+              <a:lnSpc>
+                <a:spcPct val="140000"/>
+              </a:lnSpc>
+              <a:buNone/>
+            </a:pPr>
+            <a:r>
+              <a:rPr lang="en-US" sz="1200" dirty="0">
+                <a:solidFill>
+                  <a:srgbClr val="334155"/>
+                </a:solidFill>
+                <a:latin typeface="Calibri Light" pitchFamily="34" charset="0"/>
+                <a:ea typeface="Calibri Light" pitchFamily="34" charset="-122"/>
+                <a:cs typeface="Calibri Light" pitchFamily="34" charset="-120"/>
+              </a:rPr>
+              <a:t>{{custom_section_text}}</a:t>
+            </a:r>
+            <a:endParaRPr lang="en-US" sz="1200" dirty="0"/>
+          </a:p>
+        </p:txBody>
+      </p:sp>
+      <p:sp>
+        <p:nvSpPr>
+          <p:cNvPr id="5" name="Text 3"/>
+          <p:cNvSpPr/>
+          <p:nvPr/>
+        </p:nvSpPr>
+        <p:spPr>
+          <a:xfrm>
+            <a:off x="731520" y="6510528"/>
+            <a:ext cx="10698480" cy="256032"/>
+          </a:xfrm>
+          <a:prstGeom prst="rect">
+            <a:avLst/>
+          </a:prstGeom>
+          <a:noFill/>
+          <a:ln/>
+        </p:spPr>
+        <p:txBody>
+          <a:bodyPr wrap="square" rtlCol="0" anchor="ctr"/>
+          <a:lstStyle/>
+          <a:p>
+            <a:pPr algn="l" indent="0" marL="0">
+              <a:buNone/>
+            </a:pPr>
+            <a:r>
+              <a:rPr lang="en-US" sz="800" dirty="0">
+                <a:solidFill>
+                  <a:srgbClr val="94A3B8"/>
+                </a:solidFill>
+                <a:latin typeface="Calibri Light" pitchFamily="34" charset="0"/>
+                <a:ea typeface="Calibri Light" pitchFamily="34" charset="-122"/>
+                <a:cs typeface="Calibri Light" pitchFamily="34" charset="-120"/>
+              </a:rPr>
+              <a:t>{{agency_name}}  •  Confidential  •  Page 19</a:t>
+            </a:r>
+            <a:endParaRPr lang="en-US" sz="800" dirty="0"/>
+          </a:p>
+        </p:txBody>
+      </p:sp>
+    </p:spTree>
+  </p:cSld>
+  <p:clrMapOvr>
+    <a:masterClrMapping/>
+  </p:clrMapOvr>
+</p:sld>
+</file>
+
 <file path=ppt/slides/slide2.xml><?xml version="1.0" encoding="utf-8"?>
 <p:sld xmlns:a="http://schemas.openxmlformats.org/drawingml/2006/main" xmlns:r="http://schemas.openxmlformats.org/officeDocument/2006/relationships" xmlns:p="http://schemas.openxmlformats.org/presentationml/2006/main">
   <p:cSld name="Slide 2">
@@ -3614,7 +7277,7 @@
                 <a:ea typeface="Calibri" pitchFamily="34" charset="-122"/>
                 <a:cs typeface="Calibri" pitchFamily="34" charset="-120"/>
               </a:rPr>
-              <a:t>Paid Advertising — Meta Ads</a:t>
+              <a:t>Website Engagement</a:t>
             </a:r>
             <a:endParaRPr lang="en-US" sz="2800" dirty="0"/>
           </a:p>
@@ -3680,7 +7343,7 @@
                 <a:ea typeface="Calibri Light" pitchFamily="34" charset="-122"/>
                 <a:cs typeface="Calibri Light" pitchFamily="34" charset="-120"/>
               </a:rPr>
-              <a:t>{{chart_spend}}</a:t>
+              <a:t>{{chart_device_breakdown}}</a:t>
             </a:r>
             <a:endParaRPr lang="en-US" sz="1000" dirty="0"/>
           </a:p>
@@ -3746,7 +7409,7 @@
                 <a:ea typeface="Calibri Light" pitchFamily="34" charset="-122"/>
                 <a:cs typeface="Calibri Light" pitchFamily="34" charset="-120"/>
               </a:rPr>
-              <a:t>{{chart_campaigns}}</a:t>
+              <a:t>{{chart_top_pages}}</a:t>
             </a:r>
             <a:endParaRPr lang="en-US" sz="1000" dirty="0"/>
           </a:p>
@@ -3788,7 +7451,7 @@
                 <a:ea typeface="Calibri Light" pitchFamily="34" charset="-122"/>
                 <a:cs typeface="Calibri Light" pitchFamily="34" charset="-120"/>
               </a:rPr>
-              <a:t>{{ads_narrative}}</a:t>
+              <a:t>{{website_narrative}}</a:t>
             </a:r>
             <a:endParaRPr lang="en-US" sz="1200" dirty="0"/>
           </a:p>
@@ -3880,34 +7543,14 @@
             <a:avLst/>
           </a:prstGeom>
           <a:solidFill>
-            <a:srgbClr val="059669"/>
+            <a:srgbClr val="4338CA"/>
           </a:solidFill>
           <a:ln/>
         </p:spPr>
       </p:sp>
       <p:sp>
         <p:nvSpPr>
-          <p:cNvPr id="3" name="Shape 1"/>
-          <p:cNvSpPr/>
-          <p:nvPr/>
-        </p:nvSpPr>
-        <p:spPr>
-          <a:xfrm>
-            <a:off x="54864" y="0"/>
-            <a:ext cx="12106656" cy="1051560"/>
-          </a:xfrm>
-          <a:prstGeom prst="rect">
-            <a:avLst/>
-          </a:prstGeom>
-          <a:solidFill>
-            <a:srgbClr val="F0FDF4"/>
-          </a:solidFill>
-          <a:ln/>
-        </p:spPr>
-      </p:sp>
-      <p:sp>
-        <p:nvSpPr>
-          <p:cNvPr id="4" name="Text 2"/>
+          <p:cNvPr id="3" name="Text 1"/>
           <p:cNvSpPr/>
           <p:nvPr/>
         </p:nvSpPr>
@@ -3932,13 +7575,13 @@
             <a:r>
               <a:rPr lang="en-US" sz="2800" b="1" dirty="0">
                 <a:solidFill>
-                  <a:srgbClr val="065F46"/>
+                  <a:srgbClr val="0F172A"/>
                 </a:solidFill>
                 <a:latin typeface="Calibri" pitchFamily="34" charset="0"/>
                 <a:ea typeface="Calibri" pitchFamily="34" charset="-122"/>
                 <a:cs typeface="Calibri" pitchFamily="34" charset="-120"/>
               </a:rPr>
-              <a:t>Key Wins &amp; Highlights</a:t>
+              <a:t>Audience Insights</a:t>
             </a:r>
             <a:endParaRPr lang="en-US" sz="2800" dirty="0"/>
           </a:p>
@@ -3946,6 +7589,33 @@
       </p:sp>
       <p:sp>
         <p:nvSpPr>
+          <p:cNvPr id="4" name="Shape 2"/>
+          <p:cNvSpPr/>
+          <p:nvPr/>
+        </p:nvSpPr>
+        <p:spPr>
+          <a:xfrm>
+            <a:off x="731520" y="1371600"/>
+            <a:ext cx="5120640" cy="2743200"/>
+          </a:xfrm>
+          <a:prstGeom prst="rect">
+            <a:avLst/>
+          </a:prstGeom>
+          <a:solidFill>
+            <a:srgbClr val="FFFFFF"/>
+          </a:solidFill>
+          <a:ln/>
+          <a:effectLst>
+            <a:outerShdw sx="100000" sy="100000" kx="0" ky="0" algn="bl" rotWithShape="0" blurRad="50800" dist="19050" dir="8100000">
+              <a:srgbClr val="000000">
+                <a:alpha val="8000"/>
+              </a:srgbClr>
+            </a:outerShdw>
+          </a:effectLst>
+        </p:spPr>
+      </p:sp>
+      <p:sp>
+        <p:nvSpPr>
           <p:cNvPr id="5" name="Text 3"/>
           <p:cNvSpPr/>
           <p:nvPr/>
@@ -3953,34 +7623,139 @@
         <p:spPr>
           <a:xfrm>
             <a:off x="731520" y="1371600"/>
-            <a:ext cx="10698480" cy="4572000"/>
-          </a:xfrm>
-          <a:prstGeom prst="rect">
-            <a:avLst/>
-          </a:prstGeom>
-          <a:noFill/>
-          <a:ln/>
-        </p:spPr>
-        <p:txBody>
-          <a:bodyPr wrap="square" rtlCol="0" anchor="t"/>
-          <a:lstStyle/>
-          <a:p>
-            <a:pPr indent="0" marL="0">
-              <a:lnSpc>
-                <a:spcPct val="150000"/>
-              </a:lnSpc>
-              <a:buNone/>
-            </a:pPr>
-            <a:r>
-              <a:rPr lang="en-US" sz="1200" dirty="0">
-                <a:solidFill>
-                  <a:srgbClr val="334155"/>
+            <a:ext cx="5120640" cy="2743200"/>
+          </a:xfrm>
+          <a:prstGeom prst="rect">
+            <a:avLst/>
+          </a:prstGeom>
+          <a:noFill/>
+          <a:ln/>
+        </p:spPr>
+        <p:txBody>
+          <a:bodyPr wrap="square" rtlCol="0" anchor="ctr"/>
+          <a:lstStyle/>
+          <a:p>
+            <a:pPr algn="ctr" indent="0" marL="0">
+              <a:buNone/>
+            </a:pPr>
+            <a:r>
+              <a:rPr lang="en-US" sz="1000" dirty="0">
+                <a:solidFill>
+                  <a:srgbClr val="94A3B8"/>
                 </a:solidFill>
                 <a:latin typeface="Calibri Light" pitchFamily="34" charset="0"/>
                 <a:ea typeface="Calibri Light" pitchFamily="34" charset="-122"/>
                 <a:cs typeface="Calibri Light" pitchFamily="34" charset="-120"/>
               </a:rPr>
-              <a:t>{{key_wins}}</a:t>
+              <a:t>{{chart_new_vs_returning}}</a:t>
+            </a:r>
+            <a:endParaRPr lang="en-US" sz="1000" dirty="0"/>
+          </a:p>
+        </p:txBody>
+      </p:sp>
+      <p:sp>
+        <p:nvSpPr>
+          <p:cNvPr id="6" name="Shape 4"/>
+          <p:cNvSpPr/>
+          <p:nvPr/>
+        </p:nvSpPr>
+        <p:spPr>
+          <a:xfrm>
+            <a:off x="6217920" y="1371600"/>
+            <a:ext cx="5212080" cy="2743200"/>
+          </a:xfrm>
+          <a:prstGeom prst="rect">
+            <a:avLst/>
+          </a:prstGeom>
+          <a:solidFill>
+            <a:srgbClr val="FFFFFF"/>
+          </a:solidFill>
+          <a:ln/>
+          <a:effectLst>
+            <a:outerShdw sx="100000" sy="100000" kx="0" ky="0" algn="bl" rotWithShape="0" blurRad="50800" dist="19050" dir="8100000">
+              <a:srgbClr val="000000">
+                <a:alpha val="8000"/>
+              </a:srgbClr>
+            </a:outerShdw>
+          </a:effectLst>
+        </p:spPr>
+      </p:sp>
+      <p:sp>
+        <p:nvSpPr>
+          <p:cNvPr id="7" name="Text 5"/>
+          <p:cNvSpPr/>
+          <p:nvPr/>
+        </p:nvSpPr>
+        <p:spPr>
+          <a:xfrm>
+            <a:off x="6217920" y="1371600"/>
+            <a:ext cx="5212080" cy="2743200"/>
+          </a:xfrm>
+          <a:prstGeom prst="rect">
+            <a:avLst/>
+          </a:prstGeom>
+          <a:noFill/>
+          <a:ln/>
+        </p:spPr>
+        <p:txBody>
+          <a:bodyPr wrap="square" rtlCol="0" anchor="ctr"/>
+          <a:lstStyle/>
+          <a:p>
+            <a:pPr algn="ctr" indent="0" marL="0">
+              <a:buNone/>
+            </a:pPr>
+            <a:r>
+              <a:rPr lang="en-US" sz="1000" dirty="0">
+                <a:solidFill>
+                  <a:srgbClr val="94A3B8"/>
+                </a:solidFill>
+                <a:latin typeface="Calibri Light" pitchFamily="34" charset="0"/>
+                <a:ea typeface="Calibri Light" pitchFamily="34" charset="-122"/>
+                <a:cs typeface="Calibri Light" pitchFamily="34" charset="-120"/>
+              </a:rPr>
+              <a:t>{{chart_top_countries}}</a:t>
+            </a:r>
+            <a:endParaRPr lang="en-US" sz="1000" dirty="0"/>
+          </a:p>
+        </p:txBody>
+      </p:sp>
+      <p:sp>
+        <p:nvSpPr>
+          <p:cNvPr id="8" name="Text 6"/>
+          <p:cNvSpPr/>
+          <p:nvPr/>
+        </p:nvSpPr>
+        <p:spPr>
+          <a:xfrm>
+            <a:off x="731520" y="4389120"/>
+            <a:ext cx="10698480" cy="1828800"/>
+          </a:xfrm>
+          <a:prstGeom prst="rect">
+            <a:avLst/>
+          </a:prstGeom>
+          <a:noFill/>
+          <a:ln/>
+        </p:spPr>
+        <p:txBody>
+          <a:bodyPr wrap="square" rtlCol="0" anchor="t"/>
+          <a:lstStyle/>
+          <a:p>
+            <a:pPr indent="0" marL="0">
+              <a:lnSpc>
+                <a:spcPct val="135000"/>
+              </a:lnSpc>
+              <a:buNone/>
+            </a:pPr>
+            <a:r>
+              <a:rPr lang="en-US" sz="1200" dirty="0">
+                <a:solidFill>
+                  <a:srgbClr val="334155"/>
+                </a:solidFill>
+                <a:latin typeface="Calibri Light" pitchFamily="34" charset="0"/>
+                <a:ea typeface="Calibri Light" pitchFamily="34" charset="-122"/>
+                <a:cs typeface="Calibri Light" pitchFamily="34" charset="-120"/>
+              </a:rPr>
+              <a:t>{{website_narrative}}</a:t>
             </a:r>
             <a:endParaRPr lang="en-US" sz="1200" dirty="0"/>
           </a:p>
@@ -3988,7 +7763,7 @@
       </p:sp>
       <p:sp>
         <p:nvSpPr>
-          <p:cNvPr id="6" name="Text 4"/>
+          <p:cNvPr id="9" name="Text 7"/>
           <p:cNvSpPr/>
           <p:nvPr/>
         </p:nvSpPr>
@@ -4072,34 +7847,14 @@
             <a:avLst/>
           </a:prstGeom>
           <a:solidFill>
-            <a:srgbClr val="D97706"/>
+            <a:srgbClr val="4338CA"/>
           </a:solidFill>
           <a:ln/>
         </p:spPr>
       </p:sp>
       <p:sp>
         <p:nvSpPr>
-          <p:cNvPr id="3" name="Shape 1"/>
-          <p:cNvSpPr/>
-          <p:nvPr/>
-        </p:nvSpPr>
-        <p:spPr>
-          <a:xfrm>
-            <a:off x="54864" y="0"/>
-            <a:ext cx="12106656" cy="1051560"/>
-          </a:xfrm>
-          <a:prstGeom prst="rect">
-            <a:avLst/>
-          </a:prstGeom>
-          <a:solidFill>
-            <a:srgbClr val="FFFBEB"/>
-          </a:solidFill>
-          <a:ln/>
-        </p:spPr>
-      </p:sp>
-      <p:sp>
-        <p:nvSpPr>
-          <p:cNvPr id="4" name="Text 2"/>
+          <p:cNvPr id="3" name="Text 1"/>
           <p:cNvSpPr/>
           <p:nvPr/>
         </p:nvSpPr>
@@ -4124,13 +7879,13 @@
             <a:r>
               <a:rPr lang="en-US" sz="2800" b="1" dirty="0">
                 <a:solidFill>
-                  <a:srgbClr val="92400E"/>
+                  <a:srgbClr val="0F172A"/>
                 </a:solidFill>
                 <a:latin typeface="Calibri" pitchFamily="34" charset="0"/>
                 <a:ea typeface="Calibri" pitchFamily="34" charset="-122"/>
                 <a:cs typeface="Calibri" pitchFamily="34" charset="-120"/>
               </a:rPr>
-              <a:t>Concerns &amp; Recommendations</a:t>
+              <a:t>Bounce Rate Analysis</a:t>
             </a:r>
             <a:endParaRPr lang="en-US" sz="2800" dirty="0"/>
           </a:p>
@@ -4138,6 +7893,33 @@
       </p:sp>
       <p:sp>
         <p:nvSpPr>
+          <p:cNvPr id="4" name="Shape 2"/>
+          <p:cNvSpPr/>
+          <p:nvPr/>
+        </p:nvSpPr>
+        <p:spPr>
+          <a:xfrm>
+            <a:off x="731520" y="1371600"/>
+            <a:ext cx="10698480" cy="3657600"/>
+          </a:xfrm>
+          <a:prstGeom prst="rect">
+            <a:avLst/>
+          </a:prstGeom>
+          <a:solidFill>
+            <a:srgbClr val="FFFFFF"/>
+          </a:solidFill>
+          <a:ln/>
+          <a:effectLst>
+            <a:outerShdw sx="100000" sy="100000" kx="0" ky="0" algn="bl" rotWithShape="0" blurRad="50800" dist="19050" dir="8100000">
+              <a:srgbClr val="000000">
+                <a:alpha val="8000"/>
+              </a:srgbClr>
+            </a:outerShdw>
+          </a:effectLst>
+        </p:spPr>
+      </p:sp>
+      <p:sp>
+        <p:nvSpPr>
           <p:cNvPr id="5" name="Text 3"/>
           <p:cNvSpPr/>
           <p:nvPr/>
@@ -4145,34 +7927,73 @@
         <p:spPr>
           <a:xfrm>
             <a:off x="731520" y="1371600"/>
-            <a:ext cx="10698480" cy="4572000"/>
-          </a:xfrm>
-          <a:prstGeom prst="rect">
-            <a:avLst/>
-          </a:prstGeom>
-          <a:noFill/>
-          <a:ln/>
-        </p:spPr>
-        <p:txBody>
-          <a:bodyPr wrap="square" rtlCol="0" anchor="t"/>
-          <a:lstStyle/>
-          <a:p>
-            <a:pPr indent="0" marL="0">
-              <a:lnSpc>
-                <a:spcPct val="150000"/>
-              </a:lnSpc>
-              <a:buNone/>
-            </a:pPr>
-            <a:r>
-              <a:rPr lang="en-US" sz="1200" dirty="0">
-                <a:solidFill>
-                  <a:srgbClr val="334155"/>
+            <a:ext cx="10698480" cy="3657600"/>
+          </a:xfrm>
+          <a:prstGeom prst="rect">
+            <a:avLst/>
+          </a:prstGeom>
+          <a:noFill/>
+          <a:ln/>
+        </p:spPr>
+        <p:txBody>
+          <a:bodyPr wrap="square" rtlCol="0" anchor="ctr"/>
+          <a:lstStyle/>
+          <a:p>
+            <a:pPr algn="ctr" indent="0" marL="0">
+              <a:buNone/>
+            </a:pPr>
+            <a:r>
+              <a:rPr lang="en-US" sz="1000" dirty="0">
+                <a:solidFill>
+                  <a:srgbClr val="94A3B8"/>
                 </a:solidFill>
                 <a:latin typeface="Calibri Light" pitchFamily="34" charset="0"/>
                 <a:ea typeface="Calibri Light" pitchFamily="34" charset="-122"/>
                 <a:cs typeface="Calibri Light" pitchFamily="34" charset="-120"/>
               </a:rPr>
-              <a:t>{{concerns}}</a:t>
+              <a:t>{{chart_bounce_rate}}</a:t>
+            </a:r>
+            <a:endParaRPr lang="en-US" sz="1000" dirty="0"/>
+          </a:p>
+        </p:txBody>
+      </p:sp>
+      <p:sp>
+        <p:nvSpPr>
+          <p:cNvPr id="6" name="Text 4"/>
+          <p:cNvSpPr/>
+          <p:nvPr/>
+        </p:nvSpPr>
+        <p:spPr>
+          <a:xfrm>
+            <a:off x="731520" y="5257800"/>
+            <a:ext cx="10698480" cy="1097280"/>
+          </a:xfrm>
+          <a:prstGeom prst="rect">
+            <a:avLst/>
+          </a:prstGeom>
+          <a:noFill/>
+          <a:ln/>
+        </p:spPr>
+        <p:txBody>
+          <a:bodyPr wrap="square" rtlCol="0" anchor="t"/>
+          <a:lstStyle/>
+          <a:p>
+            <a:pPr indent="0" marL="0">
+              <a:lnSpc>
+                <a:spcPct val="135000"/>
+              </a:lnSpc>
+              <a:buNone/>
+            </a:pPr>
+            <a:r>
+              <a:rPr lang="en-US" sz="1200" dirty="0">
+                <a:solidFill>
+                  <a:srgbClr val="334155"/>
+                </a:solidFill>
+                <a:latin typeface="Calibri Light" pitchFamily="34" charset="0"/>
+                <a:ea typeface="Calibri Light" pitchFamily="34" charset="-122"/>
+                <a:cs typeface="Calibri Light" pitchFamily="34" charset="-120"/>
+              </a:rPr>
+              <a:t>{{website_narrative}}</a:t>
             </a:r>
             <a:endParaRPr lang="en-US" sz="1200" dirty="0"/>
           </a:p>
@@ -4180,7 +8001,7 @@
       </p:sp>
       <p:sp>
         <p:nvSpPr>
-          <p:cNvPr id="6" name="Text 4"/>
+          <p:cNvPr id="7" name="Text 5"/>
           <p:cNvSpPr/>
           <p:nvPr/>
         </p:nvSpPr>
@@ -4302,7 +8123,7 @@
                 <a:ea typeface="Calibri" pitchFamily="34" charset="-122"/>
                 <a:cs typeface="Calibri" pitchFamily="34" charset="-120"/>
               </a:rPr>
-              <a:t>Next Steps &amp; Action Items</a:t>
+              <a:t>Paid Advertising — Meta Ads</a:t>
             </a:r>
             <a:endParaRPr lang="en-US" sz="2800" dirty="0"/>
           </a:p>
@@ -4310,76 +8131,107 @@
       </p:sp>
       <p:sp>
         <p:nvSpPr>
-          <p:cNvPr id="4" name="Text 2"/>
+          <p:cNvPr id="4" name="Shape 2"/>
           <p:cNvSpPr/>
           <p:nvPr/>
         </p:nvSpPr>
         <p:spPr>
           <a:xfrm>
             <a:off x="731520" y="1371600"/>
-            <a:ext cx="10698480" cy="3657600"/>
-          </a:xfrm>
-          <a:prstGeom prst="rect">
-            <a:avLst/>
-          </a:prstGeom>
-          <a:noFill/>
-          <a:ln/>
-        </p:spPr>
-        <p:txBody>
-          <a:bodyPr wrap="square" rtlCol="0" anchor="t"/>
-          <a:lstStyle/>
-          <a:p>
-            <a:pPr indent="0" marL="0">
-              <a:lnSpc>
-                <a:spcPct val="150000"/>
-              </a:lnSpc>
-              <a:buNone/>
-            </a:pPr>
-            <a:r>
-              <a:rPr lang="en-US" sz="1200" dirty="0">
-                <a:solidFill>
-                  <a:srgbClr val="334155"/>
+            <a:ext cx="5120640" cy="2743200"/>
+          </a:xfrm>
+          <a:prstGeom prst="rect">
+            <a:avLst/>
+          </a:prstGeom>
+          <a:solidFill>
+            <a:srgbClr val="FFFFFF"/>
+          </a:solidFill>
+          <a:ln/>
+          <a:effectLst>
+            <a:outerShdw sx="100000" sy="100000" kx="0" ky="0" algn="bl" rotWithShape="0" blurRad="50800" dist="19050" dir="8100000">
+              <a:srgbClr val="000000">
+                <a:alpha val="8000"/>
+              </a:srgbClr>
+            </a:outerShdw>
+          </a:effectLst>
+        </p:spPr>
+      </p:sp>
+      <p:sp>
+        <p:nvSpPr>
+          <p:cNvPr id="5" name="Text 3"/>
+          <p:cNvSpPr/>
+          <p:nvPr/>
+        </p:nvSpPr>
+        <p:spPr>
+          <a:xfrm>
+            <a:off x="731520" y="1371600"/>
+            <a:ext cx="5120640" cy="2743200"/>
+          </a:xfrm>
+          <a:prstGeom prst="rect">
+            <a:avLst/>
+          </a:prstGeom>
+          <a:noFill/>
+          <a:ln/>
+        </p:spPr>
+        <p:txBody>
+          <a:bodyPr wrap="square" rtlCol="0" anchor="ctr"/>
+          <a:lstStyle/>
+          <a:p>
+            <a:pPr algn="ctr" indent="0" marL="0">
+              <a:buNone/>
+            </a:pPr>
+            <a:r>
+              <a:rPr lang="en-US" sz="1000" dirty="0">
+                <a:solidFill>
+                  <a:srgbClr val="94A3B8"/>
                 </a:solidFill>
                 <a:latin typeface="Calibri Light" pitchFamily="34" charset="0"/>
                 <a:ea typeface="Calibri Light" pitchFamily="34" charset="-122"/>
                 <a:cs typeface="Calibri Light" pitchFamily="34" charset="-120"/>
               </a:rPr>
-              <a:t>{{next_steps}}</a:t>
-            </a:r>
-            <a:endParaRPr lang="en-US" sz="1200" dirty="0"/>
-          </a:p>
-        </p:txBody>
-      </p:sp>
-      <p:sp>
-        <p:nvSpPr>
-          <p:cNvPr id="5" name="Shape 3"/>
-          <p:cNvSpPr/>
-          <p:nvPr/>
-        </p:nvSpPr>
-        <p:spPr>
-          <a:xfrm>
-            <a:off x="0" y="5760720"/>
-            <a:ext cx="12161520" cy="1097280"/>
+              <a:t>{{chart_spend}}</a:t>
+            </a:r>
+            <a:endParaRPr lang="en-US" sz="1000" dirty="0"/>
+          </a:p>
+        </p:txBody>
+      </p:sp>
+      <p:sp>
+        <p:nvSpPr>
+          <p:cNvPr id="6" name="Shape 4"/>
+          <p:cNvSpPr/>
+          <p:nvPr/>
+        </p:nvSpPr>
+        <p:spPr>
+          <a:xfrm>
+            <a:off x="6217920" y="1371600"/>
+            <a:ext cx="5212080" cy="2743200"/>
           </a:xfrm>
           <a:prstGeom prst="rect">
             <a:avLst/>
           </a:prstGeom>
           <a:solidFill>
-            <a:srgbClr val="4338CA"/>
+            <a:srgbClr val="FFFFFF"/>
           </a:solidFill>
           <a:ln/>
-        </p:spPr>
-      </p:sp>
-      <p:sp>
-        <p:nvSpPr>
-          <p:cNvPr id="6" name="Text 4"/>
-          <p:cNvSpPr/>
-          <p:nvPr/>
-        </p:nvSpPr>
-        <p:spPr>
-          <a:xfrm>
-            <a:off x="731520" y="5806440"/>
-            <a:ext cx="10698480" cy="411480"/>
+          <a:effectLst>
+            <a:outerShdw sx="100000" sy="100000" kx="0" ky="0" algn="bl" rotWithShape="0" blurRad="50800" dist="19050" dir="8100000">
+              <a:srgbClr val="000000">
+                <a:alpha val="8000"/>
+              </a:srgbClr>
+            </a:outerShdw>
+          </a:effectLst>
+        </p:spPr>
+      </p:sp>
+      <p:sp>
+        <p:nvSpPr>
+          <p:cNvPr id="7" name="Text 5"/>
+          <p:cNvSpPr/>
+          <p:nvPr/>
+        </p:nvSpPr>
+        <p:spPr>
+          <a:xfrm>
+            <a:off x="6217920" y="1371600"/>
+            <a:ext cx="5212080" cy="2743200"/>
           </a:xfrm>
           <a:prstGeom prst="rect">
             <a:avLst/>
@@ -4391,60 +8243,102 @@
           <a:bodyPr wrap="square" rtlCol="0" anchor="ctr"/>
           <a:lstStyle/>
           <a:p>
-            <a:pPr indent="0" marL="0">
-              <a:buNone/>
-            </a:pPr>
-            <a:r>
-              <a:rPr lang="en-US" sz="1300" b="1" dirty="0">
-                <a:solidFill>
-                  <a:srgbClr val="FFFFFF"/>
+            <a:pPr algn="ctr" indent="0" marL="0">
+              <a:buNone/>
+            </a:pPr>
+            <a:r>
+              <a:rPr lang="en-US" sz="1000" dirty="0">
+                <a:solidFill>
+                  <a:srgbClr val="94A3B8"/>
                 </a:solidFill>
                 <a:latin typeface="Calibri Light" pitchFamily="34" charset="0"/>
                 <a:ea typeface="Calibri Light" pitchFamily="34" charset="-122"/>
                 <a:cs typeface="Calibri Light" pitchFamily="34" charset="-120"/>
               </a:rPr>
-              <a:t>Questions? Reply to this email or schedule a call.</a:t>
-            </a:r>
-            <a:endParaRPr lang="en-US" sz="1300" dirty="0"/>
-          </a:p>
-        </p:txBody>
-      </p:sp>
-      <p:sp>
-        <p:nvSpPr>
-          <p:cNvPr id="7" name="Text 5"/>
-          <p:cNvSpPr/>
-          <p:nvPr/>
-        </p:nvSpPr>
-        <p:spPr>
-          <a:xfrm>
-            <a:off x="731520" y="6263640"/>
-            <a:ext cx="10698480" cy="320040"/>
-          </a:xfrm>
-          <a:prstGeom prst="rect">
-            <a:avLst/>
-          </a:prstGeom>
-          <a:noFill/>
-          <a:ln/>
-        </p:spPr>
-        <p:txBody>
-          <a:bodyPr wrap="square" rtlCol="0" anchor="ctr"/>
+              <a:t>{{chart_campaigns}}</a:t>
+            </a:r>
+            <a:endParaRPr lang="en-US" sz="1000" dirty="0"/>
+          </a:p>
+        </p:txBody>
+      </p:sp>
+      <p:sp>
+        <p:nvSpPr>
+          <p:cNvPr id="8" name="Text 6"/>
+          <p:cNvSpPr/>
+          <p:nvPr/>
+        </p:nvSpPr>
+        <p:spPr>
+          <a:xfrm>
+            <a:off x="731520" y="4389120"/>
+            <a:ext cx="10698480" cy="1828800"/>
+          </a:xfrm>
+          <a:prstGeom prst="rect">
+            <a:avLst/>
+          </a:prstGeom>
+          <a:noFill/>
+          <a:ln/>
+        </p:spPr>
+        <p:txBody>
+          <a:bodyPr wrap="square" rtlCol="0" anchor="t"/>
           <a:lstStyle/>
           <a:p>
             <a:pPr indent="0" marL="0">
-              <a:buNone/>
-            </a:pPr>
-            <a:r>
-              <a:rPr lang="en-US" sz="1100" dirty="0">
-                <a:solidFill>
-                  <a:srgbClr val="C7D2FE"/>
+              <a:lnSpc>
+                <a:spcPct val="135000"/>
+              </a:lnSpc>
+              <a:buNone/>
+            </a:pPr>
+            <a:r>
+              <a:rPr lang="en-US" sz="1200" dirty="0">
+                <a:solidFill>
+                  <a:srgbClr val="334155"/>
                 </a:solidFill>
                 <a:latin typeface="Calibri Light" pitchFamily="34" charset="0"/>
                 <a:ea typeface="Calibri Light" pitchFamily="34" charset="-122"/>
                 <a:cs typeface="Calibri Light" pitchFamily="34" charset="-120"/>
               </a:rPr>
-              <a:t>{{agency_name}}  •  {{agency_email}}</a:t>
-            </a:r>
-            <a:endParaRPr lang="en-US" sz="1100" dirty="0"/>
+              <a:t>{{ads_narrative}}</a:t>
+            </a:r>
+            <a:endParaRPr lang="en-US" sz="1200" dirty="0"/>
+          </a:p>
+        </p:txBody>
+      </p:sp>
+      <p:sp>
+        <p:nvSpPr>
+          <p:cNvPr id="9" name="Text 7"/>
+          <p:cNvSpPr/>
+          <p:nvPr/>
+        </p:nvSpPr>
+        <p:spPr>
+          <a:xfrm>
+            <a:off x="731520" y="6510528"/>
+            <a:ext cx="10698480" cy="256032"/>
+          </a:xfrm>
+          <a:prstGeom prst="rect">
+            <a:avLst/>
+          </a:prstGeom>
+          <a:noFill/>
+          <a:ln/>
+        </p:spPr>
+        <p:txBody>
+          <a:bodyPr wrap="square" rtlCol="0" anchor="ctr"/>
+          <a:lstStyle/>
+          <a:p>
+            <a:pPr algn="l" indent="0" marL="0">
+              <a:buNone/>
+            </a:pPr>
+            <a:r>
+              <a:rPr lang="en-US" sz="800" dirty="0">
+                <a:solidFill>
+                  <a:srgbClr val="94A3B8"/>
+                </a:solidFill>
+                <a:latin typeface="Calibri Light" pitchFamily="34" charset="0"/>
+                <a:ea typeface="Calibri Light" pitchFamily="34" charset="-122"/>
+                <a:cs typeface="Calibri Light" pitchFamily="34" charset="-120"/>
+              </a:rPr>
+              <a:t>{{agency_name}}  •  Confidential  •  Page 8</a:t>
+            </a:r>
+            <a:endParaRPr lang="en-US" sz="800" dirty="0"/>
           </a:p>
         </p:txBody>
       </p:sp>
@@ -4518,7 +8412,7 @@
           <a:ln/>
         </p:spPr>
         <p:txBody>
-          <a:bodyPr wrap="square" rtlCol="0" anchor="ctr"/>
+          <a:bodyPr wrap="square" lIns="0" tIns="0" rIns="0" bIns="0" rtlCol="0" anchor="ctr"/>
           <a:lstStyle/>
           <a:p>
             <a:pPr indent="0" marL="0">
@@ -4533,7 +8427,7 @@
                 <a:ea typeface="Calibri" pitchFamily="34" charset="-122"/>
                 <a:cs typeface="Calibri" pitchFamily="34" charset="-120"/>
               </a:rPr>
-              <a:t>{{custom_section_title}}</a:t>
+              <a:t>Meta Ads — Audience</a:t>
             </a:r>
             <a:endParaRPr lang="en-US" sz="2800" dirty="0"/>
           </a:p>
@@ -4541,41 +8435,173 @@
       </p:sp>
       <p:sp>
         <p:nvSpPr>
-          <p:cNvPr id="4" name="Text 2"/>
+          <p:cNvPr id="4" name="Shape 2"/>
           <p:cNvSpPr/>
           <p:nvPr/>
         </p:nvSpPr>
         <p:spPr>
           <a:xfrm>
             <a:off x="731520" y="1371600"/>
-            <a:ext cx="10698480" cy="4572000"/>
-          </a:xfrm>
-          <a:prstGeom prst="rect">
-            <a:avLst/>
-          </a:prstGeom>
-          <a:noFill/>
-          <a:ln/>
-        </p:spPr>
-        <p:txBody>
-          <a:bodyPr wrap="square" rtlCol="0" anchor="t"/>
-          <a:lstStyle/>
-          <a:p>
-            <a:pPr indent="0" marL="0">
-              <a:lnSpc>
-                <a:spcPct val="140000"/>
-              </a:lnSpc>
-              <a:buNone/>
-            </a:pPr>
-            <a:r>
-              <a:rPr lang="en-US" sz="1200" dirty="0">
-                <a:solidFill>
-                  <a:srgbClr val="334155"/>
+            <a:ext cx="5120640" cy="2743200"/>
+          </a:xfrm>
+          <a:prstGeom prst="rect">
+            <a:avLst/>
+          </a:prstGeom>
+          <a:solidFill>
+            <a:srgbClr val="FFFFFF"/>
+          </a:solidFill>
+          <a:ln/>
+          <a:effectLst>
+            <a:outerShdw sx="100000" sy="100000" kx="0" ky="0" algn="bl" rotWithShape="0" blurRad="50800" dist="19050" dir="8100000">
+              <a:srgbClr val="000000">
+                <a:alpha val="8000"/>
+              </a:srgbClr>
+            </a:outerShdw>
+          </a:effectLst>
+        </p:spPr>
+      </p:sp>
+      <p:sp>
+        <p:nvSpPr>
+          <p:cNvPr id="5" name="Text 3"/>
+          <p:cNvSpPr/>
+          <p:nvPr/>
+        </p:nvSpPr>
+        <p:spPr>
+          <a:xfrm>
+            <a:off x="731520" y="1371600"/>
+            <a:ext cx="5120640" cy="2743200"/>
+          </a:xfrm>
+          <a:prstGeom prst="rect">
+            <a:avLst/>
+          </a:prstGeom>
+          <a:noFill/>
+          <a:ln/>
+        </p:spPr>
+        <p:txBody>
+          <a:bodyPr wrap="square" rtlCol="0" anchor="ctr"/>
+          <a:lstStyle/>
+          <a:p>
+            <a:pPr algn="ctr" indent="0" marL="0">
+              <a:buNone/>
+            </a:pPr>
+            <a:r>
+              <a:rPr lang="en-US" sz="1000" dirty="0">
+                <a:solidFill>
+                  <a:srgbClr val="94A3B8"/>
                 </a:solidFill>
                 <a:latin typeface="Calibri Light" pitchFamily="34" charset="0"/>
                 <a:ea typeface="Calibri Light" pitchFamily="34" charset="-122"/>
                 <a:cs typeface="Calibri Light" pitchFamily="34" charset="-120"/>
               </a:rPr>
-              <a:t>{{custom_section_text}}</a:t>
+              <a:t>{{chart_demographics}}</a:t>
+            </a:r>
+            <a:endParaRPr lang="en-US" sz="1000" dirty="0"/>
+          </a:p>
+        </p:txBody>
+      </p:sp>
+      <p:sp>
+        <p:nvSpPr>
+          <p:cNvPr id="6" name="Shape 4"/>
+          <p:cNvSpPr/>
+          <p:nvPr/>
+        </p:nvSpPr>
+        <p:spPr>
+          <a:xfrm>
+            <a:off x="6217920" y="1371600"/>
+            <a:ext cx="5212080" cy="2743200"/>
+          </a:xfrm>
+          <a:prstGeom prst="rect">
+            <a:avLst/>
+          </a:prstGeom>
+          <a:solidFill>
+            <a:srgbClr val="FFFFFF"/>
+          </a:solidFill>
+          <a:ln/>
+          <a:effectLst>
+            <a:outerShdw sx="100000" sy="100000" kx="0" ky="0" algn="bl" rotWithShape="0" blurRad="50800" dist="19050" dir="8100000">
+              <a:srgbClr val="000000">
+                <a:alpha val="8000"/>
+              </a:srgbClr>
+            </a:outerShdw>
+          </a:effectLst>
+        </p:spPr>
+      </p:sp>
+      <p:sp>
+        <p:nvSpPr>
+          <p:cNvPr id="7" name="Text 5"/>
+          <p:cNvSpPr/>
+          <p:nvPr/>
+        </p:nvSpPr>
+        <p:spPr>
+          <a:xfrm>
+            <a:off x="6217920" y="1371600"/>
+            <a:ext cx="5212080" cy="2743200"/>
+          </a:xfrm>
+          <a:prstGeom prst="rect">
+            <a:avLst/>
+          </a:prstGeom>
+          <a:noFill/>
+          <a:ln/>
+        </p:spPr>
+        <p:txBody>
+          <a:bodyPr wrap="square" rtlCol="0" anchor="ctr"/>
+          <a:lstStyle/>
+          <a:p>
+            <a:pPr algn="ctr" indent="0" marL="0">
+              <a:buNone/>
+            </a:pPr>
+            <a:r>
+              <a:rPr lang="en-US" sz="1000" dirty="0">
+                <a:solidFill>
+                  <a:srgbClr val="94A3B8"/>
+                </a:solidFill>
+                <a:latin typeface="Calibri Light" pitchFamily="34" charset="0"/>
+                <a:ea typeface="Calibri Light" pitchFamily="34" charset="-122"/>
+                <a:cs typeface="Calibri Light" pitchFamily="34" charset="-120"/>
+              </a:rPr>
+              <a:t>{{chart_placements}}</a:t>
+            </a:r>
+            <a:endParaRPr lang="en-US" sz="1000" dirty="0"/>
+          </a:p>
+        </p:txBody>
+      </p:sp>
+      <p:sp>
+        <p:nvSpPr>
+          <p:cNvPr id="8" name="Text 6"/>
+          <p:cNvSpPr/>
+          <p:nvPr/>
+        </p:nvSpPr>
+        <p:spPr>
+          <a:xfrm>
+            <a:off x="731520" y="4389120"/>
+            <a:ext cx="10698480" cy="1828800"/>
+          </a:xfrm>
+          <a:prstGeom prst="rect">
+            <a:avLst/>
+          </a:prstGeom>
+          <a:noFill/>
+          <a:ln/>
+        </p:spPr>
+        <p:txBody>
+          <a:bodyPr wrap="square" rtlCol="0" anchor="t"/>
+          <a:lstStyle/>
+          <a:p>
+            <a:pPr indent="0" marL="0">
+              <a:lnSpc>
+                <a:spcPct val="135000"/>
+              </a:lnSpc>
+              <a:buNone/>
+            </a:pPr>
+            <a:r>
+              <a:rPr lang="en-US" sz="1200" dirty="0">
+                <a:solidFill>
+                  <a:srgbClr val="334155"/>
+                </a:solidFill>
+                <a:latin typeface="Calibri Light" pitchFamily="34" charset="0"/>
+                <a:ea typeface="Calibri Light" pitchFamily="34" charset="-122"/>
+                <a:cs typeface="Calibri Light" pitchFamily="34" charset="-120"/>
+              </a:rPr>
+              <a:t>{{ads_narrative}}</a:t>
             </a:r>
             <a:endParaRPr lang="en-US" sz="1200" dirty="0"/>
           </a:p>
@@ -4583,7 +8609,7 @@
       </p:sp>
       <p:sp>
         <p:nvSpPr>
-          <p:cNvPr id="5" name="Text 3"/>
+          <p:cNvPr id="9" name="Text 7"/>
           <p:cNvSpPr/>
           <p:nvPr/>
         </p:nvSpPr>

--- a/backend/templates/pptx/modern_clean.pptx
+++ b/backend/templates/pptx/modern_clean.pptx
@@ -2496,6 +2496,10 @@
           </a:solidFill>
           <a:ln/>
         </p:spPr>
+        <p:txBody>
+          <a:bodyPr/>
+          <a:p/>
+        </p:txBody>
       </p:sp>
       <p:sp>
         <p:nvSpPr>
@@ -2789,6 +2793,10 @@
           </a:solidFill>
           <a:ln/>
         </p:spPr>
+        <p:txBody>
+          <a:bodyPr/>
+          <a:p/>
+        </p:txBody>
       </p:sp>
       <p:sp>
         <p:nvSpPr>
@@ -2880,6 +2888,10 @@
           </a:solidFill>
           <a:ln/>
         </p:spPr>
+        <p:txBody>
+          <a:bodyPr/>
+          <a:p/>
+        </p:txBody>
       </p:sp>
       <p:sp>
         <p:nvSpPr>
@@ -2946,6 +2958,10 @@
             </a:outerShdw>
           </a:effectLst>
         </p:spPr>
+        <p:txBody>
+          <a:bodyPr/>
+          <a:p/>
+        </p:txBody>
       </p:sp>
       <p:sp>
         <p:nvSpPr>
@@ -3118,6 +3134,10 @@
           </a:solidFill>
           <a:ln/>
         </p:spPr>
+        <p:txBody>
+          <a:bodyPr/>
+          <a:p/>
+        </p:txBody>
       </p:sp>
       <p:sp>
         <p:nvSpPr>
@@ -3184,6 +3204,10 @@
             </a:outerShdw>
           </a:effectLst>
         </p:spPr>
+        <p:txBody>
+          <a:bodyPr/>
+          <a:p/>
+        </p:txBody>
       </p:sp>
       <p:sp>
         <p:nvSpPr>
@@ -3250,6 +3274,10 @@
             </a:outerShdw>
           </a:effectLst>
         </p:spPr>
+        <p:txBody>
+          <a:bodyPr/>
+          <a:p/>
+        </p:txBody>
       </p:sp>
       <p:sp>
         <p:nvSpPr>
@@ -3422,6 +3450,10 @@
           </a:solidFill>
           <a:ln/>
         </p:spPr>
+        <p:txBody>
+          <a:bodyPr/>
+          <a:p/>
+        </p:txBody>
       </p:sp>
       <p:sp>
         <p:nvSpPr>
@@ -3488,6 +3520,10 @@
             </a:outerShdw>
           </a:effectLst>
         </p:spPr>
+        <p:txBody>
+          <a:bodyPr/>
+          <a:p/>
+        </p:txBody>
       </p:sp>
       <p:sp>
         <p:nvSpPr>
@@ -3660,6 +3696,10 @@
           </a:solidFill>
           <a:ln/>
         </p:spPr>
+        <p:txBody>
+          <a:bodyPr/>
+          <a:p/>
+        </p:txBody>
       </p:sp>
       <p:sp>
         <p:nvSpPr>
@@ -3726,6 +3766,10 @@
             </a:outerShdw>
           </a:effectLst>
         </p:spPr>
+        <p:txBody>
+          <a:bodyPr/>
+          <a:p/>
+        </p:txBody>
       </p:sp>
       <p:sp>
         <p:nvSpPr>
@@ -3792,6 +3836,10 @@
             </a:outerShdw>
           </a:effectLst>
         </p:spPr>
+        <p:txBody>
+          <a:bodyPr/>
+          <a:p/>
+        </p:txBody>
       </p:sp>
       <p:sp>
         <p:nvSpPr>
@@ -3964,6 +4012,10 @@
           </a:solidFill>
           <a:ln/>
         </p:spPr>
+        <p:txBody>
+          <a:bodyPr/>
+          <a:p/>
+        </p:txBody>
       </p:sp>
       <p:sp>
         <p:nvSpPr>
@@ -4480,8 +4532,8 @@
         </p:nvSpPr>
         <p:spPr>
           <a:xfrm>
-            <a:off x="731520" y="3657600"/>
-            <a:ext cx="10698480" cy="2377440"/>
+            <a:off x="731520" y="4023360"/>
+            <a:ext cx="10698480" cy="2350008"/>
           </a:xfrm>
           <a:prstGeom prst="rect">
             <a:avLst/>
@@ -4498,6 +4550,10 @@
             </a:outerShdw>
           </a:effectLst>
         </p:spPr>
+        <p:txBody>
+          <a:bodyPr/>
+          <a:p/>
+        </p:txBody>
       </p:sp>
       <p:sp>
         <p:nvSpPr>
@@ -4507,8 +4563,8 @@
         </p:nvSpPr>
         <p:spPr>
           <a:xfrm>
-            <a:off x="731520" y="3657600"/>
-            <a:ext cx="10698480" cy="2377440"/>
+            <a:off x="731520" y="4023360"/>
+            <a:ext cx="10698480" cy="2350008"/>
           </a:xfrm>
           <a:prstGeom prst="rect">
             <a:avLst/>
@@ -5653,6 +5709,10 @@
           </a:solidFill>
           <a:ln/>
         </p:spPr>
+        <p:txBody>
+          <a:bodyPr/>
+          <a:p/>
+        </p:txBody>
       </p:sp>
       <p:sp>
         <p:nvSpPr>
@@ -5825,6 +5885,10 @@
           </a:solidFill>
           <a:ln/>
         </p:spPr>
+        <p:txBody>
+          <a:bodyPr/>
+          <a:p/>
+        </p:txBody>
       </p:sp>
       <p:sp>
         <p:nvSpPr>
@@ -5891,6 +5955,10 @@
             </a:outerShdw>
           </a:effectLst>
         </p:spPr>
+        <p:txBody>
+          <a:bodyPr/>
+          <a:p/>
+        </p:txBody>
       </p:sp>
       <p:sp>
         <p:nvSpPr>
@@ -5911,6 +5979,10 @@
           </a:solidFill>
           <a:ln/>
         </p:spPr>
+        <p:txBody>
+          <a:bodyPr/>
+          <a:p/>
+        </p:txBody>
       </p:sp>
       <p:sp>
         <p:nvSpPr>
@@ -6055,6 +6127,10 @@
             </a:outerShdw>
           </a:effectLst>
         </p:spPr>
+        <p:txBody>
+          <a:bodyPr/>
+          <a:p/>
+        </p:txBody>
       </p:sp>
       <p:sp>
         <p:nvSpPr>
@@ -6075,6 +6151,10 @@
           </a:solidFill>
           <a:ln/>
         </p:spPr>
+        <p:txBody>
+          <a:bodyPr/>
+          <a:p/>
+        </p:txBody>
       </p:sp>
       <p:sp>
         <p:nvSpPr>
@@ -6219,6 +6299,10 @@
             </a:outerShdw>
           </a:effectLst>
         </p:spPr>
+        <p:txBody>
+          <a:bodyPr/>
+          <a:p/>
+        </p:txBody>
       </p:sp>
       <p:sp>
         <p:nvSpPr>
@@ -6239,6 +6323,10 @@
           </a:solidFill>
           <a:ln/>
         </p:spPr>
+        <p:txBody>
+          <a:bodyPr/>
+          <a:p/>
+        </p:txBody>
       </p:sp>
       <p:sp>
         <p:nvSpPr>
@@ -6383,6 +6471,10 @@
             </a:outerShdw>
           </a:effectLst>
         </p:spPr>
+        <p:txBody>
+          <a:bodyPr/>
+          <a:p/>
+        </p:txBody>
       </p:sp>
       <p:sp>
         <p:nvSpPr>
@@ -6403,6 +6495,10 @@
           </a:solidFill>
           <a:ln/>
         </p:spPr>
+        <p:txBody>
+          <a:bodyPr/>
+          <a:p/>
+        </p:txBody>
       </p:sp>
       <p:sp>
         <p:nvSpPr>
@@ -6547,6 +6643,10 @@
             </a:outerShdw>
           </a:effectLst>
         </p:spPr>
+        <p:txBody>
+          <a:bodyPr/>
+          <a:p/>
+        </p:txBody>
       </p:sp>
       <p:sp>
         <p:nvSpPr>
@@ -6567,6 +6667,10 @@
           </a:solidFill>
           <a:ln/>
         </p:spPr>
+        <p:txBody>
+          <a:bodyPr/>
+          <a:p/>
+        </p:txBody>
       </p:sp>
       <p:sp>
         <p:nvSpPr>
@@ -6711,6 +6815,10 @@
             </a:outerShdw>
           </a:effectLst>
         </p:spPr>
+        <p:txBody>
+          <a:bodyPr/>
+          <a:p/>
+        </p:txBody>
       </p:sp>
       <p:sp>
         <p:nvSpPr>
@@ -6731,6 +6839,10 @@
           </a:solidFill>
           <a:ln/>
         </p:spPr>
+        <p:txBody>
+          <a:bodyPr/>
+          <a:p/>
+        </p:txBody>
       </p:sp>
       <p:sp>
         <p:nvSpPr>
@@ -6939,6 +7051,10 @@
           </a:solidFill>
           <a:ln/>
         </p:spPr>
+        <p:txBody>
+          <a:bodyPr/>
+          <a:p/>
+        </p:txBody>
       </p:sp>
       <p:sp>
         <p:nvSpPr>
@@ -7005,6 +7121,10 @@
             </a:outerShdw>
           </a:effectLst>
         </p:spPr>
+        <p:txBody>
+          <a:bodyPr/>
+          <a:p/>
+        </p:txBody>
       </p:sp>
       <p:sp>
         <p:nvSpPr>
@@ -7071,6 +7191,10 @@
             </a:outerShdw>
           </a:effectLst>
         </p:spPr>
+        <p:txBody>
+          <a:bodyPr/>
+          <a:p/>
+        </p:txBody>
       </p:sp>
       <p:sp>
         <p:nvSpPr>
@@ -7243,6 +7367,10 @@
           </a:solidFill>
           <a:ln/>
         </p:spPr>
+        <p:txBody>
+          <a:bodyPr/>
+          <a:p/>
+        </p:txBody>
       </p:sp>
       <p:sp>
         <p:nvSpPr>
@@ -7309,6 +7437,10 @@
             </a:outerShdw>
           </a:effectLst>
         </p:spPr>
+        <p:txBody>
+          <a:bodyPr/>
+          <a:p/>
+        </p:txBody>
       </p:sp>
       <p:sp>
         <p:nvSpPr>
@@ -7375,6 +7507,10 @@
             </a:outerShdw>
           </a:effectLst>
         </p:spPr>
+        <p:txBody>
+          <a:bodyPr/>
+          <a:p/>
+        </p:txBody>
       </p:sp>
       <p:sp>
         <p:nvSpPr>
@@ -7547,6 +7683,10 @@
           </a:solidFill>
           <a:ln/>
         </p:spPr>
+        <p:txBody>
+          <a:bodyPr/>
+          <a:p/>
+        </p:txBody>
       </p:sp>
       <p:sp>
         <p:nvSpPr>
@@ -7613,6 +7753,10 @@
             </a:outerShdw>
           </a:effectLst>
         </p:spPr>
+        <p:txBody>
+          <a:bodyPr/>
+          <a:p/>
+        </p:txBody>
       </p:sp>
       <p:sp>
         <p:nvSpPr>
@@ -7679,6 +7823,10 @@
             </a:outerShdw>
           </a:effectLst>
         </p:spPr>
+        <p:txBody>
+          <a:bodyPr/>
+          <a:p/>
+        </p:txBody>
       </p:sp>
       <p:sp>
         <p:nvSpPr>
@@ -7851,6 +7999,10 @@
           </a:solidFill>
           <a:ln/>
         </p:spPr>
+        <p:txBody>
+          <a:bodyPr/>
+          <a:p/>
+        </p:txBody>
       </p:sp>
       <p:sp>
         <p:nvSpPr>
@@ -7917,6 +8069,10 @@
             </a:outerShdw>
           </a:effectLst>
         </p:spPr>
+        <p:txBody>
+          <a:bodyPr/>
+          <a:p/>
+        </p:txBody>
       </p:sp>
       <p:sp>
         <p:nvSpPr>
@@ -8089,6 +8245,10 @@
           </a:solidFill>
           <a:ln/>
         </p:spPr>
+        <p:txBody>
+          <a:bodyPr/>
+          <a:p/>
+        </p:txBody>
       </p:sp>
       <p:sp>
         <p:nvSpPr>
@@ -8155,6 +8315,10 @@
             </a:outerShdw>
           </a:effectLst>
         </p:spPr>
+        <p:txBody>
+          <a:bodyPr/>
+          <a:p/>
+        </p:txBody>
       </p:sp>
       <p:sp>
         <p:nvSpPr>
@@ -8221,6 +8385,10 @@
             </a:outerShdw>
           </a:effectLst>
         </p:spPr>
+        <p:txBody>
+          <a:bodyPr/>
+          <a:p/>
+        </p:txBody>
       </p:sp>
       <p:sp>
         <p:nvSpPr>
@@ -8393,6 +8561,10 @@
           </a:solidFill>
           <a:ln/>
         </p:spPr>
+        <p:txBody>
+          <a:bodyPr/>
+          <a:p/>
+        </p:txBody>
       </p:sp>
       <p:sp>
         <p:nvSpPr>
@@ -8459,6 +8631,10 @@
             </a:outerShdw>
           </a:effectLst>
         </p:spPr>
+        <p:txBody>
+          <a:bodyPr/>
+          <a:p/>
+        </p:txBody>
       </p:sp>
       <p:sp>
         <p:nvSpPr>
@@ -8525,6 +8701,10 @@
             </a:outerShdw>
           </a:effectLst>
         </p:spPr>
+        <p:txBody>
+          <a:bodyPr/>
+          <a:p/>
+        </p:txBody>
       </p:sp>
       <p:sp>
         <p:nvSpPr>

--- a/backend/templates/pptx/modern_clean.pptx
+++ b/backend/templates/pptx/modern_clean.pptx
@@ -2496,10 +2496,6 @@
           </a:solidFill>
           <a:ln/>
         </p:spPr>
-        <p:txBody>
-          <a:bodyPr/>
-          <a:p/>
-        </p:txBody>
       </p:sp>
       <p:sp>
         <p:nvSpPr>
@@ -2793,10 +2789,6 @@
           </a:solidFill>
           <a:ln/>
         </p:spPr>
-        <p:txBody>
-          <a:bodyPr/>
-          <a:p/>
-        </p:txBody>
       </p:sp>
       <p:sp>
         <p:nvSpPr>
@@ -2888,10 +2880,6 @@
           </a:solidFill>
           <a:ln/>
         </p:spPr>
-        <p:txBody>
-          <a:bodyPr/>
-          <a:p/>
-        </p:txBody>
       </p:sp>
       <p:sp>
         <p:nvSpPr>
@@ -2958,10 +2946,6 @@
             </a:outerShdw>
           </a:effectLst>
         </p:spPr>
-        <p:txBody>
-          <a:bodyPr/>
-          <a:p/>
-        </p:txBody>
       </p:sp>
       <p:sp>
         <p:nvSpPr>
@@ -3134,10 +3118,6 @@
           </a:solidFill>
           <a:ln/>
         </p:spPr>
-        <p:txBody>
-          <a:bodyPr/>
-          <a:p/>
-        </p:txBody>
       </p:sp>
       <p:sp>
         <p:nvSpPr>
@@ -3204,10 +3184,6 @@
             </a:outerShdw>
           </a:effectLst>
         </p:spPr>
-        <p:txBody>
-          <a:bodyPr/>
-          <a:p/>
-        </p:txBody>
       </p:sp>
       <p:sp>
         <p:nvSpPr>
@@ -3274,10 +3250,6 @@
             </a:outerShdw>
           </a:effectLst>
         </p:spPr>
-        <p:txBody>
-          <a:bodyPr/>
-          <a:p/>
-        </p:txBody>
       </p:sp>
       <p:sp>
         <p:nvSpPr>
@@ -3450,10 +3422,6 @@
           </a:solidFill>
           <a:ln/>
         </p:spPr>
-        <p:txBody>
-          <a:bodyPr/>
-          <a:p/>
-        </p:txBody>
       </p:sp>
       <p:sp>
         <p:nvSpPr>
@@ -3520,10 +3488,6 @@
             </a:outerShdw>
           </a:effectLst>
         </p:spPr>
-        <p:txBody>
-          <a:bodyPr/>
-          <a:p/>
-        </p:txBody>
       </p:sp>
       <p:sp>
         <p:nvSpPr>
@@ -3696,10 +3660,6 @@
           </a:solidFill>
           <a:ln/>
         </p:spPr>
-        <p:txBody>
-          <a:bodyPr/>
-          <a:p/>
-        </p:txBody>
       </p:sp>
       <p:sp>
         <p:nvSpPr>
@@ -3766,10 +3726,6 @@
             </a:outerShdw>
           </a:effectLst>
         </p:spPr>
-        <p:txBody>
-          <a:bodyPr/>
-          <a:p/>
-        </p:txBody>
       </p:sp>
       <p:sp>
         <p:nvSpPr>
@@ -3836,10 +3792,6 @@
             </a:outerShdw>
           </a:effectLst>
         </p:spPr>
-        <p:txBody>
-          <a:bodyPr/>
-          <a:p/>
-        </p:txBody>
       </p:sp>
       <p:sp>
         <p:nvSpPr>
@@ -4012,10 +3964,6 @@
           </a:solidFill>
           <a:ln/>
         </p:spPr>
-        <p:txBody>
-          <a:bodyPr/>
-          <a:p/>
-        </p:txBody>
       </p:sp>
       <p:sp>
         <p:nvSpPr>
@@ -4532,8 +4480,8 @@
         </p:nvSpPr>
         <p:spPr>
           <a:xfrm>
-            <a:off x="731520" y="4023360"/>
-            <a:ext cx="10698480" cy="2350008"/>
+            <a:off x="731520" y="3657600"/>
+            <a:ext cx="10698480" cy="2377440"/>
           </a:xfrm>
           <a:prstGeom prst="rect">
             <a:avLst/>
@@ -4550,10 +4498,6 @@
             </a:outerShdw>
           </a:effectLst>
         </p:spPr>
-        <p:txBody>
-          <a:bodyPr/>
-          <a:p/>
-        </p:txBody>
       </p:sp>
       <p:sp>
         <p:nvSpPr>
@@ -4563,8 +4507,8 @@
         </p:nvSpPr>
         <p:spPr>
           <a:xfrm>
-            <a:off x="731520" y="4023360"/>
-            <a:ext cx="10698480" cy="2350008"/>
+            <a:off x="731520" y="3657600"/>
+            <a:ext cx="10698480" cy="2377440"/>
           </a:xfrm>
           <a:prstGeom prst="rect">
             <a:avLst/>
@@ -5709,10 +5653,6 @@
           </a:solidFill>
           <a:ln/>
         </p:spPr>
-        <p:txBody>
-          <a:bodyPr/>
-          <a:p/>
-        </p:txBody>
       </p:sp>
       <p:sp>
         <p:nvSpPr>
@@ -5885,10 +5825,6 @@
           </a:solidFill>
           <a:ln/>
         </p:spPr>
-        <p:txBody>
-          <a:bodyPr/>
-          <a:p/>
-        </p:txBody>
       </p:sp>
       <p:sp>
         <p:nvSpPr>
@@ -5955,10 +5891,6 @@
             </a:outerShdw>
           </a:effectLst>
         </p:spPr>
-        <p:txBody>
-          <a:bodyPr/>
-          <a:p/>
-        </p:txBody>
       </p:sp>
       <p:sp>
         <p:nvSpPr>
@@ -5979,10 +5911,6 @@
           </a:solidFill>
           <a:ln/>
         </p:spPr>
-        <p:txBody>
-          <a:bodyPr/>
-          <a:p/>
-        </p:txBody>
       </p:sp>
       <p:sp>
         <p:nvSpPr>
@@ -6127,10 +6055,6 @@
             </a:outerShdw>
           </a:effectLst>
         </p:spPr>
-        <p:txBody>
-          <a:bodyPr/>
-          <a:p/>
-        </p:txBody>
       </p:sp>
       <p:sp>
         <p:nvSpPr>
@@ -6151,10 +6075,6 @@
           </a:solidFill>
           <a:ln/>
         </p:spPr>
-        <p:txBody>
-          <a:bodyPr/>
-          <a:p/>
-        </p:txBody>
       </p:sp>
       <p:sp>
         <p:nvSpPr>
@@ -6299,10 +6219,6 @@
             </a:outerShdw>
           </a:effectLst>
         </p:spPr>
-        <p:txBody>
-          <a:bodyPr/>
-          <a:p/>
-        </p:txBody>
       </p:sp>
       <p:sp>
         <p:nvSpPr>
@@ -6323,10 +6239,6 @@
           </a:solidFill>
           <a:ln/>
         </p:spPr>
-        <p:txBody>
-          <a:bodyPr/>
-          <a:p/>
-        </p:txBody>
       </p:sp>
       <p:sp>
         <p:nvSpPr>
@@ -6471,10 +6383,6 @@
             </a:outerShdw>
           </a:effectLst>
         </p:spPr>
-        <p:txBody>
-          <a:bodyPr/>
-          <a:p/>
-        </p:txBody>
       </p:sp>
       <p:sp>
         <p:nvSpPr>
@@ -6495,10 +6403,6 @@
           </a:solidFill>
           <a:ln/>
         </p:spPr>
-        <p:txBody>
-          <a:bodyPr/>
-          <a:p/>
-        </p:txBody>
       </p:sp>
       <p:sp>
         <p:nvSpPr>
@@ -6643,10 +6547,6 @@
             </a:outerShdw>
           </a:effectLst>
         </p:spPr>
-        <p:txBody>
-          <a:bodyPr/>
-          <a:p/>
-        </p:txBody>
       </p:sp>
       <p:sp>
         <p:nvSpPr>
@@ -6667,10 +6567,6 @@
           </a:solidFill>
           <a:ln/>
         </p:spPr>
-        <p:txBody>
-          <a:bodyPr/>
-          <a:p/>
-        </p:txBody>
       </p:sp>
       <p:sp>
         <p:nvSpPr>
@@ -6815,10 +6711,6 @@
             </a:outerShdw>
           </a:effectLst>
         </p:spPr>
-        <p:txBody>
-          <a:bodyPr/>
-          <a:p/>
-        </p:txBody>
       </p:sp>
       <p:sp>
         <p:nvSpPr>
@@ -6839,10 +6731,6 @@
           </a:solidFill>
           <a:ln/>
         </p:spPr>
-        <p:txBody>
-          <a:bodyPr/>
-          <a:p/>
-        </p:txBody>
       </p:sp>
       <p:sp>
         <p:nvSpPr>
@@ -7051,10 +6939,6 @@
           </a:solidFill>
           <a:ln/>
         </p:spPr>
-        <p:txBody>
-          <a:bodyPr/>
-          <a:p/>
-        </p:txBody>
       </p:sp>
       <p:sp>
         <p:nvSpPr>
@@ -7121,10 +7005,6 @@
             </a:outerShdw>
           </a:effectLst>
         </p:spPr>
-        <p:txBody>
-          <a:bodyPr/>
-          <a:p/>
-        </p:txBody>
       </p:sp>
       <p:sp>
         <p:nvSpPr>
@@ -7191,10 +7071,6 @@
             </a:outerShdw>
           </a:effectLst>
         </p:spPr>
-        <p:txBody>
-          <a:bodyPr/>
-          <a:p/>
-        </p:txBody>
       </p:sp>
       <p:sp>
         <p:nvSpPr>
@@ -7367,10 +7243,6 @@
           </a:solidFill>
           <a:ln/>
         </p:spPr>
-        <p:txBody>
-          <a:bodyPr/>
-          <a:p/>
-        </p:txBody>
       </p:sp>
       <p:sp>
         <p:nvSpPr>
@@ -7437,10 +7309,6 @@
             </a:outerShdw>
           </a:effectLst>
         </p:spPr>
-        <p:txBody>
-          <a:bodyPr/>
-          <a:p/>
-        </p:txBody>
       </p:sp>
       <p:sp>
         <p:nvSpPr>
@@ -7507,10 +7375,6 @@
             </a:outerShdw>
           </a:effectLst>
         </p:spPr>
-        <p:txBody>
-          <a:bodyPr/>
-          <a:p/>
-        </p:txBody>
       </p:sp>
       <p:sp>
         <p:nvSpPr>
@@ -7587,7 +7451,7 @@
                 <a:ea typeface="Calibri Light" pitchFamily="34" charset="-122"/>
                 <a:cs typeface="Calibri Light" pitchFamily="34" charset="-120"/>
               </a:rPr>
-              <a:t>{{website_narrative}}</a:t>
+              <a:t>{{engagement_narrative}}</a:t>
             </a:r>
             <a:endParaRPr lang="en-US" sz="1200" dirty="0"/>
           </a:p>
@@ -7683,10 +7547,6 @@
           </a:solidFill>
           <a:ln/>
         </p:spPr>
-        <p:txBody>
-          <a:bodyPr/>
-          <a:p/>
-        </p:txBody>
       </p:sp>
       <p:sp>
         <p:nvSpPr>
@@ -7753,10 +7613,6 @@
             </a:outerShdw>
           </a:effectLst>
         </p:spPr>
-        <p:txBody>
-          <a:bodyPr/>
-          <a:p/>
-        </p:txBody>
       </p:sp>
       <p:sp>
         <p:nvSpPr>
@@ -7823,10 +7679,6 @@
             </a:outerShdw>
           </a:effectLst>
         </p:spPr>
-        <p:txBody>
-          <a:bodyPr/>
-          <a:p/>
-        </p:txBody>
       </p:sp>
       <p:sp>
         <p:nvSpPr>
@@ -7999,10 +7851,6 @@
           </a:solidFill>
           <a:ln/>
         </p:spPr>
-        <p:txBody>
-          <a:bodyPr/>
-          <a:p/>
-        </p:txBody>
       </p:sp>
       <p:sp>
         <p:nvSpPr>
@@ -8069,10 +7917,6 @@
             </a:outerShdw>
           </a:effectLst>
         </p:spPr>
-        <p:txBody>
-          <a:bodyPr/>
-          <a:p/>
-        </p:txBody>
       </p:sp>
       <p:sp>
         <p:nvSpPr>
@@ -8245,10 +8089,6 @@
           </a:solidFill>
           <a:ln/>
         </p:spPr>
-        <p:txBody>
-          <a:bodyPr/>
-          <a:p/>
-        </p:txBody>
       </p:sp>
       <p:sp>
         <p:nvSpPr>
@@ -8315,10 +8155,6 @@
             </a:outerShdw>
           </a:effectLst>
         </p:spPr>
-        <p:txBody>
-          <a:bodyPr/>
-          <a:p/>
-        </p:txBody>
       </p:sp>
       <p:sp>
         <p:nvSpPr>
@@ -8385,10 +8221,6 @@
             </a:outerShdw>
           </a:effectLst>
         </p:spPr>
-        <p:txBody>
-          <a:bodyPr/>
-          <a:p/>
-        </p:txBody>
       </p:sp>
       <p:sp>
         <p:nvSpPr>
@@ -8561,10 +8393,6 @@
           </a:solidFill>
           <a:ln/>
         </p:spPr>
-        <p:txBody>
-          <a:bodyPr/>
-          <a:p/>
-        </p:txBody>
       </p:sp>
       <p:sp>
         <p:nvSpPr>
@@ -8631,10 +8459,6 @@
             </a:outerShdw>
           </a:effectLst>
         </p:spPr>
-        <p:txBody>
-          <a:bodyPr/>
-          <a:p/>
-        </p:txBody>
       </p:sp>
       <p:sp>
         <p:nvSpPr>
@@ -8701,10 +8525,6 @@
             </a:outerShdw>
           </a:effectLst>
         </p:spPr>
-        <p:txBody>
-          <a:bodyPr/>
-          <a:p/>
-        </p:txBody>
       </p:sp>
       <p:sp>
         <p:nvSpPr>

--- a/backend/templates/pptx/modern_clean.pptx
+++ b/backend/templates/pptx/modern_clean.pptx
@@ -2496,6 +2496,10 @@
           </a:solidFill>
           <a:ln/>
         </p:spPr>
+        <p:txBody>
+          <a:bodyPr/>
+          <a:p/>
+        </p:txBody>
       </p:sp>
       <p:sp>
         <p:nvSpPr>
@@ -2538,240 +2542,6 @@
       </p:sp>
       <p:sp>
         <p:nvSpPr>
-          <p:cNvPr id="4" name="Text 2"/>
-          <p:cNvSpPr/>
-          <p:nvPr/>
-        </p:nvSpPr>
-        <p:spPr>
-          <a:xfrm>
-            <a:off x="731520" y="1051560"/>
-            <a:ext cx="5486400" cy="320040"/>
-          </a:xfrm>
-          <a:prstGeom prst="rect">
-            <a:avLst/>
-          </a:prstGeom>
-          <a:noFill/>
-          <a:ln/>
-        </p:spPr>
-        <p:txBody>
-          <a:bodyPr wrap="square" rtlCol="0" anchor="ctr"/>
-          <a:lstStyle/>
-          <a:p>
-            <a:pPr indent="0" marL="0">
-              <a:buNone/>
-            </a:pPr>
-            <a:r>
-              <a:rPr lang="en-US" sz="1100" dirty="0">
-                <a:solidFill>
-                  <a:srgbClr val="C7D2FE"/>
-                </a:solidFill>
-                <a:latin typeface="Calibri Light" pitchFamily="34" charset="0"/>
-                <a:ea typeface="Calibri Light" pitchFamily="34" charset="-122"/>
-                <a:cs typeface="Calibri Light" pitchFamily="34" charset="-120"/>
-              </a:rPr>
-              <a:t>Prepared by {{agency_name}}</a:t>
-            </a:r>
-            <a:endParaRPr lang="en-US" sz="1100" dirty="0"/>
-          </a:p>
-        </p:txBody>
-      </p:sp>
-      <p:sp>
-        <p:nvSpPr>
-          <p:cNvPr id="5" name="Text 3"/>
-          <p:cNvSpPr/>
-          <p:nvPr/>
-        </p:nvSpPr>
-        <p:spPr>
-          <a:xfrm>
-            <a:off x="9601200" y="365760"/>
-            <a:ext cx="1828800" cy="914400"/>
-          </a:xfrm>
-          <a:prstGeom prst="rect">
-            <a:avLst/>
-          </a:prstGeom>
-          <a:noFill/>
-          <a:ln/>
-        </p:spPr>
-        <p:txBody>
-          <a:bodyPr wrap="square" rtlCol="0" anchor="ctr"/>
-          <a:lstStyle/>
-          <a:p>
-            <a:pPr algn="r" indent="0" marL="0">
-              <a:buNone/>
-            </a:pPr>
-            <a:r>
-              <a:rPr lang="en-US" sz="900" dirty="0">
-                <a:solidFill>
-                  <a:srgbClr val="C7D2FE"/>
-                </a:solidFill>
-                <a:latin typeface="Calibri Light" pitchFamily="34" charset="0"/>
-                <a:ea typeface="Calibri Light" pitchFamily="34" charset="-122"/>
-                <a:cs typeface="Calibri Light" pitchFamily="34" charset="-120"/>
-              </a:rPr>
-              <a:t>{{agency_logo}}</a:t>
-            </a:r>
-            <a:endParaRPr lang="en-US" sz="900" dirty="0"/>
-          </a:p>
-        </p:txBody>
-      </p:sp>
-      <p:sp>
-        <p:nvSpPr>
-          <p:cNvPr id="6" name="Text 4"/>
-          <p:cNvSpPr/>
-          <p:nvPr/>
-        </p:nvSpPr>
-        <p:spPr>
-          <a:xfrm>
-            <a:off x="731520" y="2468880"/>
-            <a:ext cx="10698480" cy="1371600"/>
-          </a:xfrm>
-          <a:prstGeom prst="rect">
-            <a:avLst/>
-          </a:prstGeom>
-          <a:noFill/>
-          <a:ln/>
-        </p:spPr>
-        <p:txBody>
-          <a:bodyPr wrap="square" rtlCol="0" anchor="ctr"/>
-          <a:lstStyle/>
-          <a:p>
-            <a:pPr indent="0" marL="0">
-              <a:buNone/>
-            </a:pPr>
-            <a:r>
-              <a:rPr lang="en-US" sz="4000" b="1" dirty="0">
-                <a:solidFill>
-                  <a:srgbClr val="0F172A"/>
-                </a:solidFill>
-                <a:latin typeface="Calibri" pitchFamily="34" charset="0"/>
-                <a:ea typeface="Calibri" pitchFamily="34" charset="-122"/>
-                <a:cs typeface="Calibri" pitchFamily="34" charset="-120"/>
-              </a:rPr>
-              <a:t>{{client_name}}</a:t>
-            </a:r>
-            <a:endParaRPr lang="en-US" sz="4000" dirty="0"/>
-          </a:p>
-        </p:txBody>
-      </p:sp>
-      <p:sp>
-        <p:nvSpPr>
-          <p:cNvPr id="7" name="Text 5"/>
-          <p:cNvSpPr/>
-          <p:nvPr/>
-        </p:nvSpPr>
-        <p:spPr>
-          <a:xfrm>
-            <a:off x="731520" y="3977640"/>
-            <a:ext cx="10698480" cy="457200"/>
-          </a:xfrm>
-          <a:prstGeom prst="rect">
-            <a:avLst/>
-          </a:prstGeom>
-          <a:noFill/>
-          <a:ln/>
-        </p:spPr>
-        <p:txBody>
-          <a:bodyPr wrap="square" rtlCol="0" anchor="ctr"/>
-          <a:lstStyle/>
-          <a:p>
-            <a:pPr indent="0" marL="0">
-              <a:buNone/>
-            </a:pPr>
-            <a:r>
-              <a:rPr lang="en-US" sz="1400" dirty="0">
-                <a:solidFill>
-                  <a:srgbClr val="64748B"/>
-                </a:solidFill>
-                <a:latin typeface="Calibri Light" pitchFamily="34" charset="0"/>
-                <a:ea typeface="Calibri Light" pitchFamily="34" charset="-122"/>
-                <a:cs typeface="Calibri Light" pitchFamily="34" charset="-120"/>
-              </a:rPr>
-              <a:t>{{report_period}}</a:t>
-            </a:r>
-            <a:endParaRPr lang="en-US" sz="1400" dirty="0"/>
-          </a:p>
-        </p:txBody>
-      </p:sp>
-      <p:sp>
-        <p:nvSpPr>
-          <p:cNvPr id="8" name="Text 6"/>
-          <p:cNvSpPr/>
-          <p:nvPr/>
-        </p:nvSpPr>
-        <p:spPr>
-          <a:xfrm>
-            <a:off x="731520" y="4526280"/>
-            <a:ext cx="10698480" cy="365760"/>
-          </a:xfrm>
-          <a:prstGeom prst="rect">
-            <a:avLst/>
-          </a:prstGeom>
-          <a:noFill/>
-          <a:ln/>
-        </p:spPr>
-        <p:txBody>
-          <a:bodyPr wrap="square" rtlCol="0" anchor="ctr"/>
-          <a:lstStyle/>
-          <a:p>
-            <a:pPr indent="0" marL="0">
-              <a:buNone/>
-            </a:pPr>
-            <a:r>
-              <a:rPr lang="en-US" sz="1200" dirty="0">
-                <a:solidFill>
-                  <a:srgbClr val="94A3B8"/>
-                </a:solidFill>
-                <a:latin typeface="Calibri Light" pitchFamily="34" charset="0"/>
-                <a:ea typeface="Calibri Light" pitchFamily="34" charset="-122"/>
-                <a:cs typeface="Calibri Light" pitchFamily="34" charset="-120"/>
-              </a:rPr>
-              <a:t>{{report_type}}</a:t>
-            </a:r>
-            <a:endParaRPr lang="en-US" sz="1200" dirty="0"/>
-          </a:p>
-        </p:txBody>
-      </p:sp>
-      <p:sp>
-        <p:nvSpPr>
-          <p:cNvPr id="9" name="Text 7"/>
-          <p:cNvSpPr/>
-          <p:nvPr/>
-        </p:nvSpPr>
-        <p:spPr>
-          <a:xfrm>
-            <a:off x="8961120" y="4114800"/>
-            <a:ext cx="2286000" cy="1371600"/>
-          </a:xfrm>
-          <a:prstGeom prst="rect">
-            <a:avLst/>
-          </a:prstGeom>
-          <a:noFill/>
-          <a:ln/>
-        </p:spPr>
-        <p:txBody>
-          <a:bodyPr wrap="square" rtlCol="0" anchor="ctr"/>
-          <a:lstStyle/>
-          <a:p>
-            <a:pPr algn="ctr" indent="0" marL="0">
-              <a:buNone/>
-            </a:pPr>
-            <a:r>
-              <a:rPr lang="en-US" sz="900" dirty="0">
-                <a:solidFill>
-                  <a:srgbClr val="94A3B8"/>
-                </a:solidFill>
-                <a:latin typeface="Calibri Light" pitchFamily="34" charset="0"/>
-                <a:ea typeface="Calibri Light" pitchFamily="34" charset="-122"/>
-                <a:cs typeface="Calibri Light" pitchFamily="34" charset="-120"/>
-              </a:rPr>
-              <a:t>{{client_logo}}</a:t>
-            </a:r>
-            <a:endParaRPr lang="en-US" sz="900" dirty="0"/>
-          </a:p>
-        </p:txBody>
-      </p:sp>
-      <p:sp>
-        <p:nvSpPr>
           <p:cNvPr id="10" name="Shape 8"/>
           <p:cNvSpPr/>
           <p:nvPr/>
@@ -2789,44 +2559,9 @@
           </a:solidFill>
           <a:ln/>
         </p:spPr>
-      </p:sp>
-      <p:sp>
-        <p:nvSpPr>
-          <p:cNvPr id="11" name="Text 9"/>
-          <p:cNvSpPr/>
-          <p:nvPr/>
-        </p:nvSpPr>
-        <p:spPr>
-          <a:xfrm>
-            <a:off x="731520" y="6446520"/>
-            <a:ext cx="10698480" cy="274320"/>
-          </a:xfrm>
-          <a:prstGeom prst="rect">
-            <a:avLst/>
-          </a:prstGeom>
-          <a:noFill/>
-          <a:ln/>
-        </p:spPr>
-        <p:txBody>
-          <a:bodyPr wrap="square" rtlCol="0" anchor="ctr"/>
-          <a:lstStyle/>
-          <a:p>
-            <a:pPr indent="0" marL="0">
-              <a:buNone/>
-            </a:pPr>
-            <a:r>
-              <a:rPr lang="en-US" sz="900" dirty="0">
-                <a:solidFill>
-                  <a:srgbClr val="94A3B8"/>
-                </a:solidFill>
-                <a:latin typeface="Calibri Light" pitchFamily="34" charset="0"/>
-                <a:ea typeface="Calibri Light" pitchFamily="34" charset="-122"/>
-                <a:cs typeface="Calibri Light" pitchFamily="34" charset="-120"/>
-              </a:rPr>
-              <a:t>{{agency_name}}</a:t>
-            </a:r>
-            <a:endParaRPr lang="en-US" sz="900" dirty="0"/>
-          </a:p>
+        <p:txBody>
+          <a:bodyPr/>
+          <a:p/>
         </p:txBody>
       </p:sp>
     </p:spTree>
